--- a/modules/week01/eds-213_intro.pptx
+++ b/modules/week01/eds-213_intro.pptx
@@ -4462,7 +4462,7 @@
           <a:p>
             <a:r>
               <a:rPr lang="en-US" dirty="0"/>
-              <a:t>EDS-213, v2025</a:t>
+              <a:t>EDS-213, v2026</a:t>
             </a:r>
           </a:p>
           <a:p>
@@ -4683,9 +4683,14 @@
             </a:r>
           </a:p>
           <a:p>
-            <a:pPr>
-              <a:buFontTx/>
-              <a:buChar char="-"/>
+            <a:pPr marL="0" indent="0">
+              <a:buNone/>
+            </a:pPr>
+            <a:endParaRPr lang="en-US" sz="3200" dirty="0"/>
+          </a:p>
+          <a:p>
+            <a:pPr marL="0" indent="0">
+              <a:buNone/>
             </a:pPr>
             <a:r>
               <a:rPr lang="en-US" sz="3200" dirty="0"/>
@@ -4693,9 +4698,8 @@
             </a:r>
           </a:p>
           <a:p>
-            <a:pPr>
-              <a:buFontTx/>
-              <a:buChar char="-"/>
+            <a:pPr marL="0" indent="0">
+              <a:buNone/>
             </a:pPr>
             <a:r>
               <a:rPr lang="en-US" sz="3200" dirty="0"/>
@@ -4809,7 +4813,7 @@
             </a:pPr>
             <a:r>
               <a:rPr lang="en-US" sz="3200" dirty="0"/>
-              <a:t>Technical concepts (database, data modeling)</a:t>
+              <a:t>Technical concepts (database, data modeling, …)</a:t>
             </a:r>
           </a:p>
           <a:p>

--- a/modules/week01/eds-213_intro.pptx
+++ b/modules/week01/eds-213_intro.pptx
@@ -10,16 +10,16 @@
   <p:sldIdLst>
     <p:sldId id="256" r:id="rId2"/>
     <p:sldId id="269" r:id="rId3"/>
-    <p:sldId id="261" r:id="rId4"/>
-    <p:sldId id="260" r:id="rId5"/>
+    <p:sldId id="260" r:id="rId4"/>
+    <p:sldId id="261" r:id="rId5"/>
     <p:sldId id="257" r:id="rId6"/>
     <p:sldId id="258" r:id="rId7"/>
     <p:sldId id="265" r:id="rId8"/>
     <p:sldId id="259" r:id="rId9"/>
     <p:sldId id="262" r:id="rId10"/>
-    <p:sldId id="268" r:id="rId11"/>
-    <p:sldId id="267" r:id="rId12"/>
-    <p:sldId id="266" r:id="rId13"/>
+    <p:sldId id="266" r:id="rId11"/>
+    <p:sldId id="268" r:id="rId12"/>
+    <p:sldId id="267" r:id="rId13"/>
     <p:sldId id="263" r:id="rId14"/>
     <p:sldId id="264" r:id="rId15"/>
   </p:sldIdLst>
@@ -210,7 +210,7 @@
           <a:p>
             <a:fld id="{3A4C8354-9C6A-2345-9692-7D07D6D01EC8}" type="datetimeFigureOut">
               <a:rPr lang="en-US" smtClean="0"/>
-              <a:t>3/25/26</a:t>
+              <a:t>3/29/26</a:t>
             </a:fld>
             <a:endParaRPr lang="en-US"/>
           </a:p>
@@ -646,7 +646,7 @@
           <a:p>
             <a:fld id="{DA4D6545-D7FC-9449-9EC8-33A44A19CA6F}" type="slidenum">
               <a:rPr lang="en-US" smtClean="0"/>
-              <a:t>4</a:t>
+              <a:t>3</a:t>
             </a:fld>
             <a:endParaRPr lang="en-US"/>
           </a:p>
@@ -1072,7 +1072,7 @@
           <a:p>
             <a:fld id="{DA4D6545-D7FC-9449-9EC8-33A44A19CA6F}" type="slidenum">
               <a:rPr lang="en-US" smtClean="0"/>
-              <a:t>11</a:t>
+              <a:t>10</a:t>
             </a:fld>
             <a:endParaRPr lang="en-US"/>
           </a:p>
@@ -1081,7 +1081,7 @@
     </p:spTree>
     <p:extLst>
       <p:ext uri="{BB962C8B-B14F-4D97-AF65-F5344CB8AC3E}">
-        <p14:creationId xmlns:p14="http://schemas.microsoft.com/office/powerpoint/2010/main" val="1529208175"/>
+        <p14:creationId xmlns:p14="http://schemas.microsoft.com/office/powerpoint/2010/main" val="2292400134"/>
       </p:ext>
     </p:extLst>
   </p:cSld>
@@ -1165,7 +1165,7 @@
     </p:spTree>
     <p:extLst>
       <p:ext uri="{BB962C8B-B14F-4D97-AF65-F5344CB8AC3E}">
-        <p14:creationId xmlns:p14="http://schemas.microsoft.com/office/powerpoint/2010/main" val="2292400134"/>
+        <p14:creationId xmlns:p14="http://schemas.microsoft.com/office/powerpoint/2010/main" val="1529208175"/>
       </p:ext>
     </p:extLst>
   </p:cSld>
@@ -1322,7 +1322,7 @@
           <a:p>
             <a:fld id="{C094C93D-2F9A-5447-8FDC-662A08F74486}" type="datetimeFigureOut">
               <a:rPr lang="en-US" smtClean="0"/>
-              <a:t>3/25/26</a:t>
+              <a:t>3/29/26</a:t>
             </a:fld>
             <a:endParaRPr lang="en-US"/>
           </a:p>
@@ -1520,7 +1520,7 @@
           <a:p>
             <a:fld id="{C094C93D-2F9A-5447-8FDC-662A08F74486}" type="datetimeFigureOut">
               <a:rPr lang="en-US" smtClean="0"/>
-              <a:t>3/25/26</a:t>
+              <a:t>3/29/26</a:t>
             </a:fld>
             <a:endParaRPr lang="en-US"/>
           </a:p>
@@ -1728,7 +1728,7 @@
           <a:p>
             <a:fld id="{C094C93D-2F9A-5447-8FDC-662A08F74486}" type="datetimeFigureOut">
               <a:rPr lang="en-US" smtClean="0"/>
-              <a:t>3/25/26</a:t>
+              <a:t>3/29/26</a:t>
             </a:fld>
             <a:endParaRPr lang="en-US"/>
           </a:p>
@@ -1926,7 +1926,7 @@
           <a:p>
             <a:fld id="{C094C93D-2F9A-5447-8FDC-662A08F74486}" type="datetimeFigureOut">
               <a:rPr lang="en-US" smtClean="0"/>
-              <a:t>3/25/26</a:t>
+              <a:t>3/29/26</a:t>
             </a:fld>
             <a:endParaRPr lang="en-US"/>
           </a:p>
@@ -2201,7 +2201,7 @@
           <a:p>
             <a:fld id="{C094C93D-2F9A-5447-8FDC-662A08F74486}" type="datetimeFigureOut">
               <a:rPr lang="en-US" smtClean="0"/>
-              <a:t>3/25/26</a:t>
+              <a:t>3/29/26</a:t>
             </a:fld>
             <a:endParaRPr lang="en-US"/>
           </a:p>
@@ -2466,7 +2466,7 @@
           <a:p>
             <a:fld id="{C094C93D-2F9A-5447-8FDC-662A08F74486}" type="datetimeFigureOut">
               <a:rPr lang="en-US" smtClean="0"/>
-              <a:t>3/25/26</a:t>
+              <a:t>3/29/26</a:t>
             </a:fld>
             <a:endParaRPr lang="en-US"/>
           </a:p>
@@ -2878,7 +2878,7 @@
           <a:p>
             <a:fld id="{C094C93D-2F9A-5447-8FDC-662A08F74486}" type="datetimeFigureOut">
               <a:rPr lang="en-US" smtClean="0"/>
-              <a:t>3/25/26</a:t>
+              <a:t>3/29/26</a:t>
             </a:fld>
             <a:endParaRPr lang="en-US"/>
           </a:p>
@@ -3019,7 +3019,7 @@
           <a:p>
             <a:fld id="{C094C93D-2F9A-5447-8FDC-662A08F74486}" type="datetimeFigureOut">
               <a:rPr lang="en-US" smtClean="0"/>
-              <a:t>3/25/26</a:t>
+              <a:t>3/29/26</a:t>
             </a:fld>
             <a:endParaRPr lang="en-US"/>
           </a:p>
@@ -3132,7 +3132,7 @@
           <a:p>
             <a:fld id="{C094C93D-2F9A-5447-8FDC-662A08F74486}" type="datetimeFigureOut">
               <a:rPr lang="en-US" smtClean="0"/>
-              <a:t>3/25/26</a:t>
+              <a:t>3/29/26</a:t>
             </a:fld>
             <a:endParaRPr lang="en-US"/>
           </a:p>
@@ -3443,7 +3443,7 @@
           <a:p>
             <a:fld id="{C094C93D-2F9A-5447-8FDC-662A08F74486}" type="datetimeFigureOut">
               <a:rPr lang="en-US" smtClean="0"/>
-              <a:t>3/25/26</a:t>
+              <a:t>3/29/26</a:t>
             </a:fld>
             <a:endParaRPr lang="en-US"/>
           </a:p>
@@ -3731,7 +3731,7 @@
           <a:p>
             <a:fld id="{C094C93D-2F9A-5447-8FDC-662A08F74486}" type="datetimeFigureOut">
               <a:rPr lang="en-US" smtClean="0"/>
-              <a:t>3/25/26</a:t>
+              <a:t>3/29/26</a:t>
             </a:fld>
             <a:endParaRPr lang="en-US"/>
           </a:p>
@@ -3972,7 +3972,7 @@
           <a:p>
             <a:fld id="{C094C93D-2F9A-5447-8FDC-662A08F74486}" type="datetimeFigureOut">
               <a:rPr lang="en-US" smtClean="0"/>
-              <a:t>3/25/26</a:t>
+              <a:t>3/29/26</a:t>
             </a:fld>
             <a:endParaRPr lang="en-US"/>
           </a:p>
@@ -4606,6 +4606,2389 @@
         <p:cNvPr id="1" name="">
           <a:extLst>
             <a:ext uri="{FF2B5EF4-FFF2-40B4-BE49-F238E27FC236}">
+              <a16:creationId xmlns:a16="http://schemas.microsoft.com/office/drawing/2014/main" id="{CB0F8E8C-3FC9-6849-D243-9EB38FDC010F}"/>
+            </a:ext>
+          </a:extLst>
+        </p:cNvPr>
+        <p:cNvGrpSpPr/>
+        <p:nvPr/>
+      </p:nvGrpSpPr>
+      <p:grpSpPr>
+        <a:xfrm>
+          <a:off x="0" y="0"/>
+          <a:ext cx="0" cy="0"/>
+          <a:chOff x="0" y="0"/>
+          <a:chExt cx="0" cy="0"/>
+        </a:xfrm>
+      </p:grpSpPr>
+      <p:sp>
+        <p:nvSpPr>
+          <p:cNvPr id="2" name="Title 1">
+            <a:extLst>
+              <a:ext uri="{FF2B5EF4-FFF2-40B4-BE49-F238E27FC236}">
+                <a16:creationId xmlns:a16="http://schemas.microsoft.com/office/drawing/2014/main" id="{8B785528-3FE0-6384-6DC2-4F38F55F19EA}"/>
+              </a:ext>
+            </a:extLst>
+          </p:cNvPr>
+          <p:cNvSpPr>
+            <a:spLocks noGrp="1"/>
+          </p:cNvSpPr>
+          <p:nvPr>
+            <p:ph type="title"/>
+          </p:nvPr>
+        </p:nvSpPr>
+        <p:spPr/>
+        <p:txBody>
+          <a:bodyPr/>
+          <a:lstStyle/>
+          <a:p>
+            <a:r>
+              <a:rPr lang="en-US" dirty="0">
+                <a:solidFill>
+                  <a:srgbClr val="002060"/>
+                </a:solidFill>
+              </a:rPr>
+              <a:t>Assignments</a:t>
+            </a:r>
+          </a:p>
+        </p:txBody>
+      </p:sp>
+      <p:graphicFrame>
+        <p:nvGraphicFramePr>
+          <p:cNvPr id="4" name="Content Placeholder 3">
+            <a:extLst>
+              <a:ext uri="{FF2B5EF4-FFF2-40B4-BE49-F238E27FC236}">
+                <a16:creationId xmlns:a16="http://schemas.microsoft.com/office/drawing/2014/main" id="{7A8241B8-BCF4-D1CF-2ECB-715308782461}"/>
+              </a:ext>
+            </a:extLst>
+          </p:cNvPr>
+          <p:cNvGraphicFramePr>
+            <a:graphicFrameLocks noGrp="1"/>
+          </p:cNvGraphicFramePr>
+          <p:nvPr>
+            <p:ph idx="1"/>
+            <p:extLst>
+              <p:ext uri="{D42A27DB-BD31-4B8C-83A1-F6EECF244321}">
+                <p14:modId xmlns:p14="http://schemas.microsoft.com/office/powerpoint/2010/main" val="1707557780"/>
+              </p:ext>
+            </p:extLst>
+          </p:nvPr>
+        </p:nvGraphicFramePr>
+        <p:xfrm>
+          <a:off x="4495800" y="457200"/>
+          <a:ext cx="7162801" cy="6104027"/>
+        </p:xfrm>
+        <a:graphic>
+          <a:graphicData uri="http://schemas.openxmlformats.org/drawingml/2006/table">
+            <a:tbl>
+              <a:tblPr/>
+              <a:tblGrid>
+                <a:gridCol w="1143000">
+                  <a:extLst>
+                    <a:ext uri="{9D8B030D-6E8A-4147-A177-3AD203B41FA5}">
+                      <a16:colId xmlns:a16="http://schemas.microsoft.com/office/drawing/2014/main" val="3810534210"/>
+                    </a:ext>
+                  </a:extLst>
+                </a:gridCol>
+                <a:gridCol w="4800600">
+                  <a:extLst>
+                    <a:ext uri="{9D8B030D-6E8A-4147-A177-3AD203B41FA5}">
+                      <a16:colId xmlns:a16="http://schemas.microsoft.com/office/drawing/2014/main" val="2989509016"/>
+                    </a:ext>
+                  </a:extLst>
+                </a:gridCol>
+                <a:gridCol w="1219201">
+                  <a:extLst>
+                    <a:ext uri="{9D8B030D-6E8A-4147-A177-3AD203B41FA5}">
+                      <a16:colId xmlns:a16="http://schemas.microsoft.com/office/drawing/2014/main" val="1346928536"/>
+                    </a:ext>
+                  </a:extLst>
+                </a:gridCol>
+              </a:tblGrid>
+              <a:tr h="576660">
+                <a:tc>
+                  <a:txBody>
+                    <a:bodyPr/>
+                    <a:lstStyle/>
+                    <a:p>
+                      <a:pPr algn="ctr" rtl="0" fontAlgn="b"/>
+                      <a:r>
+                        <a:rPr lang="en-US" sz="2400" b="1" dirty="0">
+                          <a:effectLst/>
+                        </a:rPr>
+                        <a:t>Week</a:t>
+                      </a:r>
+                    </a:p>
+                  </a:txBody>
+                  <a:tcPr marL="27196" marR="27196" marT="18131" marB="18131" anchor="b">
+                    <a:lnL w="12700" cap="flat" cmpd="sng" algn="ctr">
+                      <a:solidFill>
+                        <a:schemeClr val="tx1"/>
+                      </a:solidFill>
+                      <a:prstDash val="solid"/>
+                      <a:round/>
+                      <a:headEnd type="none" w="med" len="med"/>
+                      <a:tailEnd type="none" w="med" len="med"/>
+                    </a:lnL>
+                    <a:lnR w="9525" cap="flat" cmpd="sng" algn="ctr">
+                      <a:noFill/>
+                      <a:prstDash val="solid"/>
+                      <a:round/>
+                      <a:headEnd type="none" w="med" len="med"/>
+                      <a:tailEnd type="none" w="med" len="med"/>
+                    </a:lnR>
+                    <a:lnT w="12700" cap="flat" cmpd="sng" algn="ctr">
+                      <a:solidFill>
+                        <a:schemeClr val="tx1"/>
+                      </a:solidFill>
+                      <a:prstDash val="solid"/>
+                      <a:round/>
+                      <a:headEnd type="none" w="med" len="med"/>
+                      <a:tailEnd type="none" w="med" len="med"/>
+                    </a:lnT>
+                    <a:lnB w="12700" cap="flat" cmpd="sng" algn="ctr">
+                      <a:solidFill>
+                        <a:schemeClr val="tx1"/>
+                      </a:solidFill>
+                      <a:prstDash val="solid"/>
+                      <a:round/>
+                      <a:headEnd type="none" w="med" len="med"/>
+                      <a:tailEnd type="none" w="med" len="med"/>
+                    </a:lnB>
+                    <a:lnTlToBr w="12700" cmpd="sng">
+                      <a:noFill/>
+                      <a:prstDash val="solid"/>
+                    </a:lnTlToBr>
+                    <a:lnBlToTr w="12700" cmpd="sng">
+                      <a:noFill/>
+                      <a:prstDash val="solid"/>
+                    </a:lnBlToTr>
+                    <a:solidFill>
+                      <a:srgbClr val="D9EAD3"/>
+                    </a:solidFill>
+                  </a:tcPr>
+                </a:tc>
+                <a:tc>
+                  <a:txBody>
+                    <a:bodyPr/>
+                    <a:lstStyle/>
+                    <a:p>
+                      <a:pPr rtl="0" fontAlgn="b"/>
+                      <a:r>
+                        <a:rPr lang="en-US" sz="2400" b="1" dirty="0">
+                          <a:effectLst/>
+                        </a:rPr>
+                        <a:t>Assignment</a:t>
+                      </a:r>
+                    </a:p>
+                  </a:txBody>
+                  <a:tcPr marL="27196" marR="27196" marT="18131" marB="18131" anchor="b">
+                    <a:lnL w="9525" cap="flat" cmpd="sng" algn="ctr">
+                      <a:noFill/>
+                      <a:prstDash val="solid"/>
+                      <a:round/>
+                      <a:headEnd type="none" w="med" len="med"/>
+                      <a:tailEnd type="none" w="med" len="med"/>
+                    </a:lnL>
+                    <a:lnR w="9525" cap="flat" cmpd="sng" algn="ctr">
+                      <a:noFill/>
+                      <a:prstDash val="solid"/>
+                      <a:round/>
+                      <a:headEnd type="none" w="med" len="med"/>
+                      <a:tailEnd type="none" w="med" len="med"/>
+                    </a:lnR>
+                    <a:lnT w="12700" cap="flat" cmpd="sng" algn="ctr">
+                      <a:solidFill>
+                        <a:schemeClr val="tx1"/>
+                      </a:solidFill>
+                      <a:prstDash val="solid"/>
+                      <a:round/>
+                      <a:headEnd type="none" w="med" len="med"/>
+                      <a:tailEnd type="none" w="med" len="med"/>
+                    </a:lnT>
+                    <a:lnB w="12700" cap="flat" cmpd="sng" algn="ctr">
+                      <a:solidFill>
+                        <a:schemeClr val="tx1"/>
+                      </a:solidFill>
+                      <a:prstDash val="solid"/>
+                      <a:round/>
+                      <a:headEnd type="none" w="med" len="med"/>
+                      <a:tailEnd type="none" w="med" len="med"/>
+                    </a:lnB>
+                    <a:lnTlToBr w="12700" cmpd="sng">
+                      <a:noFill/>
+                      <a:prstDash val="solid"/>
+                    </a:lnTlToBr>
+                    <a:lnBlToTr w="12700" cmpd="sng">
+                      <a:noFill/>
+                      <a:prstDash val="solid"/>
+                    </a:lnBlToTr>
+                    <a:solidFill>
+                      <a:srgbClr val="D9EAD3"/>
+                    </a:solidFill>
+                  </a:tcPr>
+                </a:tc>
+                <a:tc>
+                  <a:txBody>
+                    <a:bodyPr/>
+                    <a:lstStyle/>
+                    <a:p>
+                      <a:pPr rtl="0" fontAlgn="b"/>
+                      <a:r>
+                        <a:rPr lang="en-US" sz="2400" b="1" dirty="0">
+                          <a:effectLst/>
+                        </a:rPr>
+                        <a:t>Points</a:t>
+                      </a:r>
+                    </a:p>
+                  </a:txBody>
+                  <a:tcPr marL="27196" marR="27196" marT="18131" marB="18131" anchor="b">
+                    <a:lnL w="9525" cap="flat" cmpd="sng" algn="ctr">
+                      <a:noFill/>
+                      <a:prstDash val="solid"/>
+                      <a:round/>
+                      <a:headEnd type="none" w="med" len="med"/>
+                      <a:tailEnd type="none" w="med" len="med"/>
+                    </a:lnL>
+                    <a:lnR w="12700" cap="flat" cmpd="sng" algn="ctr">
+                      <a:solidFill>
+                        <a:schemeClr val="tx1"/>
+                      </a:solidFill>
+                      <a:prstDash val="solid"/>
+                      <a:round/>
+                      <a:headEnd type="none" w="med" len="med"/>
+                      <a:tailEnd type="none" w="med" len="med"/>
+                    </a:lnR>
+                    <a:lnT w="12700" cap="flat" cmpd="sng" algn="ctr">
+                      <a:solidFill>
+                        <a:schemeClr val="tx1"/>
+                      </a:solidFill>
+                      <a:prstDash val="solid"/>
+                      <a:round/>
+                      <a:headEnd type="none" w="med" len="med"/>
+                      <a:tailEnd type="none" w="med" len="med"/>
+                    </a:lnT>
+                    <a:lnB w="12700" cap="flat" cmpd="sng" algn="ctr">
+                      <a:solidFill>
+                        <a:schemeClr val="tx1"/>
+                      </a:solidFill>
+                      <a:prstDash val="solid"/>
+                      <a:round/>
+                      <a:headEnd type="none" w="med" len="med"/>
+                      <a:tailEnd type="none" w="med" len="med"/>
+                    </a:lnB>
+                    <a:lnTlToBr w="12700" cmpd="sng">
+                      <a:noFill/>
+                      <a:prstDash val="solid"/>
+                    </a:lnTlToBr>
+                    <a:lnBlToTr w="12700" cmpd="sng">
+                      <a:noFill/>
+                      <a:prstDash val="solid"/>
+                    </a:lnBlToTr>
+                    <a:solidFill>
+                      <a:srgbClr val="D9EAD3"/>
+                    </a:solidFill>
+                  </a:tcPr>
+                </a:tc>
+                <a:extLst>
+                  <a:ext uri="{0D108BD9-81ED-4DB2-BD59-A6C34878D82A}">
+                    <a16:rowId xmlns:a16="http://schemas.microsoft.com/office/drawing/2014/main" val="827076816"/>
+                  </a:ext>
+                </a:extLst>
+              </a:tr>
+              <a:tr h="407104">
+                <a:tc>
+                  <a:txBody>
+                    <a:bodyPr/>
+                    <a:lstStyle/>
+                    <a:p>
+                      <a:pPr algn="ctr" rtl="0" fontAlgn="b"/>
+                      <a:r>
+                        <a:rPr lang="en-US" sz="2400" dirty="0">
+                          <a:effectLst/>
+                        </a:rPr>
+                        <a:t>1</a:t>
+                      </a:r>
+                    </a:p>
+                  </a:txBody>
+                  <a:tcPr marL="27196" marR="27196" marT="18131" marB="18131" anchor="b">
+                    <a:lnL w="12700" cap="flat" cmpd="sng" algn="ctr">
+                      <a:solidFill>
+                        <a:schemeClr val="tx1"/>
+                      </a:solidFill>
+                      <a:prstDash val="solid"/>
+                      <a:round/>
+                      <a:headEnd type="none" w="med" len="med"/>
+                      <a:tailEnd type="none" w="med" len="med"/>
+                    </a:lnL>
+                    <a:lnR w="9525" cap="flat" cmpd="sng" algn="ctr">
+                      <a:noFill/>
+                      <a:prstDash val="solid"/>
+                      <a:round/>
+                      <a:headEnd type="none" w="med" len="med"/>
+                      <a:tailEnd type="none" w="med" len="med"/>
+                    </a:lnR>
+                    <a:lnT w="12700" cap="flat" cmpd="sng" algn="ctr">
+                      <a:solidFill>
+                        <a:schemeClr val="tx1"/>
+                      </a:solidFill>
+                      <a:prstDash val="solid"/>
+                      <a:round/>
+                      <a:headEnd type="none" w="med" len="med"/>
+                      <a:tailEnd type="none" w="med" len="med"/>
+                    </a:lnT>
+                    <a:lnB w="12700" cap="flat" cmpd="sng" algn="ctr">
+                      <a:solidFill>
+                        <a:schemeClr val="tx1"/>
+                      </a:solidFill>
+                      <a:prstDash val="solid"/>
+                      <a:round/>
+                      <a:headEnd type="none" w="med" len="med"/>
+                      <a:tailEnd type="none" w="med" len="med"/>
+                    </a:lnB>
+                    <a:lnTlToBr w="12700" cmpd="sng">
+                      <a:noFill/>
+                      <a:prstDash val="solid"/>
+                    </a:lnTlToBr>
+                    <a:lnBlToTr w="12700" cmpd="sng">
+                      <a:noFill/>
+                      <a:prstDash val="solid"/>
+                    </a:lnBlToTr>
+                    <a:noFill/>
+                  </a:tcPr>
+                </a:tc>
+                <a:tc>
+                  <a:txBody>
+                    <a:bodyPr/>
+                    <a:lstStyle/>
+                    <a:p>
+                      <a:pPr rtl="0" fontAlgn="b"/>
+                      <a:r>
+                        <a:rPr lang="en-US" sz="2400" dirty="0">
+                          <a:effectLst/>
+                        </a:rPr>
+                        <a:t>Data Modeling</a:t>
+                      </a:r>
+                    </a:p>
+                  </a:txBody>
+                  <a:tcPr marL="27196" marR="27196" marT="18131" marB="18131" anchor="b">
+                    <a:lnL w="9525" cap="flat" cmpd="sng" algn="ctr">
+                      <a:noFill/>
+                      <a:prstDash val="solid"/>
+                      <a:round/>
+                      <a:headEnd type="none" w="med" len="med"/>
+                      <a:tailEnd type="none" w="med" len="med"/>
+                    </a:lnL>
+                    <a:lnR w="9525" cap="flat" cmpd="sng" algn="ctr">
+                      <a:noFill/>
+                      <a:prstDash val="solid"/>
+                      <a:round/>
+                      <a:headEnd type="none" w="med" len="med"/>
+                      <a:tailEnd type="none" w="med" len="med"/>
+                    </a:lnR>
+                    <a:lnT w="12700" cap="flat" cmpd="sng" algn="ctr">
+                      <a:solidFill>
+                        <a:schemeClr val="tx1"/>
+                      </a:solidFill>
+                      <a:prstDash val="solid"/>
+                      <a:round/>
+                      <a:headEnd type="none" w="med" len="med"/>
+                      <a:tailEnd type="none" w="med" len="med"/>
+                    </a:lnT>
+                    <a:lnB w="12700" cap="flat" cmpd="sng" algn="ctr">
+                      <a:solidFill>
+                        <a:schemeClr val="tx1"/>
+                      </a:solidFill>
+                      <a:prstDash val="solid"/>
+                      <a:round/>
+                      <a:headEnd type="none" w="med" len="med"/>
+                      <a:tailEnd type="none" w="med" len="med"/>
+                    </a:lnB>
+                    <a:lnTlToBr w="12700" cmpd="sng">
+                      <a:noFill/>
+                      <a:prstDash val="solid"/>
+                    </a:lnTlToBr>
+                    <a:lnBlToTr w="12700" cmpd="sng">
+                      <a:noFill/>
+                      <a:prstDash val="solid"/>
+                    </a:lnBlToTr>
+                    <a:noFill/>
+                  </a:tcPr>
+                </a:tc>
+                <a:tc>
+                  <a:txBody>
+                    <a:bodyPr/>
+                    <a:lstStyle/>
+                    <a:p>
+                      <a:pPr algn="r" rtl="0" fontAlgn="b"/>
+                      <a:r>
+                        <a:rPr lang="en-US" sz="2400">
+                          <a:effectLst/>
+                        </a:rPr>
+                        <a:t>100</a:t>
+                      </a:r>
+                    </a:p>
+                  </a:txBody>
+                  <a:tcPr marL="27196" marR="27196" marT="18131" marB="18131" anchor="b">
+                    <a:lnL w="9525" cap="flat" cmpd="sng" algn="ctr">
+                      <a:noFill/>
+                      <a:prstDash val="solid"/>
+                      <a:round/>
+                      <a:headEnd type="none" w="med" len="med"/>
+                      <a:tailEnd type="none" w="med" len="med"/>
+                    </a:lnL>
+                    <a:lnR w="12700" cap="flat" cmpd="sng" algn="ctr">
+                      <a:solidFill>
+                        <a:schemeClr val="tx1"/>
+                      </a:solidFill>
+                      <a:prstDash val="solid"/>
+                      <a:round/>
+                      <a:headEnd type="none" w="med" len="med"/>
+                      <a:tailEnd type="none" w="med" len="med"/>
+                    </a:lnR>
+                    <a:lnT w="12700" cap="flat" cmpd="sng" algn="ctr">
+                      <a:solidFill>
+                        <a:schemeClr val="tx1"/>
+                      </a:solidFill>
+                      <a:prstDash val="solid"/>
+                      <a:round/>
+                      <a:headEnd type="none" w="med" len="med"/>
+                      <a:tailEnd type="none" w="med" len="med"/>
+                    </a:lnT>
+                    <a:lnB w="12700" cap="flat" cmpd="sng" algn="ctr">
+                      <a:solidFill>
+                        <a:schemeClr val="tx1"/>
+                      </a:solidFill>
+                      <a:prstDash val="solid"/>
+                      <a:round/>
+                      <a:headEnd type="none" w="med" len="med"/>
+                      <a:tailEnd type="none" w="med" len="med"/>
+                    </a:lnB>
+                    <a:lnTlToBr w="12700" cmpd="sng">
+                      <a:noFill/>
+                      <a:prstDash val="solid"/>
+                    </a:lnTlToBr>
+                    <a:lnBlToTr w="12700" cmpd="sng">
+                      <a:noFill/>
+                      <a:prstDash val="solid"/>
+                    </a:lnBlToTr>
+                    <a:noFill/>
+                  </a:tcPr>
+                </a:tc>
+                <a:extLst>
+                  <a:ext uri="{0D108BD9-81ED-4DB2-BD59-A6C34878D82A}">
+                    <a16:rowId xmlns:a16="http://schemas.microsoft.com/office/drawing/2014/main" val="3676020966"/>
+                  </a:ext>
+                </a:extLst>
+              </a:tr>
+              <a:tr h="407104">
+                <a:tc>
+                  <a:txBody>
+                    <a:bodyPr/>
+                    <a:lstStyle/>
+                    <a:p>
+                      <a:pPr algn="ctr" rtl="0" fontAlgn="b"/>
+                      <a:r>
+                        <a:rPr lang="en-US" sz="2400" dirty="0">
+                          <a:effectLst/>
+                        </a:rPr>
+                        <a:t>2</a:t>
+                      </a:r>
+                    </a:p>
+                  </a:txBody>
+                  <a:tcPr marL="27196" marR="27196" marT="18131" marB="18131" anchor="b">
+                    <a:lnL w="12700" cap="flat" cmpd="sng" algn="ctr">
+                      <a:solidFill>
+                        <a:schemeClr val="tx1"/>
+                      </a:solidFill>
+                      <a:prstDash val="solid"/>
+                      <a:round/>
+                      <a:headEnd type="none" w="med" len="med"/>
+                      <a:tailEnd type="none" w="med" len="med"/>
+                    </a:lnL>
+                    <a:lnR w="9525" cap="flat" cmpd="sng" algn="ctr">
+                      <a:noFill/>
+                      <a:prstDash val="solid"/>
+                      <a:round/>
+                      <a:headEnd type="none" w="med" len="med"/>
+                      <a:tailEnd type="none" w="med" len="med"/>
+                    </a:lnR>
+                    <a:lnT w="12700" cap="flat" cmpd="sng" algn="ctr">
+                      <a:solidFill>
+                        <a:schemeClr val="tx1"/>
+                      </a:solidFill>
+                      <a:prstDash val="solid"/>
+                      <a:round/>
+                      <a:headEnd type="none" w="med" len="med"/>
+                      <a:tailEnd type="none" w="med" len="med"/>
+                    </a:lnT>
+                    <a:lnB w="12700" cap="flat" cmpd="sng" algn="ctr">
+                      <a:solidFill>
+                        <a:schemeClr val="tx1"/>
+                      </a:solidFill>
+                      <a:prstDash val="solid"/>
+                      <a:round/>
+                      <a:headEnd type="none" w="med" len="med"/>
+                      <a:tailEnd type="none" w="med" len="med"/>
+                    </a:lnB>
+                    <a:lnTlToBr w="12700" cmpd="sng">
+                      <a:noFill/>
+                      <a:prstDash val="solid"/>
+                    </a:lnTlToBr>
+                    <a:lnBlToTr w="12700" cmpd="sng">
+                      <a:noFill/>
+                      <a:prstDash val="solid"/>
+                    </a:lnBlToTr>
+                    <a:noFill/>
+                  </a:tcPr>
+                </a:tc>
+                <a:tc>
+                  <a:txBody>
+                    <a:bodyPr/>
+                    <a:lstStyle/>
+                    <a:p>
+                      <a:pPr rtl="0" fontAlgn="b"/>
+                      <a:r>
+                        <a:rPr lang="en-US" sz="2400" dirty="0">
+                          <a:effectLst/>
+                        </a:rPr>
+                        <a:t>Data Cleaning</a:t>
+                      </a:r>
+                    </a:p>
+                  </a:txBody>
+                  <a:tcPr marL="27196" marR="27196" marT="18131" marB="18131" anchor="b">
+                    <a:lnL w="9525" cap="flat" cmpd="sng" algn="ctr">
+                      <a:noFill/>
+                      <a:prstDash val="solid"/>
+                      <a:round/>
+                      <a:headEnd type="none" w="med" len="med"/>
+                      <a:tailEnd type="none" w="med" len="med"/>
+                    </a:lnL>
+                    <a:lnR w="9525" cap="flat" cmpd="sng" algn="ctr">
+                      <a:noFill/>
+                      <a:prstDash val="solid"/>
+                      <a:round/>
+                      <a:headEnd type="none" w="med" len="med"/>
+                      <a:tailEnd type="none" w="med" len="med"/>
+                    </a:lnR>
+                    <a:lnT w="12700" cap="flat" cmpd="sng" algn="ctr">
+                      <a:solidFill>
+                        <a:schemeClr val="tx1"/>
+                      </a:solidFill>
+                      <a:prstDash val="solid"/>
+                      <a:round/>
+                      <a:headEnd type="none" w="med" len="med"/>
+                      <a:tailEnd type="none" w="med" len="med"/>
+                    </a:lnT>
+                    <a:lnB w="12700" cap="flat" cmpd="sng" algn="ctr">
+                      <a:solidFill>
+                        <a:schemeClr val="tx1"/>
+                      </a:solidFill>
+                      <a:prstDash val="solid"/>
+                      <a:round/>
+                      <a:headEnd type="none" w="med" len="med"/>
+                      <a:tailEnd type="none" w="med" len="med"/>
+                    </a:lnB>
+                    <a:lnTlToBr w="12700" cmpd="sng">
+                      <a:noFill/>
+                      <a:prstDash val="solid"/>
+                    </a:lnTlToBr>
+                    <a:lnBlToTr w="12700" cmpd="sng">
+                      <a:noFill/>
+                      <a:prstDash val="solid"/>
+                    </a:lnBlToTr>
+                    <a:noFill/>
+                  </a:tcPr>
+                </a:tc>
+                <a:tc>
+                  <a:txBody>
+                    <a:bodyPr/>
+                    <a:lstStyle/>
+                    <a:p>
+                      <a:pPr algn="r" rtl="0" fontAlgn="b"/>
+                      <a:r>
+                        <a:rPr lang="en-US" sz="2400">
+                          <a:effectLst/>
+                        </a:rPr>
+                        <a:t>100</a:t>
+                      </a:r>
+                    </a:p>
+                  </a:txBody>
+                  <a:tcPr marL="27196" marR="27196" marT="18131" marB="18131" anchor="b">
+                    <a:lnL w="9525" cap="flat" cmpd="sng" algn="ctr">
+                      <a:noFill/>
+                      <a:prstDash val="solid"/>
+                      <a:round/>
+                      <a:headEnd type="none" w="med" len="med"/>
+                      <a:tailEnd type="none" w="med" len="med"/>
+                    </a:lnL>
+                    <a:lnR w="12700" cap="flat" cmpd="sng" algn="ctr">
+                      <a:solidFill>
+                        <a:schemeClr val="tx1"/>
+                      </a:solidFill>
+                      <a:prstDash val="solid"/>
+                      <a:round/>
+                      <a:headEnd type="none" w="med" len="med"/>
+                      <a:tailEnd type="none" w="med" len="med"/>
+                    </a:lnR>
+                    <a:lnT w="12700" cap="flat" cmpd="sng" algn="ctr">
+                      <a:solidFill>
+                        <a:schemeClr val="tx1"/>
+                      </a:solidFill>
+                      <a:prstDash val="solid"/>
+                      <a:round/>
+                      <a:headEnd type="none" w="med" len="med"/>
+                      <a:tailEnd type="none" w="med" len="med"/>
+                    </a:lnT>
+                    <a:lnB w="12700" cap="flat" cmpd="sng" algn="ctr">
+                      <a:solidFill>
+                        <a:schemeClr val="tx1"/>
+                      </a:solidFill>
+                      <a:prstDash val="solid"/>
+                      <a:round/>
+                      <a:headEnd type="none" w="med" len="med"/>
+                      <a:tailEnd type="none" w="med" len="med"/>
+                    </a:lnB>
+                    <a:lnTlToBr w="12700" cmpd="sng">
+                      <a:noFill/>
+                      <a:prstDash val="solid"/>
+                    </a:lnTlToBr>
+                    <a:lnBlToTr w="12700" cmpd="sng">
+                      <a:noFill/>
+                      <a:prstDash val="solid"/>
+                    </a:lnBlToTr>
+                    <a:noFill/>
+                  </a:tcPr>
+                </a:tc>
+                <a:extLst>
+                  <a:ext uri="{0D108BD9-81ED-4DB2-BD59-A6C34878D82A}">
+                    <a16:rowId xmlns:a16="http://schemas.microsoft.com/office/drawing/2014/main" val="2806413544"/>
+                  </a:ext>
+                </a:extLst>
+              </a:tr>
+              <a:tr h="407104">
+                <a:tc>
+                  <a:txBody>
+                    <a:bodyPr/>
+                    <a:lstStyle/>
+                    <a:p>
+                      <a:pPr algn="ctr" rtl="0" fontAlgn="b"/>
+                      <a:r>
+                        <a:rPr lang="en-US" sz="2400" dirty="0">
+                          <a:effectLst/>
+                        </a:rPr>
+                        <a:t>3</a:t>
+                      </a:r>
+                    </a:p>
+                  </a:txBody>
+                  <a:tcPr marL="27196" marR="27196" marT="18131" marB="18131" anchor="b">
+                    <a:lnL w="12700" cap="flat" cmpd="sng" algn="ctr">
+                      <a:solidFill>
+                        <a:schemeClr val="tx1"/>
+                      </a:solidFill>
+                      <a:prstDash val="solid"/>
+                      <a:round/>
+                      <a:headEnd type="none" w="med" len="med"/>
+                      <a:tailEnd type="none" w="med" len="med"/>
+                    </a:lnL>
+                    <a:lnR w="9525" cap="flat" cmpd="sng" algn="ctr">
+                      <a:noFill/>
+                      <a:prstDash val="solid"/>
+                      <a:round/>
+                      <a:headEnd type="none" w="med" len="med"/>
+                      <a:tailEnd type="none" w="med" len="med"/>
+                    </a:lnR>
+                    <a:lnT w="12700" cap="flat" cmpd="sng" algn="ctr">
+                      <a:solidFill>
+                        <a:schemeClr val="tx1"/>
+                      </a:solidFill>
+                      <a:prstDash val="solid"/>
+                      <a:round/>
+                      <a:headEnd type="none" w="med" len="med"/>
+                      <a:tailEnd type="none" w="med" len="med"/>
+                    </a:lnT>
+                    <a:lnB w="12700" cap="flat" cmpd="sng" algn="ctr">
+                      <a:solidFill>
+                        <a:schemeClr val="tx1"/>
+                      </a:solidFill>
+                      <a:prstDash val="solid"/>
+                      <a:round/>
+                      <a:headEnd type="none" w="med" len="med"/>
+                      <a:tailEnd type="none" w="med" len="med"/>
+                    </a:lnB>
+                    <a:lnTlToBr w="12700" cmpd="sng">
+                      <a:noFill/>
+                      <a:prstDash val="solid"/>
+                    </a:lnTlToBr>
+                    <a:lnBlToTr w="12700" cmpd="sng">
+                      <a:noFill/>
+                      <a:prstDash val="solid"/>
+                    </a:lnBlToTr>
+                    <a:noFill/>
+                  </a:tcPr>
+                </a:tc>
+                <a:tc>
+                  <a:txBody>
+                    <a:bodyPr/>
+                    <a:lstStyle/>
+                    <a:p>
+                      <a:pPr rtl="0" fontAlgn="b"/>
+                      <a:r>
+                        <a:rPr lang="en-US" sz="2400" dirty="0">
+                          <a:effectLst/>
+                        </a:rPr>
+                        <a:t>SQL query part I</a:t>
+                      </a:r>
+                    </a:p>
+                  </a:txBody>
+                  <a:tcPr marL="27196" marR="27196" marT="18131" marB="18131" anchor="b">
+                    <a:lnL w="9525" cap="flat" cmpd="sng" algn="ctr">
+                      <a:noFill/>
+                      <a:prstDash val="solid"/>
+                      <a:round/>
+                      <a:headEnd type="none" w="med" len="med"/>
+                      <a:tailEnd type="none" w="med" len="med"/>
+                    </a:lnL>
+                    <a:lnR w="9525" cap="flat" cmpd="sng" algn="ctr">
+                      <a:noFill/>
+                      <a:prstDash val="solid"/>
+                      <a:round/>
+                      <a:headEnd type="none" w="med" len="med"/>
+                      <a:tailEnd type="none" w="med" len="med"/>
+                    </a:lnR>
+                    <a:lnT w="12700" cap="flat" cmpd="sng" algn="ctr">
+                      <a:solidFill>
+                        <a:schemeClr val="tx1"/>
+                      </a:solidFill>
+                      <a:prstDash val="solid"/>
+                      <a:round/>
+                      <a:headEnd type="none" w="med" len="med"/>
+                      <a:tailEnd type="none" w="med" len="med"/>
+                    </a:lnT>
+                    <a:lnB w="12700" cap="flat" cmpd="sng" algn="ctr">
+                      <a:solidFill>
+                        <a:schemeClr val="tx1"/>
+                      </a:solidFill>
+                      <a:prstDash val="solid"/>
+                      <a:round/>
+                      <a:headEnd type="none" w="med" len="med"/>
+                      <a:tailEnd type="none" w="med" len="med"/>
+                    </a:lnB>
+                    <a:lnTlToBr w="12700" cmpd="sng">
+                      <a:noFill/>
+                      <a:prstDash val="solid"/>
+                    </a:lnTlToBr>
+                    <a:lnBlToTr w="12700" cmpd="sng">
+                      <a:noFill/>
+                      <a:prstDash val="solid"/>
+                    </a:lnBlToTr>
+                    <a:noFill/>
+                  </a:tcPr>
+                </a:tc>
+                <a:tc>
+                  <a:txBody>
+                    <a:bodyPr/>
+                    <a:lstStyle/>
+                    <a:p>
+                      <a:pPr algn="r" rtl="0" fontAlgn="b"/>
+                      <a:r>
+                        <a:rPr lang="en-US" sz="2400" dirty="0">
+                          <a:effectLst/>
+                        </a:rPr>
+                        <a:t>120</a:t>
+                      </a:r>
+                    </a:p>
+                  </a:txBody>
+                  <a:tcPr marL="27196" marR="27196" marT="18131" marB="18131" anchor="b">
+                    <a:lnL w="9525" cap="flat" cmpd="sng" algn="ctr">
+                      <a:noFill/>
+                      <a:prstDash val="solid"/>
+                      <a:round/>
+                      <a:headEnd type="none" w="med" len="med"/>
+                      <a:tailEnd type="none" w="med" len="med"/>
+                    </a:lnL>
+                    <a:lnR w="12700" cap="flat" cmpd="sng" algn="ctr">
+                      <a:solidFill>
+                        <a:schemeClr val="tx1"/>
+                      </a:solidFill>
+                      <a:prstDash val="solid"/>
+                      <a:round/>
+                      <a:headEnd type="none" w="med" len="med"/>
+                      <a:tailEnd type="none" w="med" len="med"/>
+                    </a:lnR>
+                    <a:lnT w="12700" cap="flat" cmpd="sng" algn="ctr">
+                      <a:solidFill>
+                        <a:schemeClr val="tx1"/>
+                      </a:solidFill>
+                      <a:prstDash val="solid"/>
+                      <a:round/>
+                      <a:headEnd type="none" w="med" len="med"/>
+                      <a:tailEnd type="none" w="med" len="med"/>
+                    </a:lnT>
+                    <a:lnB w="12700" cap="flat" cmpd="sng" algn="ctr">
+                      <a:solidFill>
+                        <a:schemeClr val="tx1"/>
+                      </a:solidFill>
+                      <a:prstDash val="solid"/>
+                      <a:round/>
+                      <a:headEnd type="none" w="med" len="med"/>
+                      <a:tailEnd type="none" w="med" len="med"/>
+                    </a:lnB>
+                    <a:lnTlToBr w="12700" cmpd="sng">
+                      <a:noFill/>
+                      <a:prstDash val="solid"/>
+                    </a:lnTlToBr>
+                    <a:lnBlToTr w="12700" cmpd="sng">
+                      <a:noFill/>
+                      <a:prstDash val="solid"/>
+                    </a:lnBlToTr>
+                    <a:noFill/>
+                  </a:tcPr>
+                </a:tc>
+                <a:extLst>
+                  <a:ext uri="{0D108BD9-81ED-4DB2-BD59-A6C34878D82A}">
+                    <a16:rowId xmlns:a16="http://schemas.microsoft.com/office/drawing/2014/main" val="1579598922"/>
+                  </a:ext>
+                </a:extLst>
+              </a:tr>
+              <a:tr h="407104">
+                <a:tc>
+                  <a:txBody>
+                    <a:bodyPr/>
+                    <a:lstStyle/>
+                    <a:p>
+                      <a:pPr algn="ctr" rtl="0" fontAlgn="b"/>
+                      <a:r>
+                        <a:rPr lang="en-US" sz="2400" dirty="0">
+                          <a:effectLst/>
+                        </a:rPr>
+                        <a:t>4</a:t>
+                      </a:r>
+                    </a:p>
+                  </a:txBody>
+                  <a:tcPr marL="27196" marR="27196" marT="18131" marB="18131" anchor="b">
+                    <a:lnL w="12700" cap="flat" cmpd="sng" algn="ctr">
+                      <a:solidFill>
+                        <a:schemeClr val="tx1"/>
+                      </a:solidFill>
+                      <a:prstDash val="solid"/>
+                      <a:round/>
+                      <a:headEnd type="none" w="med" len="med"/>
+                      <a:tailEnd type="none" w="med" len="med"/>
+                    </a:lnL>
+                    <a:lnR w="9525" cap="flat" cmpd="sng" algn="ctr">
+                      <a:noFill/>
+                      <a:prstDash val="solid"/>
+                      <a:round/>
+                      <a:headEnd type="none" w="med" len="med"/>
+                      <a:tailEnd type="none" w="med" len="med"/>
+                    </a:lnR>
+                    <a:lnT w="12700" cap="flat" cmpd="sng" algn="ctr">
+                      <a:solidFill>
+                        <a:schemeClr val="tx1"/>
+                      </a:solidFill>
+                      <a:prstDash val="solid"/>
+                      <a:round/>
+                      <a:headEnd type="none" w="med" len="med"/>
+                      <a:tailEnd type="none" w="med" len="med"/>
+                    </a:lnT>
+                    <a:lnB w="12700" cap="flat" cmpd="sng" algn="ctr">
+                      <a:solidFill>
+                        <a:schemeClr val="tx1"/>
+                      </a:solidFill>
+                      <a:prstDash val="solid"/>
+                      <a:round/>
+                      <a:headEnd type="none" w="med" len="med"/>
+                      <a:tailEnd type="none" w="med" len="med"/>
+                    </a:lnB>
+                    <a:lnTlToBr w="12700" cmpd="sng">
+                      <a:noFill/>
+                      <a:prstDash val="solid"/>
+                    </a:lnTlToBr>
+                    <a:lnBlToTr w="12700" cmpd="sng">
+                      <a:noFill/>
+                      <a:prstDash val="solid"/>
+                    </a:lnBlToTr>
+                    <a:noFill/>
+                  </a:tcPr>
+                </a:tc>
+                <a:tc>
+                  <a:txBody>
+                    <a:bodyPr/>
+                    <a:lstStyle/>
+                    <a:p>
+                      <a:pPr rtl="0" fontAlgn="b"/>
+                      <a:r>
+                        <a:rPr lang="en-US" sz="2400" dirty="0">
+                          <a:effectLst/>
+                        </a:rPr>
+                        <a:t>SQL query part II</a:t>
+                      </a:r>
+                    </a:p>
+                  </a:txBody>
+                  <a:tcPr marL="27196" marR="27196" marT="18131" marB="18131" anchor="b">
+                    <a:lnL w="9525" cap="flat" cmpd="sng" algn="ctr">
+                      <a:noFill/>
+                      <a:prstDash val="solid"/>
+                      <a:round/>
+                      <a:headEnd type="none" w="med" len="med"/>
+                      <a:tailEnd type="none" w="med" len="med"/>
+                    </a:lnL>
+                    <a:lnR w="9525" cap="flat" cmpd="sng" algn="ctr">
+                      <a:noFill/>
+                      <a:prstDash val="solid"/>
+                      <a:round/>
+                      <a:headEnd type="none" w="med" len="med"/>
+                      <a:tailEnd type="none" w="med" len="med"/>
+                    </a:lnR>
+                    <a:lnT w="12700" cap="flat" cmpd="sng" algn="ctr">
+                      <a:solidFill>
+                        <a:schemeClr val="tx1"/>
+                      </a:solidFill>
+                      <a:prstDash val="solid"/>
+                      <a:round/>
+                      <a:headEnd type="none" w="med" len="med"/>
+                      <a:tailEnd type="none" w="med" len="med"/>
+                    </a:lnT>
+                    <a:lnB w="12700" cap="flat" cmpd="sng" algn="ctr">
+                      <a:solidFill>
+                        <a:schemeClr val="tx1"/>
+                      </a:solidFill>
+                      <a:prstDash val="solid"/>
+                      <a:round/>
+                      <a:headEnd type="none" w="med" len="med"/>
+                      <a:tailEnd type="none" w="med" len="med"/>
+                    </a:lnB>
+                    <a:lnTlToBr w="12700" cmpd="sng">
+                      <a:noFill/>
+                      <a:prstDash val="solid"/>
+                    </a:lnTlToBr>
+                    <a:lnBlToTr w="12700" cmpd="sng">
+                      <a:noFill/>
+                      <a:prstDash val="solid"/>
+                    </a:lnBlToTr>
+                    <a:noFill/>
+                  </a:tcPr>
+                </a:tc>
+                <a:tc>
+                  <a:txBody>
+                    <a:bodyPr/>
+                    <a:lstStyle/>
+                    <a:p>
+                      <a:pPr algn="r" rtl="0" fontAlgn="b"/>
+                      <a:r>
+                        <a:rPr lang="en-US" sz="2400" dirty="0">
+                          <a:effectLst/>
+                        </a:rPr>
+                        <a:t>120</a:t>
+                      </a:r>
+                    </a:p>
+                  </a:txBody>
+                  <a:tcPr marL="27196" marR="27196" marT="18131" marB="18131" anchor="b">
+                    <a:lnL w="9525" cap="flat" cmpd="sng" algn="ctr">
+                      <a:noFill/>
+                      <a:prstDash val="solid"/>
+                      <a:round/>
+                      <a:headEnd type="none" w="med" len="med"/>
+                      <a:tailEnd type="none" w="med" len="med"/>
+                    </a:lnL>
+                    <a:lnR w="12700" cap="flat" cmpd="sng" algn="ctr">
+                      <a:solidFill>
+                        <a:schemeClr val="tx1"/>
+                      </a:solidFill>
+                      <a:prstDash val="solid"/>
+                      <a:round/>
+                      <a:headEnd type="none" w="med" len="med"/>
+                      <a:tailEnd type="none" w="med" len="med"/>
+                    </a:lnR>
+                    <a:lnT w="12700" cap="flat" cmpd="sng" algn="ctr">
+                      <a:solidFill>
+                        <a:schemeClr val="tx1"/>
+                      </a:solidFill>
+                      <a:prstDash val="solid"/>
+                      <a:round/>
+                      <a:headEnd type="none" w="med" len="med"/>
+                      <a:tailEnd type="none" w="med" len="med"/>
+                    </a:lnT>
+                    <a:lnB w="12700" cap="flat" cmpd="sng" algn="ctr">
+                      <a:solidFill>
+                        <a:schemeClr val="tx1"/>
+                      </a:solidFill>
+                      <a:prstDash val="solid"/>
+                      <a:round/>
+                      <a:headEnd type="none" w="med" len="med"/>
+                      <a:tailEnd type="none" w="med" len="med"/>
+                    </a:lnB>
+                    <a:lnTlToBr w="12700" cmpd="sng">
+                      <a:noFill/>
+                      <a:prstDash val="solid"/>
+                    </a:lnTlToBr>
+                    <a:lnBlToTr w="12700" cmpd="sng">
+                      <a:noFill/>
+                      <a:prstDash val="solid"/>
+                    </a:lnBlToTr>
+                    <a:noFill/>
+                  </a:tcPr>
+                </a:tc>
+                <a:extLst>
+                  <a:ext uri="{0D108BD9-81ED-4DB2-BD59-A6C34878D82A}">
+                    <a16:rowId xmlns:a16="http://schemas.microsoft.com/office/drawing/2014/main" val="3893492520"/>
+                  </a:ext>
+                </a:extLst>
+              </a:tr>
+              <a:tr h="407104">
+                <a:tc>
+                  <a:txBody>
+                    <a:bodyPr/>
+                    <a:lstStyle/>
+                    <a:p>
+                      <a:pPr algn="ctr" rtl="0" fontAlgn="b"/>
+                      <a:r>
+                        <a:rPr lang="en-US" sz="2400" dirty="0">
+                          <a:effectLst/>
+                        </a:rPr>
+                        <a:t>5</a:t>
+                      </a:r>
+                    </a:p>
+                  </a:txBody>
+                  <a:tcPr marL="27196" marR="27196" marT="18131" marB="18131" anchor="b">
+                    <a:lnL w="12700" cap="flat" cmpd="sng" algn="ctr">
+                      <a:solidFill>
+                        <a:schemeClr val="tx1"/>
+                      </a:solidFill>
+                      <a:prstDash val="solid"/>
+                      <a:round/>
+                      <a:headEnd type="none" w="med" len="med"/>
+                      <a:tailEnd type="none" w="med" len="med"/>
+                    </a:lnL>
+                    <a:lnR w="9525" cap="flat" cmpd="sng" algn="ctr">
+                      <a:noFill/>
+                      <a:prstDash val="solid"/>
+                      <a:round/>
+                      <a:headEnd type="none" w="med" len="med"/>
+                      <a:tailEnd type="none" w="med" len="med"/>
+                    </a:lnR>
+                    <a:lnT w="12700" cap="flat" cmpd="sng" algn="ctr">
+                      <a:solidFill>
+                        <a:schemeClr val="tx1"/>
+                      </a:solidFill>
+                      <a:prstDash val="solid"/>
+                      <a:round/>
+                      <a:headEnd type="none" w="med" len="med"/>
+                      <a:tailEnd type="none" w="med" len="med"/>
+                    </a:lnT>
+                    <a:lnB w="12700" cap="flat" cmpd="sng" algn="ctr">
+                      <a:solidFill>
+                        <a:schemeClr val="tx1"/>
+                      </a:solidFill>
+                      <a:prstDash val="solid"/>
+                      <a:round/>
+                      <a:headEnd type="none" w="med" len="med"/>
+                      <a:tailEnd type="none" w="med" len="med"/>
+                    </a:lnB>
+                    <a:lnTlToBr w="12700" cmpd="sng">
+                      <a:noFill/>
+                      <a:prstDash val="solid"/>
+                    </a:lnTlToBr>
+                    <a:lnBlToTr w="12700" cmpd="sng">
+                      <a:noFill/>
+                      <a:prstDash val="solid"/>
+                    </a:lnBlToTr>
+                    <a:noFill/>
+                  </a:tcPr>
+                </a:tc>
+                <a:tc>
+                  <a:txBody>
+                    <a:bodyPr/>
+                    <a:lstStyle/>
+                    <a:p>
+                      <a:pPr rtl="0" fontAlgn="b"/>
+                      <a:r>
+                        <a:rPr lang="en-US" sz="2400" dirty="0">
+                          <a:effectLst/>
+                        </a:rPr>
+                        <a:t>Querying Parquet files</a:t>
+                      </a:r>
+                    </a:p>
+                  </a:txBody>
+                  <a:tcPr marL="27196" marR="27196" marT="18131" marB="18131" anchor="b">
+                    <a:lnL w="9525" cap="flat" cmpd="sng" algn="ctr">
+                      <a:noFill/>
+                      <a:prstDash val="solid"/>
+                      <a:round/>
+                      <a:headEnd type="none" w="med" len="med"/>
+                      <a:tailEnd type="none" w="med" len="med"/>
+                    </a:lnL>
+                    <a:lnR w="9525" cap="flat" cmpd="sng" algn="ctr">
+                      <a:noFill/>
+                      <a:prstDash val="solid"/>
+                      <a:round/>
+                      <a:headEnd type="none" w="med" len="med"/>
+                      <a:tailEnd type="none" w="med" len="med"/>
+                    </a:lnR>
+                    <a:lnT w="12700" cap="flat" cmpd="sng" algn="ctr">
+                      <a:solidFill>
+                        <a:schemeClr val="tx1"/>
+                      </a:solidFill>
+                      <a:prstDash val="solid"/>
+                      <a:round/>
+                      <a:headEnd type="none" w="med" len="med"/>
+                      <a:tailEnd type="none" w="med" len="med"/>
+                    </a:lnT>
+                    <a:lnB w="12700" cap="flat" cmpd="sng" algn="ctr">
+                      <a:solidFill>
+                        <a:schemeClr val="tx1"/>
+                      </a:solidFill>
+                      <a:prstDash val="solid"/>
+                      <a:round/>
+                      <a:headEnd type="none" w="med" len="med"/>
+                      <a:tailEnd type="none" w="med" len="med"/>
+                    </a:lnB>
+                    <a:lnTlToBr w="12700" cmpd="sng">
+                      <a:noFill/>
+                      <a:prstDash val="solid"/>
+                    </a:lnTlToBr>
+                    <a:lnBlToTr w="12700" cmpd="sng">
+                      <a:noFill/>
+                      <a:prstDash val="solid"/>
+                    </a:lnBlToTr>
+                    <a:noFill/>
+                  </a:tcPr>
+                </a:tc>
+                <a:tc>
+                  <a:txBody>
+                    <a:bodyPr/>
+                    <a:lstStyle/>
+                    <a:p>
+                      <a:pPr algn="r" rtl="0" fontAlgn="b"/>
+                      <a:r>
+                        <a:rPr lang="en-US" sz="2400" dirty="0">
+                          <a:effectLst/>
+                        </a:rPr>
+                        <a:t>100</a:t>
+                      </a:r>
+                    </a:p>
+                  </a:txBody>
+                  <a:tcPr marL="27196" marR="27196" marT="18131" marB="18131" anchor="b">
+                    <a:lnL w="9525" cap="flat" cmpd="sng" algn="ctr">
+                      <a:noFill/>
+                      <a:prstDash val="solid"/>
+                      <a:round/>
+                      <a:headEnd type="none" w="med" len="med"/>
+                      <a:tailEnd type="none" w="med" len="med"/>
+                    </a:lnL>
+                    <a:lnR w="12700" cap="flat" cmpd="sng" algn="ctr">
+                      <a:solidFill>
+                        <a:schemeClr val="tx1"/>
+                      </a:solidFill>
+                      <a:prstDash val="solid"/>
+                      <a:round/>
+                      <a:headEnd type="none" w="med" len="med"/>
+                      <a:tailEnd type="none" w="med" len="med"/>
+                    </a:lnR>
+                    <a:lnT w="12700" cap="flat" cmpd="sng" algn="ctr">
+                      <a:solidFill>
+                        <a:schemeClr val="tx1"/>
+                      </a:solidFill>
+                      <a:prstDash val="solid"/>
+                      <a:round/>
+                      <a:headEnd type="none" w="med" len="med"/>
+                      <a:tailEnd type="none" w="med" len="med"/>
+                    </a:lnT>
+                    <a:lnB w="12700" cap="flat" cmpd="sng" algn="ctr">
+                      <a:solidFill>
+                        <a:schemeClr val="tx1"/>
+                      </a:solidFill>
+                      <a:prstDash val="solid"/>
+                      <a:round/>
+                      <a:headEnd type="none" w="med" len="med"/>
+                      <a:tailEnd type="none" w="med" len="med"/>
+                    </a:lnB>
+                    <a:lnTlToBr w="12700" cmpd="sng">
+                      <a:noFill/>
+                      <a:prstDash val="solid"/>
+                    </a:lnTlToBr>
+                    <a:lnBlToTr w="12700" cmpd="sng">
+                      <a:noFill/>
+                      <a:prstDash val="solid"/>
+                    </a:lnBlToTr>
+                    <a:noFill/>
+                  </a:tcPr>
+                </a:tc>
+                <a:extLst>
+                  <a:ext uri="{0D108BD9-81ED-4DB2-BD59-A6C34878D82A}">
+                    <a16:rowId xmlns:a16="http://schemas.microsoft.com/office/drawing/2014/main" val="1233559936"/>
+                  </a:ext>
+                </a:extLst>
+              </a:tr>
+              <a:tr h="777488">
+                <a:tc>
+                  <a:txBody>
+                    <a:bodyPr/>
+                    <a:lstStyle/>
+                    <a:p>
+                      <a:pPr algn="ctr" rtl="0" fontAlgn="b"/>
+                      <a:r>
+                        <a:rPr lang="en-US" sz="2400" dirty="0">
+                          <a:effectLst/>
+                        </a:rPr>
+                        <a:t>6</a:t>
+                      </a:r>
+                    </a:p>
+                  </a:txBody>
+                  <a:tcPr marL="27196" marR="27196" marT="18131" marB="18131" anchor="b">
+                    <a:lnL w="12700" cap="flat" cmpd="sng" algn="ctr">
+                      <a:solidFill>
+                        <a:schemeClr val="tx1"/>
+                      </a:solidFill>
+                      <a:prstDash val="solid"/>
+                      <a:round/>
+                      <a:headEnd type="none" w="med" len="med"/>
+                      <a:tailEnd type="none" w="med" len="med"/>
+                    </a:lnL>
+                    <a:lnR w="9525" cap="flat" cmpd="sng" algn="ctr">
+                      <a:noFill/>
+                      <a:prstDash val="solid"/>
+                      <a:round/>
+                      <a:headEnd type="none" w="med" len="med"/>
+                      <a:tailEnd type="none" w="med" len="med"/>
+                    </a:lnR>
+                    <a:lnT w="12700" cap="flat" cmpd="sng" algn="ctr">
+                      <a:solidFill>
+                        <a:schemeClr val="tx1"/>
+                      </a:solidFill>
+                      <a:prstDash val="solid"/>
+                      <a:round/>
+                      <a:headEnd type="none" w="med" len="med"/>
+                      <a:tailEnd type="none" w="med" len="med"/>
+                    </a:lnT>
+                    <a:lnB w="12700" cap="flat" cmpd="sng" algn="ctr">
+                      <a:solidFill>
+                        <a:schemeClr val="tx1"/>
+                      </a:solidFill>
+                      <a:prstDash val="solid"/>
+                      <a:round/>
+                      <a:headEnd type="none" w="med" len="med"/>
+                      <a:tailEnd type="none" w="med" len="med"/>
+                    </a:lnB>
+                    <a:lnTlToBr w="12700" cmpd="sng">
+                      <a:noFill/>
+                      <a:prstDash val="solid"/>
+                    </a:lnTlToBr>
+                    <a:lnBlToTr w="12700" cmpd="sng">
+                      <a:noFill/>
+                      <a:prstDash val="solid"/>
+                    </a:lnBlToTr>
+                    <a:noFill/>
+                  </a:tcPr>
+                </a:tc>
+                <a:tc>
+                  <a:txBody>
+                    <a:bodyPr/>
+                    <a:lstStyle/>
+                    <a:p>
+                      <a:pPr rtl="0" fontAlgn="b"/>
+                      <a:r>
+                        <a:rPr lang="en-US" sz="2400" dirty="0">
+                          <a:effectLst/>
+                        </a:rPr>
+                        <a:t>Using R &amp; Python to query a database</a:t>
+                      </a:r>
+                    </a:p>
+                  </a:txBody>
+                  <a:tcPr marL="27196" marR="27196" marT="18131" marB="18131" anchor="b">
+                    <a:lnL w="9525" cap="flat" cmpd="sng" algn="ctr">
+                      <a:noFill/>
+                      <a:prstDash val="solid"/>
+                      <a:round/>
+                      <a:headEnd type="none" w="med" len="med"/>
+                      <a:tailEnd type="none" w="med" len="med"/>
+                    </a:lnL>
+                    <a:lnR w="9525" cap="flat" cmpd="sng" algn="ctr">
+                      <a:noFill/>
+                      <a:prstDash val="solid"/>
+                      <a:round/>
+                      <a:headEnd type="none" w="med" len="med"/>
+                      <a:tailEnd type="none" w="med" len="med"/>
+                    </a:lnR>
+                    <a:lnT w="12700" cap="flat" cmpd="sng" algn="ctr">
+                      <a:solidFill>
+                        <a:schemeClr val="tx1"/>
+                      </a:solidFill>
+                      <a:prstDash val="solid"/>
+                      <a:round/>
+                      <a:headEnd type="none" w="med" len="med"/>
+                      <a:tailEnd type="none" w="med" len="med"/>
+                    </a:lnT>
+                    <a:lnB w="12700" cap="flat" cmpd="sng" algn="ctr">
+                      <a:solidFill>
+                        <a:schemeClr val="tx1"/>
+                      </a:solidFill>
+                      <a:prstDash val="solid"/>
+                      <a:round/>
+                      <a:headEnd type="none" w="med" len="med"/>
+                      <a:tailEnd type="none" w="med" len="med"/>
+                    </a:lnB>
+                    <a:lnTlToBr w="12700" cmpd="sng">
+                      <a:noFill/>
+                      <a:prstDash val="solid"/>
+                    </a:lnTlToBr>
+                    <a:lnBlToTr w="12700" cmpd="sng">
+                      <a:noFill/>
+                      <a:prstDash val="solid"/>
+                    </a:lnBlToTr>
+                    <a:noFill/>
+                  </a:tcPr>
+                </a:tc>
+                <a:tc>
+                  <a:txBody>
+                    <a:bodyPr/>
+                    <a:lstStyle/>
+                    <a:p>
+                      <a:pPr algn="r" rtl="0" fontAlgn="b"/>
+                      <a:r>
+                        <a:rPr lang="en-US" sz="2400">
+                          <a:effectLst/>
+                        </a:rPr>
+                        <a:t>100</a:t>
+                      </a:r>
+                    </a:p>
+                  </a:txBody>
+                  <a:tcPr marL="27196" marR="27196" marT="18131" marB="18131" anchor="b">
+                    <a:lnL w="9525" cap="flat" cmpd="sng" algn="ctr">
+                      <a:noFill/>
+                      <a:prstDash val="solid"/>
+                      <a:round/>
+                      <a:headEnd type="none" w="med" len="med"/>
+                      <a:tailEnd type="none" w="med" len="med"/>
+                    </a:lnL>
+                    <a:lnR w="12700" cap="flat" cmpd="sng" algn="ctr">
+                      <a:solidFill>
+                        <a:schemeClr val="tx1"/>
+                      </a:solidFill>
+                      <a:prstDash val="solid"/>
+                      <a:round/>
+                      <a:headEnd type="none" w="med" len="med"/>
+                      <a:tailEnd type="none" w="med" len="med"/>
+                    </a:lnR>
+                    <a:lnT w="12700" cap="flat" cmpd="sng" algn="ctr">
+                      <a:solidFill>
+                        <a:schemeClr val="tx1"/>
+                      </a:solidFill>
+                      <a:prstDash val="solid"/>
+                      <a:round/>
+                      <a:headEnd type="none" w="med" len="med"/>
+                      <a:tailEnd type="none" w="med" len="med"/>
+                    </a:lnT>
+                    <a:lnB w="12700" cap="flat" cmpd="sng" algn="ctr">
+                      <a:solidFill>
+                        <a:schemeClr val="tx1"/>
+                      </a:solidFill>
+                      <a:prstDash val="solid"/>
+                      <a:round/>
+                      <a:headEnd type="none" w="med" len="med"/>
+                      <a:tailEnd type="none" w="med" len="med"/>
+                    </a:lnB>
+                    <a:lnTlToBr w="12700" cmpd="sng">
+                      <a:noFill/>
+                      <a:prstDash val="solid"/>
+                    </a:lnTlToBr>
+                    <a:lnBlToTr w="12700" cmpd="sng">
+                      <a:noFill/>
+                      <a:prstDash val="solid"/>
+                    </a:lnBlToTr>
+                    <a:noFill/>
+                  </a:tcPr>
+                </a:tc>
+                <a:extLst>
+                  <a:ext uri="{0D108BD9-81ED-4DB2-BD59-A6C34878D82A}">
+                    <a16:rowId xmlns:a16="http://schemas.microsoft.com/office/drawing/2014/main" val="317442102"/>
+                  </a:ext>
+                </a:extLst>
+              </a:tr>
+              <a:tr h="1085943">
+                <a:tc>
+                  <a:txBody>
+                    <a:bodyPr/>
+                    <a:lstStyle/>
+                    <a:p>
+                      <a:pPr algn="ctr" rtl="0" fontAlgn="b"/>
+                      <a:r>
+                        <a:rPr lang="en-US" sz="2400" dirty="0">
+                          <a:effectLst/>
+                        </a:rPr>
+                        <a:t>7</a:t>
+                      </a:r>
+                    </a:p>
+                  </a:txBody>
+                  <a:tcPr marL="27196" marR="27196" marT="18131" marB="18131" anchor="b">
+                    <a:lnL w="12700" cap="flat" cmpd="sng" algn="ctr">
+                      <a:solidFill>
+                        <a:schemeClr val="tx1"/>
+                      </a:solidFill>
+                      <a:prstDash val="solid"/>
+                      <a:round/>
+                      <a:headEnd type="none" w="med" len="med"/>
+                      <a:tailEnd type="none" w="med" len="med"/>
+                    </a:lnL>
+                    <a:lnR w="9525" cap="flat" cmpd="sng" algn="ctr">
+                      <a:noFill/>
+                      <a:prstDash val="solid"/>
+                      <a:round/>
+                      <a:headEnd type="none" w="med" len="med"/>
+                      <a:tailEnd type="none" w="med" len="med"/>
+                    </a:lnR>
+                    <a:lnT w="12700" cap="flat" cmpd="sng" algn="ctr">
+                      <a:solidFill>
+                        <a:schemeClr val="tx1"/>
+                      </a:solidFill>
+                      <a:prstDash val="solid"/>
+                      <a:round/>
+                      <a:headEnd type="none" w="med" len="med"/>
+                      <a:tailEnd type="none" w="med" len="med"/>
+                    </a:lnT>
+                    <a:lnB w="12700" cap="flat" cmpd="sng" algn="ctr">
+                      <a:solidFill>
+                        <a:schemeClr val="tx1"/>
+                      </a:solidFill>
+                      <a:prstDash val="solid"/>
+                      <a:round/>
+                      <a:headEnd type="none" w="med" len="med"/>
+                      <a:tailEnd type="none" w="med" len="med"/>
+                    </a:lnB>
+                    <a:lnTlToBr w="12700" cmpd="sng">
+                      <a:noFill/>
+                      <a:prstDash val="solid"/>
+                    </a:lnTlToBr>
+                    <a:lnBlToTr w="12700" cmpd="sng">
+                      <a:noFill/>
+                      <a:prstDash val="solid"/>
+                    </a:lnBlToTr>
+                    <a:noFill/>
+                  </a:tcPr>
+                </a:tc>
+                <a:tc>
+                  <a:txBody>
+                    <a:bodyPr/>
+                    <a:lstStyle/>
+                    <a:p>
+                      <a:pPr rtl="0" fontAlgn="b"/>
+                      <a:r>
+                        <a:rPr lang="en-US" sz="2400" dirty="0">
+                          <a:effectLst/>
+                        </a:rPr>
+                        <a:t>Documentation Capstone project   - </a:t>
+                      </a:r>
+                      <a:r>
+                        <a:rPr lang="en-US" sz="2400" i="1" dirty="0">
+                          <a:effectLst/>
+                        </a:rPr>
+                        <a:t>metadata + computing env</a:t>
+                      </a:r>
+                    </a:p>
+                  </a:txBody>
+                  <a:tcPr marL="27196" marR="27196" marT="18131" marB="18131" anchor="b">
+                    <a:lnL w="9525" cap="flat" cmpd="sng" algn="ctr">
+                      <a:noFill/>
+                      <a:prstDash val="solid"/>
+                      <a:round/>
+                      <a:headEnd type="none" w="med" len="med"/>
+                      <a:tailEnd type="none" w="med" len="med"/>
+                    </a:lnL>
+                    <a:lnR w="9525" cap="flat" cmpd="sng" algn="ctr">
+                      <a:noFill/>
+                      <a:prstDash val="solid"/>
+                      <a:round/>
+                      <a:headEnd type="none" w="med" len="med"/>
+                      <a:tailEnd type="none" w="med" len="med"/>
+                    </a:lnR>
+                    <a:lnT w="12700" cap="flat" cmpd="sng" algn="ctr">
+                      <a:solidFill>
+                        <a:schemeClr val="tx1"/>
+                      </a:solidFill>
+                      <a:prstDash val="solid"/>
+                      <a:round/>
+                      <a:headEnd type="none" w="med" len="med"/>
+                      <a:tailEnd type="none" w="med" len="med"/>
+                    </a:lnT>
+                    <a:lnB w="12700" cap="flat" cmpd="sng" algn="ctr">
+                      <a:solidFill>
+                        <a:schemeClr val="tx1"/>
+                      </a:solidFill>
+                      <a:prstDash val="solid"/>
+                      <a:round/>
+                      <a:headEnd type="none" w="med" len="med"/>
+                      <a:tailEnd type="none" w="med" len="med"/>
+                    </a:lnB>
+                    <a:lnTlToBr w="12700" cmpd="sng">
+                      <a:noFill/>
+                      <a:prstDash val="solid"/>
+                    </a:lnTlToBr>
+                    <a:lnBlToTr w="12700" cmpd="sng">
+                      <a:noFill/>
+                      <a:prstDash val="solid"/>
+                    </a:lnBlToTr>
+                    <a:noFill/>
+                  </a:tcPr>
+                </a:tc>
+                <a:tc>
+                  <a:txBody>
+                    <a:bodyPr/>
+                    <a:lstStyle/>
+                    <a:p>
+                      <a:pPr algn="r" rtl="0" fontAlgn="b"/>
+                      <a:r>
+                        <a:rPr lang="en-US" sz="2400" dirty="0">
+                          <a:effectLst/>
+                        </a:rPr>
+                        <a:t>50</a:t>
+                      </a:r>
+                    </a:p>
+                  </a:txBody>
+                  <a:tcPr marL="27196" marR="27196" marT="18131" marB="18131" anchor="b">
+                    <a:lnL w="9525" cap="flat" cmpd="sng" algn="ctr">
+                      <a:noFill/>
+                      <a:prstDash val="solid"/>
+                      <a:round/>
+                      <a:headEnd type="none" w="med" len="med"/>
+                      <a:tailEnd type="none" w="med" len="med"/>
+                    </a:lnL>
+                    <a:lnR w="12700" cap="flat" cmpd="sng" algn="ctr">
+                      <a:solidFill>
+                        <a:schemeClr val="tx1"/>
+                      </a:solidFill>
+                      <a:prstDash val="solid"/>
+                      <a:round/>
+                      <a:headEnd type="none" w="med" len="med"/>
+                      <a:tailEnd type="none" w="med" len="med"/>
+                    </a:lnR>
+                    <a:lnT w="12700" cap="flat" cmpd="sng" algn="ctr">
+                      <a:solidFill>
+                        <a:schemeClr val="tx1"/>
+                      </a:solidFill>
+                      <a:prstDash val="solid"/>
+                      <a:round/>
+                      <a:headEnd type="none" w="med" len="med"/>
+                      <a:tailEnd type="none" w="med" len="med"/>
+                    </a:lnT>
+                    <a:lnB w="12700" cap="flat" cmpd="sng" algn="ctr">
+                      <a:solidFill>
+                        <a:schemeClr val="tx1"/>
+                      </a:solidFill>
+                      <a:prstDash val="solid"/>
+                      <a:round/>
+                      <a:headEnd type="none" w="med" len="med"/>
+                      <a:tailEnd type="none" w="med" len="med"/>
+                    </a:lnB>
+                    <a:lnTlToBr w="12700" cmpd="sng">
+                      <a:noFill/>
+                      <a:prstDash val="solid"/>
+                    </a:lnTlToBr>
+                    <a:lnBlToTr w="12700" cmpd="sng">
+                      <a:noFill/>
+                      <a:prstDash val="solid"/>
+                    </a:lnBlToTr>
+                    <a:noFill/>
+                  </a:tcPr>
+                </a:tc>
+                <a:extLst>
+                  <a:ext uri="{0D108BD9-81ED-4DB2-BD59-A6C34878D82A}">
+                    <a16:rowId xmlns:a16="http://schemas.microsoft.com/office/drawing/2014/main" val="2729882755"/>
+                  </a:ext>
+                </a:extLst>
+              </a:tr>
+              <a:tr h="407104">
+                <a:tc>
+                  <a:txBody>
+                    <a:bodyPr/>
+                    <a:lstStyle/>
+                    <a:p>
+                      <a:pPr algn="ctr" rtl="0" fontAlgn="b"/>
+                      <a:r>
+                        <a:rPr lang="en-US" sz="2400" dirty="0">
+                          <a:effectLst/>
+                        </a:rPr>
+                        <a:t>8</a:t>
+                      </a:r>
+                    </a:p>
+                  </a:txBody>
+                  <a:tcPr marL="27196" marR="27196" marT="18131" marB="18131" anchor="b">
+                    <a:lnL w="12700" cap="flat" cmpd="sng" algn="ctr">
+                      <a:solidFill>
+                        <a:schemeClr val="tx1"/>
+                      </a:solidFill>
+                      <a:prstDash val="solid"/>
+                      <a:round/>
+                      <a:headEnd type="none" w="med" len="med"/>
+                      <a:tailEnd type="none" w="med" len="med"/>
+                    </a:lnL>
+                    <a:lnR w="9525" cap="flat" cmpd="sng" algn="ctr">
+                      <a:noFill/>
+                      <a:prstDash val="solid"/>
+                      <a:round/>
+                      <a:headEnd type="none" w="med" len="med"/>
+                      <a:tailEnd type="none" w="med" len="med"/>
+                    </a:lnR>
+                    <a:lnT w="12700" cap="flat" cmpd="sng" algn="ctr">
+                      <a:solidFill>
+                        <a:schemeClr val="tx1"/>
+                      </a:solidFill>
+                      <a:prstDash val="solid"/>
+                      <a:round/>
+                      <a:headEnd type="none" w="med" len="med"/>
+                      <a:tailEnd type="none" w="med" len="med"/>
+                    </a:lnT>
+                    <a:lnB w="12700" cap="flat" cmpd="sng" algn="ctr">
+                      <a:solidFill>
+                        <a:schemeClr val="tx1"/>
+                      </a:solidFill>
+                      <a:prstDash val="solid"/>
+                      <a:round/>
+                      <a:headEnd type="none" w="med" len="med"/>
+                      <a:tailEnd type="none" w="med" len="med"/>
+                    </a:lnB>
+                    <a:lnTlToBr w="12700" cmpd="sng">
+                      <a:noFill/>
+                      <a:prstDash val="solid"/>
+                    </a:lnTlToBr>
+                    <a:lnBlToTr w="12700" cmpd="sng">
+                      <a:noFill/>
+                      <a:prstDash val="solid"/>
+                    </a:lnBlToTr>
+                    <a:noFill/>
+                  </a:tcPr>
+                </a:tc>
+                <a:tc>
+                  <a:txBody>
+                    <a:bodyPr/>
+                    <a:lstStyle/>
+                    <a:p>
+                      <a:pPr rtl="0" fontAlgn="b"/>
+                      <a:endParaRPr lang="en-US" sz="2400" i="1" dirty="0">
+                        <a:effectLst/>
+                      </a:endParaRPr>
+                    </a:p>
+                  </a:txBody>
+                  <a:tcPr marL="27196" marR="27196" marT="18131" marB="18131" anchor="b">
+                    <a:lnL w="9525" cap="flat" cmpd="sng" algn="ctr">
+                      <a:noFill/>
+                      <a:prstDash val="solid"/>
+                      <a:round/>
+                      <a:headEnd type="none" w="med" len="med"/>
+                      <a:tailEnd type="none" w="med" len="med"/>
+                    </a:lnL>
+                    <a:lnR w="9525" cap="flat" cmpd="sng" algn="ctr">
+                      <a:noFill/>
+                      <a:prstDash val="solid"/>
+                      <a:round/>
+                      <a:headEnd type="none" w="med" len="med"/>
+                      <a:tailEnd type="none" w="med" len="med"/>
+                    </a:lnR>
+                    <a:lnT w="12700" cap="flat" cmpd="sng" algn="ctr">
+                      <a:solidFill>
+                        <a:schemeClr val="tx1"/>
+                      </a:solidFill>
+                      <a:prstDash val="solid"/>
+                      <a:round/>
+                      <a:headEnd type="none" w="med" len="med"/>
+                      <a:tailEnd type="none" w="med" len="med"/>
+                    </a:lnT>
+                    <a:lnB w="12700" cap="flat" cmpd="sng" algn="ctr">
+                      <a:solidFill>
+                        <a:schemeClr val="tx1"/>
+                      </a:solidFill>
+                      <a:prstDash val="solid"/>
+                      <a:round/>
+                      <a:headEnd type="none" w="med" len="med"/>
+                      <a:tailEnd type="none" w="med" len="med"/>
+                    </a:lnB>
+                    <a:lnTlToBr w="12700" cmpd="sng">
+                      <a:noFill/>
+                      <a:prstDash val="solid"/>
+                    </a:lnTlToBr>
+                    <a:lnBlToTr w="12700" cmpd="sng">
+                      <a:noFill/>
+                      <a:prstDash val="solid"/>
+                    </a:lnBlToTr>
+                    <a:noFill/>
+                  </a:tcPr>
+                </a:tc>
+                <a:tc>
+                  <a:txBody>
+                    <a:bodyPr/>
+                    <a:lstStyle/>
+                    <a:p>
+                      <a:pPr algn="r" rtl="0" fontAlgn="b"/>
+                      <a:r>
+                        <a:rPr lang="en-US" sz="2400" dirty="0">
+                          <a:effectLst/>
+                        </a:rPr>
+                        <a:t>-</a:t>
+                      </a:r>
+                    </a:p>
+                  </a:txBody>
+                  <a:tcPr marL="27196" marR="27196" marT="18131" marB="18131" anchor="b">
+                    <a:lnL w="9525" cap="flat" cmpd="sng" algn="ctr">
+                      <a:noFill/>
+                      <a:prstDash val="solid"/>
+                      <a:round/>
+                      <a:headEnd type="none" w="med" len="med"/>
+                      <a:tailEnd type="none" w="med" len="med"/>
+                    </a:lnL>
+                    <a:lnR w="12700" cap="flat" cmpd="sng" algn="ctr">
+                      <a:solidFill>
+                        <a:schemeClr val="tx1"/>
+                      </a:solidFill>
+                      <a:prstDash val="solid"/>
+                      <a:round/>
+                      <a:headEnd type="none" w="med" len="med"/>
+                      <a:tailEnd type="none" w="med" len="med"/>
+                    </a:lnR>
+                    <a:lnT w="12700" cap="flat" cmpd="sng" algn="ctr">
+                      <a:solidFill>
+                        <a:schemeClr val="tx1"/>
+                      </a:solidFill>
+                      <a:prstDash val="solid"/>
+                      <a:round/>
+                      <a:headEnd type="none" w="med" len="med"/>
+                      <a:tailEnd type="none" w="med" len="med"/>
+                    </a:lnT>
+                    <a:lnB w="12700" cap="flat" cmpd="sng" algn="ctr">
+                      <a:solidFill>
+                        <a:schemeClr val="tx1"/>
+                      </a:solidFill>
+                      <a:prstDash val="solid"/>
+                      <a:round/>
+                      <a:headEnd type="none" w="med" len="med"/>
+                      <a:tailEnd type="none" w="med" len="med"/>
+                    </a:lnB>
+                    <a:lnTlToBr w="12700" cmpd="sng">
+                      <a:noFill/>
+                      <a:prstDash val="solid"/>
+                    </a:lnTlToBr>
+                    <a:lnBlToTr w="12700" cmpd="sng">
+                      <a:noFill/>
+                      <a:prstDash val="solid"/>
+                    </a:lnBlToTr>
+                    <a:noFill/>
+                  </a:tcPr>
+                </a:tc>
+                <a:extLst>
+                  <a:ext uri="{0D108BD9-81ED-4DB2-BD59-A6C34878D82A}">
+                    <a16:rowId xmlns:a16="http://schemas.microsoft.com/office/drawing/2014/main" val="1574768575"/>
+                  </a:ext>
+                </a:extLst>
+              </a:tr>
+              <a:tr h="407104">
+                <a:tc>
+                  <a:txBody>
+                    <a:bodyPr/>
+                    <a:lstStyle/>
+                    <a:p>
+                      <a:pPr algn="ctr" rtl="0" fontAlgn="b"/>
+                      <a:r>
+                        <a:rPr lang="en-US" sz="2400" dirty="0">
+                          <a:effectLst/>
+                        </a:rPr>
+                        <a:t>9</a:t>
+                      </a:r>
+                    </a:p>
+                  </a:txBody>
+                  <a:tcPr marL="27196" marR="27196" marT="18131" marB="18131" anchor="b">
+                    <a:lnL w="12700" cap="flat" cmpd="sng" algn="ctr">
+                      <a:solidFill>
+                        <a:schemeClr val="tx1"/>
+                      </a:solidFill>
+                      <a:prstDash val="solid"/>
+                      <a:round/>
+                      <a:headEnd type="none" w="med" len="med"/>
+                      <a:tailEnd type="none" w="med" len="med"/>
+                    </a:lnL>
+                    <a:lnR w="9525" cap="flat" cmpd="sng" algn="ctr">
+                      <a:noFill/>
+                      <a:prstDash val="solid"/>
+                      <a:round/>
+                      <a:headEnd type="none" w="med" len="med"/>
+                      <a:tailEnd type="none" w="med" len="med"/>
+                    </a:lnR>
+                    <a:lnT w="12700" cap="flat" cmpd="sng" algn="ctr">
+                      <a:solidFill>
+                        <a:schemeClr val="tx1"/>
+                      </a:solidFill>
+                      <a:prstDash val="solid"/>
+                      <a:round/>
+                      <a:headEnd type="none" w="med" len="med"/>
+                      <a:tailEnd type="none" w="med" len="med"/>
+                    </a:lnT>
+                    <a:lnB w="12700" cap="flat" cmpd="sng" algn="ctr">
+                      <a:solidFill>
+                        <a:schemeClr val="tx1"/>
+                      </a:solidFill>
+                      <a:prstDash val="solid"/>
+                      <a:round/>
+                      <a:headEnd type="none" w="med" len="med"/>
+                      <a:tailEnd type="none" w="med" len="med"/>
+                    </a:lnB>
+                    <a:lnTlToBr w="12700" cmpd="sng">
+                      <a:noFill/>
+                      <a:prstDash val="solid"/>
+                    </a:lnTlToBr>
+                    <a:lnBlToTr w="12700" cmpd="sng">
+                      <a:noFill/>
+                      <a:prstDash val="solid"/>
+                    </a:lnBlToTr>
+                    <a:noFill/>
+                  </a:tcPr>
+                </a:tc>
+                <a:tc>
+                  <a:txBody>
+                    <a:bodyPr/>
+                    <a:lstStyle/>
+                    <a:p>
+                      <a:pPr rtl="0" fontAlgn="b"/>
+                      <a:r>
+                        <a:rPr lang="en-US" sz="2400" dirty="0">
+                          <a:effectLst/>
+                        </a:rPr>
+                        <a:t>Bonus problem</a:t>
+                      </a:r>
+                    </a:p>
+                  </a:txBody>
+                  <a:tcPr marL="27196" marR="27196" marT="18131" marB="18131" anchor="b">
+                    <a:lnL w="9525" cap="flat" cmpd="sng" algn="ctr">
+                      <a:noFill/>
+                      <a:prstDash val="solid"/>
+                      <a:round/>
+                      <a:headEnd type="none" w="med" len="med"/>
+                      <a:tailEnd type="none" w="med" len="med"/>
+                    </a:lnL>
+                    <a:lnR w="9525" cap="flat" cmpd="sng" algn="ctr">
+                      <a:noFill/>
+                      <a:prstDash val="solid"/>
+                      <a:round/>
+                      <a:headEnd type="none" w="med" len="med"/>
+                      <a:tailEnd type="none" w="med" len="med"/>
+                    </a:lnR>
+                    <a:lnT w="12700" cap="flat" cmpd="sng" algn="ctr">
+                      <a:solidFill>
+                        <a:schemeClr val="tx1"/>
+                      </a:solidFill>
+                      <a:prstDash val="solid"/>
+                      <a:round/>
+                      <a:headEnd type="none" w="med" len="med"/>
+                      <a:tailEnd type="none" w="med" len="med"/>
+                    </a:lnT>
+                    <a:lnB w="12700" cap="flat" cmpd="sng" algn="ctr">
+                      <a:solidFill>
+                        <a:schemeClr val="tx1"/>
+                      </a:solidFill>
+                      <a:prstDash val="solid"/>
+                      <a:round/>
+                      <a:headEnd type="none" w="med" len="med"/>
+                      <a:tailEnd type="none" w="med" len="med"/>
+                    </a:lnB>
+                    <a:lnTlToBr w="12700" cmpd="sng">
+                      <a:noFill/>
+                      <a:prstDash val="solid"/>
+                    </a:lnTlToBr>
+                    <a:lnBlToTr w="12700" cmpd="sng">
+                      <a:noFill/>
+                      <a:prstDash val="solid"/>
+                    </a:lnBlToTr>
+                    <a:noFill/>
+                  </a:tcPr>
+                </a:tc>
+                <a:tc>
+                  <a:txBody>
+                    <a:bodyPr/>
+                    <a:lstStyle/>
+                    <a:p>
+                      <a:pPr algn="r" rtl="0" fontAlgn="b"/>
+                      <a:r>
+                        <a:rPr lang="en-US" sz="2400" dirty="0">
+                          <a:effectLst/>
+                        </a:rPr>
+                        <a:t>100</a:t>
+                      </a:r>
+                    </a:p>
+                  </a:txBody>
+                  <a:tcPr marL="27196" marR="27196" marT="18131" marB="18131" anchor="b">
+                    <a:lnL w="9525" cap="flat" cmpd="sng" algn="ctr">
+                      <a:noFill/>
+                      <a:prstDash val="solid"/>
+                      <a:round/>
+                      <a:headEnd type="none" w="med" len="med"/>
+                      <a:tailEnd type="none" w="med" len="med"/>
+                    </a:lnL>
+                    <a:lnR w="12700" cap="flat" cmpd="sng" algn="ctr">
+                      <a:solidFill>
+                        <a:schemeClr val="tx1"/>
+                      </a:solidFill>
+                      <a:prstDash val="solid"/>
+                      <a:round/>
+                      <a:headEnd type="none" w="med" len="med"/>
+                      <a:tailEnd type="none" w="med" len="med"/>
+                    </a:lnR>
+                    <a:lnT w="12700" cap="flat" cmpd="sng" algn="ctr">
+                      <a:solidFill>
+                        <a:schemeClr val="tx1"/>
+                      </a:solidFill>
+                      <a:prstDash val="solid"/>
+                      <a:round/>
+                      <a:headEnd type="none" w="med" len="med"/>
+                      <a:tailEnd type="none" w="med" len="med"/>
+                    </a:lnT>
+                    <a:lnB w="12700" cap="flat" cmpd="sng" algn="ctr">
+                      <a:solidFill>
+                        <a:schemeClr val="tx1"/>
+                      </a:solidFill>
+                      <a:prstDash val="solid"/>
+                      <a:round/>
+                      <a:headEnd type="none" w="med" len="med"/>
+                      <a:tailEnd type="none" w="med" len="med"/>
+                    </a:lnB>
+                    <a:lnTlToBr w="12700" cmpd="sng">
+                      <a:noFill/>
+                      <a:prstDash val="solid"/>
+                    </a:lnTlToBr>
+                    <a:lnBlToTr w="12700" cmpd="sng">
+                      <a:noFill/>
+                      <a:prstDash val="solid"/>
+                    </a:lnBlToTr>
+                    <a:noFill/>
+                  </a:tcPr>
+                </a:tc>
+                <a:extLst>
+                  <a:ext uri="{0D108BD9-81ED-4DB2-BD59-A6C34878D82A}">
+                    <a16:rowId xmlns:a16="http://schemas.microsoft.com/office/drawing/2014/main" val="815773450"/>
+                  </a:ext>
+                </a:extLst>
+              </a:tr>
+              <a:tr h="407104">
+                <a:tc>
+                  <a:txBody>
+                    <a:bodyPr/>
+                    <a:lstStyle/>
+                    <a:p>
+                      <a:pPr algn="ctr" rtl="0" fontAlgn="b"/>
+                      <a:r>
+                        <a:rPr lang="en-US" sz="2400" dirty="0">
+                          <a:effectLst/>
+                        </a:rPr>
+                        <a:t>10</a:t>
+                      </a:r>
+                    </a:p>
+                  </a:txBody>
+                  <a:tcPr marL="27196" marR="27196" marT="18131" marB="18131" anchor="b">
+                    <a:lnL w="12700" cap="flat" cmpd="sng" algn="ctr">
+                      <a:solidFill>
+                        <a:schemeClr val="tx1"/>
+                      </a:solidFill>
+                      <a:prstDash val="solid"/>
+                      <a:round/>
+                      <a:headEnd type="none" w="med" len="med"/>
+                      <a:tailEnd type="none" w="med" len="med"/>
+                    </a:lnL>
+                    <a:lnR w="9525" cap="flat" cmpd="sng" algn="ctr">
+                      <a:noFill/>
+                      <a:prstDash val="solid"/>
+                      <a:round/>
+                      <a:headEnd type="none" w="med" len="med"/>
+                      <a:tailEnd type="none" w="med" len="med"/>
+                    </a:lnR>
+                    <a:lnT w="12700" cap="flat" cmpd="sng" algn="ctr">
+                      <a:solidFill>
+                        <a:schemeClr val="tx1"/>
+                      </a:solidFill>
+                      <a:prstDash val="solid"/>
+                      <a:round/>
+                      <a:headEnd type="none" w="med" len="med"/>
+                      <a:tailEnd type="none" w="med" len="med"/>
+                    </a:lnT>
+                    <a:lnB w="12700" cap="flat" cmpd="sng" algn="ctr">
+                      <a:solidFill>
+                        <a:schemeClr val="tx1"/>
+                      </a:solidFill>
+                      <a:prstDash val="solid"/>
+                      <a:round/>
+                      <a:headEnd type="none" w="med" len="med"/>
+                      <a:tailEnd type="none" w="med" len="med"/>
+                    </a:lnB>
+                    <a:lnTlToBr w="12700" cmpd="sng">
+                      <a:noFill/>
+                      <a:prstDash val="solid"/>
+                    </a:lnTlToBr>
+                    <a:lnBlToTr w="12700" cmpd="sng">
+                      <a:noFill/>
+                      <a:prstDash val="solid"/>
+                    </a:lnBlToTr>
+                    <a:noFill/>
+                  </a:tcPr>
+                </a:tc>
+                <a:tc>
+                  <a:txBody>
+                    <a:bodyPr/>
+                    <a:lstStyle/>
+                    <a:p>
+                      <a:pPr rtl="0" fontAlgn="b"/>
+                      <a:r>
+                        <a:rPr lang="en-US" sz="2400" dirty="0">
+                          <a:effectLst/>
+                        </a:rPr>
+                        <a:t>- </a:t>
+                      </a:r>
+                    </a:p>
+                  </a:txBody>
+                  <a:tcPr marL="27196" marR="27196" marT="18131" marB="18131" anchor="b">
+                    <a:lnL w="9525" cap="flat" cmpd="sng" algn="ctr">
+                      <a:noFill/>
+                      <a:prstDash val="solid"/>
+                      <a:round/>
+                      <a:headEnd type="none" w="med" len="med"/>
+                      <a:tailEnd type="none" w="med" len="med"/>
+                    </a:lnL>
+                    <a:lnR w="9525" cap="flat" cmpd="sng" algn="ctr">
+                      <a:noFill/>
+                      <a:prstDash val="solid"/>
+                      <a:round/>
+                      <a:headEnd type="none" w="med" len="med"/>
+                      <a:tailEnd type="none" w="med" len="med"/>
+                    </a:lnR>
+                    <a:lnT w="12700" cap="flat" cmpd="sng" algn="ctr">
+                      <a:solidFill>
+                        <a:schemeClr val="tx1"/>
+                      </a:solidFill>
+                      <a:prstDash val="solid"/>
+                      <a:round/>
+                      <a:headEnd type="none" w="med" len="med"/>
+                      <a:tailEnd type="none" w="med" len="med"/>
+                    </a:lnT>
+                    <a:lnB w="12700" cap="flat" cmpd="sng" algn="ctr">
+                      <a:solidFill>
+                        <a:schemeClr val="tx1"/>
+                      </a:solidFill>
+                      <a:prstDash val="solid"/>
+                      <a:round/>
+                      <a:headEnd type="none" w="med" len="med"/>
+                      <a:tailEnd type="none" w="med" len="med"/>
+                    </a:lnB>
+                    <a:lnTlToBr w="12700" cmpd="sng">
+                      <a:noFill/>
+                      <a:prstDash val="solid"/>
+                    </a:lnTlToBr>
+                    <a:lnBlToTr w="12700" cmpd="sng">
+                      <a:noFill/>
+                      <a:prstDash val="solid"/>
+                    </a:lnBlToTr>
+                    <a:noFill/>
+                  </a:tcPr>
+                </a:tc>
+                <a:tc>
+                  <a:txBody>
+                    <a:bodyPr/>
+                    <a:lstStyle/>
+                    <a:p>
+                      <a:pPr algn="r" rtl="0" fontAlgn="b"/>
+                      <a:r>
+                        <a:rPr lang="en-US" sz="2400" dirty="0">
+                          <a:effectLst/>
+                        </a:rPr>
+                        <a:t>-</a:t>
+                      </a:r>
+                    </a:p>
+                  </a:txBody>
+                  <a:tcPr marL="27196" marR="27196" marT="18131" marB="18131" anchor="b">
+                    <a:lnL w="9525" cap="flat" cmpd="sng" algn="ctr">
+                      <a:noFill/>
+                      <a:prstDash val="solid"/>
+                      <a:round/>
+                      <a:headEnd type="none" w="med" len="med"/>
+                      <a:tailEnd type="none" w="med" len="med"/>
+                    </a:lnL>
+                    <a:lnR w="12700" cap="flat" cmpd="sng" algn="ctr">
+                      <a:solidFill>
+                        <a:schemeClr val="tx1"/>
+                      </a:solidFill>
+                      <a:prstDash val="solid"/>
+                      <a:round/>
+                      <a:headEnd type="none" w="med" len="med"/>
+                      <a:tailEnd type="none" w="med" len="med"/>
+                    </a:lnR>
+                    <a:lnT w="12700" cap="flat" cmpd="sng" algn="ctr">
+                      <a:solidFill>
+                        <a:schemeClr val="tx1"/>
+                      </a:solidFill>
+                      <a:prstDash val="solid"/>
+                      <a:round/>
+                      <a:headEnd type="none" w="med" len="med"/>
+                      <a:tailEnd type="none" w="med" len="med"/>
+                    </a:lnT>
+                    <a:lnB w="12700" cap="flat" cmpd="sng" algn="ctr">
+                      <a:solidFill>
+                        <a:schemeClr val="tx1"/>
+                      </a:solidFill>
+                      <a:prstDash val="solid"/>
+                      <a:round/>
+                      <a:headEnd type="none" w="med" len="med"/>
+                      <a:tailEnd type="none" w="med" len="med"/>
+                    </a:lnB>
+                    <a:lnTlToBr w="12700" cmpd="sng">
+                      <a:noFill/>
+                      <a:prstDash val="solid"/>
+                    </a:lnTlToBr>
+                    <a:lnBlToTr w="12700" cmpd="sng">
+                      <a:noFill/>
+                      <a:prstDash val="solid"/>
+                    </a:lnBlToTr>
+                    <a:noFill/>
+                  </a:tcPr>
+                </a:tc>
+                <a:extLst>
+                  <a:ext uri="{0D108BD9-81ED-4DB2-BD59-A6C34878D82A}">
+                    <a16:rowId xmlns:a16="http://schemas.microsoft.com/office/drawing/2014/main" val="2707081764"/>
+                  </a:ext>
+                </a:extLst>
+              </a:tr>
+              <a:tr h="407104">
+                <a:tc>
+                  <a:txBody>
+                    <a:bodyPr/>
+                    <a:lstStyle/>
+                    <a:p>
+                      <a:pPr algn="ctr" rtl="0" fontAlgn="b"/>
+                      <a:endParaRPr lang="en-US" sz="2400" dirty="0">
+                        <a:effectLst/>
+                      </a:endParaRPr>
+                    </a:p>
+                  </a:txBody>
+                  <a:tcPr marL="27196" marR="27196" marT="18131" marB="18131" anchor="b">
+                    <a:lnL w="12700" cap="flat" cmpd="sng" algn="ctr">
+                      <a:solidFill>
+                        <a:schemeClr val="tx1"/>
+                      </a:solidFill>
+                      <a:prstDash val="solid"/>
+                      <a:round/>
+                      <a:headEnd type="none" w="med" len="med"/>
+                      <a:tailEnd type="none" w="med" len="med"/>
+                    </a:lnL>
+                    <a:lnR w="9525" cap="flat" cmpd="sng" algn="ctr">
+                      <a:noFill/>
+                      <a:prstDash val="solid"/>
+                      <a:round/>
+                      <a:headEnd type="none" w="med" len="med"/>
+                      <a:tailEnd type="none" w="med" len="med"/>
+                    </a:lnR>
+                    <a:lnT w="12700" cap="flat" cmpd="sng" algn="ctr">
+                      <a:solidFill>
+                        <a:schemeClr val="tx1"/>
+                      </a:solidFill>
+                      <a:prstDash val="solid"/>
+                      <a:round/>
+                      <a:headEnd type="none" w="med" len="med"/>
+                      <a:tailEnd type="none" w="med" len="med"/>
+                    </a:lnT>
+                    <a:lnB w="12700" cap="flat" cmpd="sng" algn="ctr">
+                      <a:solidFill>
+                        <a:schemeClr val="tx1"/>
+                      </a:solidFill>
+                      <a:prstDash val="solid"/>
+                      <a:round/>
+                      <a:headEnd type="none" w="med" len="med"/>
+                      <a:tailEnd type="none" w="med" len="med"/>
+                    </a:lnB>
+                    <a:lnTlToBr w="12700" cmpd="sng">
+                      <a:noFill/>
+                      <a:prstDash val="solid"/>
+                    </a:lnTlToBr>
+                    <a:lnBlToTr w="12700" cmpd="sng">
+                      <a:noFill/>
+                      <a:prstDash val="solid"/>
+                    </a:lnBlToTr>
+                    <a:noFill/>
+                  </a:tcPr>
+                </a:tc>
+                <a:tc>
+                  <a:txBody>
+                    <a:bodyPr/>
+                    <a:lstStyle/>
+                    <a:p>
+                      <a:pPr rtl="0" fontAlgn="b"/>
+                      <a:endParaRPr lang="en-US" sz="2400" dirty="0">
+                        <a:effectLst/>
+                      </a:endParaRPr>
+                    </a:p>
+                  </a:txBody>
+                  <a:tcPr marL="27196" marR="27196" marT="18131" marB="18131" anchor="b">
+                    <a:lnL w="9525" cap="flat" cmpd="sng" algn="ctr">
+                      <a:noFill/>
+                      <a:prstDash val="solid"/>
+                      <a:round/>
+                      <a:headEnd type="none" w="med" len="med"/>
+                      <a:tailEnd type="none" w="med" len="med"/>
+                    </a:lnL>
+                    <a:lnR w="9525" cap="flat" cmpd="sng" algn="ctr">
+                      <a:noFill/>
+                      <a:prstDash val="solid"/>
+                      <a:round/>
+                      <a:headEnd type="none" w="med" len="med"/>
+                      <a:tailEnd type="none" w="med" len="med"/>
+                    </a:lnR>
+                    <a:lnT w="12700" cap="flat" cmpd="sng" algn="ctr">
+                      <a:solidFill>
+                        <a:schemeClr val="tx1"/>
+                      </a:solidFill>
+                      <a:prstDash val="solid"/>
+                      <a:round/>
+                      <a:headEnd type="none" w="med" len="med"/>
+                      <a:tailEnd type="none" w="med" len="med"/>
+                    </a:lnT>
+                    <a:lnB w="12700" cap="flat" cmpd="sng" algn="ctr">
+                      <a:solidFill>
+                        <a:schemeClr val="tx1"/>
+                      </a:solidFill>
+                      <a:prstDash val="solid"/>
+                      <a:round/>
+                      <a:headEnd type="none" w="med" len="med"/>
+                      <a:tailEnd type="none" w="med" len="med"/>
+                    </a:lnB>
+                    <a:lnTlToBr w="12700" cmpd="sng">
+                      <a:noFill/>
+                      <a:prstDash val="solid"/>
+                    </a:lnTlToBr>
+                    <a:lnBlToTr w="12700" cmpd="sng">
+                      <a:noFill/>
+                      <a:prstDash val="solid"/>
+                    </a:lnBlToTr>
+                    <a:noFill/>
+                  </a:tcPr>
+                </a:tc>
+                <a:tc>
+                  <a:txBody>
+                    <a:bodyPr/>
+                    <a:lstStyle/>
+                    <a:p>
+                      <a:pPr algn="r" rtl="0" fontAlgn="b"/>
+                      <a:endParaRPr lang="en-US" sz="2400" dirty="0">
+                        <a:effectLst/>
+                      </a:endParaRPr>
+                    </a:p>
+                  </a:txBody>
+                  <a:tcPr marL="27196" marR="27196" marT="18131" marB="18131" anchor="b">
+                    <a:lnL w="9525" cap="flat" cmpd="sng" algn="ctr">
+                      <a:noFill/>
+                      <a:prstDash val="solid"/>
+                      <a:round/>
+                      <a:headEnd type="none" w="med" len="med"/>
+                      <a:tailEnd type="none" w="med" len="med"/>
+                    </a:lnL>
+                    <a:lnR w="12700" cap="flat" cmpd="sng" algn="ctr">
+                      <a:solidFill>
+                        <a:schemeClr val="tx1"/>
+                      </a:solidFill>
+                      <a:prstDash val="solid"/>
+                      <a:round/>
+                      <a:headEnd type="none" w="med" len="med"/>
+                      <a:tailEnd type="none" w="med" len="med"/>
+                    </a:lnR>
+                    <a:lnT w="12700" cap="flat" cmpd="sng" algn="ctr">
+                      <a:solidFill>
+                        <a:schemeClr val="tx1"/>
+                      </a:solidFill>
+                      <a:prstDash val="solid"/>
+                      <a:round/>
+                      <a:headEnd type="none" w="med" len="med"/>
+                      <a:tailEnd type="none" w="med" len="med"/>
+                    </a:lnT>
+                    <a:lnB w="12700" cap="flat" cmpd="sng" algn="ctr">
+                      <a:solidFill>
+                        <a:schemeClr val="tx1"/>
+                      </a:solidFill>
+                      <a:prstDash val="solid"/>
+                      <a:round/>
+                      <a:headEnd type="none" w="med" len="med"/>
+                      <a:tailEnd type="none" w="med" len="med"/>
+                    </a:lnB>
+                    <a:lnTlToBr w="12700" cmpd="sng">
+                      <a:noFill/>
+                      <a:prstDash val="solid"/>
+                    </a:lnTlToBr>
+                    <a:lnBlToTr w="12700" cmpd="sng">
+                      <a:noFill/>
+                      <a:prstDash val="solid"/>
+                    </a:lnBlToTr>
+                    <a:noFill/>
+                  </a:tcPr>
+                </a:tc>
+                <a:extLst>
+                  <a:ext uri="{0D108BD9-81ED-4DB2-BD59-A6C34878D82A}">
+                    <a16:rowId xmlns:a16="http://schemas.microsoft.com/office/drawing/2014/main" val="2219228106"/>
+                  </a:ext>
+                </a:extLst>
+              </a:tr>
+            </a:tbl>
+          </a:graphicData>
+        </a:graphic>
+      </p:graphicFrame>
+      <p:sp>
+        <p:nvSpPr>
+          <p:cNvPr id="6" name="TextBox 5">
+            <a:extLst>
+              <a:ext uri="{FF2B5EF4-FFF2-40B4-BE49-F238E27FC236}">
+                <a16:creationId xmlns:a16="http://schemas.microsoft.com/office/drawing/2014/main" id="{8604BBA6-5976-78DF-D6A6-5F7224D79B41}"/>
+              </a:ext>
+            </a:extLst>
+          </p:cNvPr>
+          <p:cNvSpPr txBox="1"/>
+          <p:nvPr/>
+        </p:nvSpPr>
+        <p:spPr>
+          <a:xfrm>
+            <a:off x="533400" y="1662979"/>
+            <a:ext cx="3810000" cy="461665"/>
+          </a:xfrm>
+          <a:prstGeom prst="rect">
+            <a:avLst/>
+          </a:prstGeom>
+          <a:noFill/>
+        </p:spPr>
+        <p:txBody>
+          <a:bodyPr wrap="square" rtlCol="0">
+            <a:spAutoFit/>
+          </a:bodyPr>
+          <a:lstStyle/>
+          <a:p>
+            <a:r>
+              <a:rPr lang="en-US" sz="2400" i="1" baseline="30000" dirty="0"/>
+              <a:t>* </a:t>
+            </a:r>
+            <a:r>
+              <a:rPr lang="en-US" sz="2400" i="1" dirty="0"/>
+              <a:t>Subject to minor changes </a:t>
+            </a:r>
+          </a:p>
+        </p:txBody>
+      </p:sp>
+    </p:spTree>
+    <p:extLst>
+      <p:ext uri="{BB962C8B-B14F-4D97-AF65-F5344CB8AC3E}">
+        <p14:creationId xmlns:p14="http://schemas.microsoft.com/office/powerpoint/2010/main" val="1685981324"/>
+      </p:ext>
+    </p:extLst>
+  </p:cSld>
+  <p:clrMapOvr>
+    <a:masterClrMapping/>
+  </p:clrMapOvr>
+</p:sld>
+</file>
+
+<file path=ppt/slides/slide11.xml><?xml version="1.0" encoding="utf-8"?>
+<p:sld xmlns:a="http://schemas.openxmlformats.org/drawingml/2006/main" xmlns:r="http://schemas.openxmlformats.org/officeDocument/2006/relationships" xmlns:p="http://schemas.openxmlformats.org/presentationml/2006/main">
+  <p:cSld>
+    <p:spTree>
+      <p:nvGrpSpPr>
+        <p:cNvPr id="1" name="">
+          <a:extLst>
+            <a:ext uri="{FF2B5EF4-FFF2-40B4-BE49-F238E27FC236}">
               <a16:creationId xmlns:a16="http://schemas.microsoft.com/office/drawing/2014/main" id="{E5C16E2D-4717-C51B-410E-22E443E0BFC4}"/>
             </a:ext>
           </a:extLst>
@@ -4648,7 +7031,7 @@
                   <a:srgbClr val="002060"/>
                 </a:solidFill>
               </a:rPr>
-              <a:t>Assignment</a:t>
+              <a:t>Assignments</a:t>
             </a:r>
           </a:p>
         </p:txBody>
@@ -4689,18 +7072,12 @@
             <a:endParaRPr lang="en-US" sz="3200" dirty="0"/>
           </a:p>
           <a:p>
-            <a:pPr marL="0" indent="0">
-              <a:buNone/>
-            </a:pPr>
             <a:r>
               <a:rPr lang="en-US" sz="3200" dirty="0"/>
               <a:t>Available by 5PM on Wednesdays</a:t>
             </a:r>
           </a:p>
           <a:p>
-            <a:pPr marL="0" indent="0">
-              <a:buNone/>
-            </a:pPr>
             <a:r>
               <a:rPr lang="en-US" sz="3200" dirty="0"/>
               <a:t>Due by next Wednesdays 11PM</a:t>
@@ -4721,7 +7098,7 @@
 </p:sld>
 </file>
 
-<file path=ppt/slides/slide11.xml><?xml version="1.0" encoding="utf-8"?>
+<file path=ppt/slides/slide12.xml><?xml version="1.0" encoding="utf-8"?>
 <p:sld xmlns:a="http://schemas.openxmlformats.org/drawingml/2006/main" xmlns:r="http://schemas.openxmlformats.org/officeDocument/2006/relationships" xmlns:p="http://schemas.openxmlformats.org/presentationml/2006/main">
   <p:cSld>
     <p:spTree>
@@ -4880,2389 +7257,6 @@
     <p:extLst>
       <p:ext uri="{BB962C8B-B14F-4D97-AF65-F5344CB8AC3E}">
         <p14:creationId xmlns:p14="http://schemas.microsoft.com/office/powerpoint/2010/main" val="4122199566"/>
-      </p:ext>
-    </p:extLst>
-  </p:cSld>
-  <p:clrMapOvr>
-    <a:masterClrMapping/>
-  </p:clrMapOvr>
-</p:sld>
-</file>
-
-<file path=ppt/slides/slide12.xml><?xml version="1.0" encoding="utf-8"?>
-<p:sld xmlns:a="http://schemas.openxmlformats.org/drawingml/2006/main" xmlns:r="http://schemas.openxmlformats.org/officeDocument/2006/relationships" xmlns:p="http://schemas.openxmlformats.org/presentationml/2006/main">
-  <p:cSld>
-    <p:spTree>
-      <p:nvGrpSpPr>
-        <p:cNvPr id="1" name="">
-          <a:extLst>
-            <a:ext uri="{FF2B5EF4-FFF2-40B4-BE49-F238E27FC236}">
-              <a16:creationId xmlns:a16="http://schemas.microsoft.com/office/drawing/2014/main" id="{CB0F8E8C-3FC9-6849-D243-9EB38FDC010F}"/>
-            </a:ext>
-          </a:extLst>
-        </p:cNvPr>
-        <p:cNvGrpSpPr/>
-        <p:nvPr/>
-      </p:nvGrpSpPr>
-      <p:grpSpPr>
-        <a:xfrm>
-          <a:off x="0" y="0"/>
-          <a:ext cx="0" cy="0"/>
-          <a:chOff x="0" y="0"/>
-          <a:chExt cx="0" cy="0"/>
-        </a:xfrm>
-      </p:grpSpPr>
-      <p:sp>
-        <p:nvSpPr>
-          <p:cNvPr id="2" name="Title 1">
-            <a:extLst>
-              <a:ext uri="{FF2B5EF4-FFF2-40B4-BE49-F238E27FC236}">
-                <a16:creationId xmlns:a16="http://schemas.microsoft.com/office/drawing/2014/main" id="{8B785528-3FE0-6384-6DC2-4F38F55F19EA}"/>
-              </a:ext>
-            </a:extLst>
-          </p:cNvPr>
-          <p:cNvSpPr>
-            <a:spLocks noGrp="1"/>
-          </p:cNvSpPr>
-          <p:nvPr>
-            <p:ph type="title"/>
-          </p:nvPr>
-        </p:nvSpPr>
-        <p:spPr/>
-        <p:txBody>
-          <a:bodyPr/>
-          <a:lstStyle/>
-          <a:p>
-            <a:r>
-              <a:rPr lang="en-US" dirty="0">
-                <a:solidFill>
-                  <a:srgbClr val="002060"/>
-                </a:solidFill>
-              </a:rPr>
-              <a:t>Assignments</a:t>
-            </a:r>
-          </a:p>
-        </p:txBody>
-      </p:sp>
-      <p:graphicFrame>
-        <p:nvGraphicFramePr>
-          <p:cNvPr id="4" name="Content Placeholder 3">
-            <a:extLst>
-              <a:ext uri="{FF2B5EF4-FFF2-40B4-BE49-F238E27FC236}">
-                <a16:creationId xmlns:a16="http://schemas.microsoft.com/office/drawing/2014/main" id="{7A8241B8-BCF4-D1CF-2ECB-715308782461}"/>
-              </a:ext>
-            </a:extLst>
-          </p:cNvPr>
-          <p:cNvGraphicFramePr>
-            <a:graphicFrameLocks noGrp="1"/>
-          </p:cNvGraphicFramePr>
-          <p:nvPr>
-            <p:ph idx="1"/>
-            <p:extLst>
-              <p:ext uri="{D42A27DB-BD31-4B8C-83A1-F6EECF244321}">
-                <p14:modId xmlns:p14="http://schemas.microsoft.com/office/powerpoint/2010/main" val="4071851170"/>
-              </p:ext>
-            </p:extLst>
-          </p:nvPr>
-        </p:nvGraphicFramePr>
-        <p:xfrm>
-          <a:off x="4648200" y="838200"/>
-          <a:ext cx="5257800" cy="3879387"/>
-        </p:xfrm>
-        <a:graphic>
-          <a:graphicData uri="http://schemas.openxmlformats.org/drawingml/2006/table">
-            <a:tbl>
-              <a:tblPr/>
-              <a:tblGrid>
-                <a:gridCol w="762000">
-                  <a:extLst>
-                    <a:ext uri="{9D8B030D-6E8A-4147-A177-3AD203B41FA5}">
-                      <a16:colId xmlns:a16="http://schemas.microsoft.com/office/drawing/2014/main" val="3810534210"/>
-                    </a:ext>
-                  </a:extLst>
-                </a:gridCol>
-                <a:gridCol w="3657600">
-                  <a:extLst>
-                    <a:ext uri="{9D8B030D-6E8A-4147-A177-3AD203B41FA5}">
-                      <a16:colId xmlns:a16="http://schemas.microsoft.com/office/drawing/2014/main" val="2989509016"/>
-                    </a:ext>
-                  </a:extLst>
-                </a:gridCol>
-                <a:gridCol w="838200">
-                  <a:extLst>
-                    <a:ext uri="{9D8B030D-6E8A-4147-A177-3AD203B41FA5}">
-                      <a16:colId xmlns:a16="http://schemas.microsoft.com/office/drawing/2014/main" val="1346928536"/>
-                    </a:ext>
-                  </a:extLst>
-                </a:gridCol>
-              </a:tblGrid>
-              <a:tr h="297341">
-                <a:tc>
-                  <a:txBody>
-                    <a:bodyPr/>
-                    <a:lstStyle/>
-                    <a:p>
-                      <a:pPr algn="ctr" rtl="0" fontAlgn="b"/>
-                      <a:r>
-                        <a:rPr lang="en-US" sz="1700" b="1" dirty="0">
-                          <a:effectLst/>
-                        </a:rPr>
-                        <a:t>Week</a:t>
-                      </a:r>
-                    </a:p>
-                  </a:txBody>
-                  <a:tcPr marL="27196" marR="27196" marT="18131" marB="18131" anchor="b">
-                    <a:lnL w="12700" cap="flat" cmpd="sng" algn="ctr">
-                      <a:solidFill>
-                        <a:schemeClr val="tx1"/>
-                      </a:solidFill>
-                      <a:prstDash val="solid"/>
-                      <a:round/>
-                      <a:headEnd type="none" w="med" len="med"/>
-                      <a:tailEnd type="none" w="med" len="med"/>
-                    </a:lnL>
-                    <a:lnR w="9525" cap="flat" cmpd="sng" algn="ctr">
-                      <a:noFill/>
-                      <a:prstDash val="solid"/>
-                      <a:round/>
-                      <a:headEnd type="none" w="med" len="med"/>
-                      <a:tailEnd type="none" w="med" len="med"/>
-                    </a:lnR>
-                    <a:lnT w="12700" cap="flat" cmpd="sng" algn="ctr">
-                      <a:solidFill>
-                        <a:schemeClr val="tx1"/>
-                      </a:solidFill>
-                      <a:prstDash val="solid"/>
-                      <a:round/>
-                      <a:headEnd type="none" w="med" len="med"/>
-                      <a:tailEnd type="none" w="med" len="med"/>
-                    </a:lnT>
-                    <a:lnB w="12700" cap="flat" cmpd="sng" algn="ctr">
-                      <a:solidFill>
-                        <a:schemeClr val="tx1"/>
-                      </a:solidFill>
-                      <a:prstDash val="solid"/>
-                      <a:round/>
-                      <a:headEnd type="none" w="med" len="med"/>
-                      <a:tailEnd type="none" w="med" len="med"/>
-                    </a:lnB>
-                    <a:lnTlToBr w="12700" cmpd="sng">
-                      <a:noFill/>
-                      <a:prstDash val="solid"/>
-                    </a:lnTlToBr>
-                    <a:lnBlToTr w="12700" cmpd="sng">
-                      <a:noFill/>
-                      <a:prstDash val="solid"/>
-                    </a:lnBlToTr>
-                    <a:solidFill>
-                      <a:srgbClr val="D9EAD3"/>
-                    </a:solidFill>
-                  </a:tcPr>
-                </a:tc>
-                <a:tc>
-                  <a:txBody>
-                    <a:bodyPr/>
-                    <a:lstStyle/>
-                    <a:p>
-                      <a:pPr rtl="0" fontAlgn="b"/>
-                      <a:r>
-                        <a:rPr lang="en-US" sz="1700" b="1" dirty="0">
-                          <a:effectLst/>
-                        </a:rPr>
-                        <a:t>Assignment</a:t>
-                      </a:r>
-                    </a:p>
-                  </a:txBody>
-                  <a:tcPr marL="27196" marR="27196" marT="18131" marB="18131" anchor="b">
-                    <a:lnL w="9525" cap="flat" cmpd="sng" algn="ctr">
-                      <a:noFill/>
-                      <a:prstDash val="solid"/>
-                      <a:round/>
-                      <a:headEnd type="none" w="med" len="med"/>
-                      <a:tailEnd type="none" w="med" len="med"/>
-                    </a:lnL>
-                    <a:lnR w="9525" cap="flat" cmpd="sng" algn="ctr">
-                      <a:noFill/>
-                      <a:prstDash val="solid"/>
-                      <a:round/>
-                      <a:headEnd type="none" w="med" len="med"/>
-                      <a:tailEnd type="none" w="med" len="med"/>
-                    </a:lnR>
-                    <a:lnT w="12700" cap="flat" cmpd="sng" algn="ctr">
-                      <a:solidFill>
-                        <a:schemeClr val="tx1"/>
-                      </a:solidFill>
-                      <a:prstDash val="solid"/>
-                      <a:round/>
-                      <a:headEnd type="none" w="med" len="med"/>
-                      <a:tailEnd type="none" w="med" len="med"/>
-                    </a:lnT>
-                    <a:lnB w="12700" cap="flat" cmpd="sng" algn="ctr">
-                      <a:solidFill>
-                        <a:schemeClr val="tx1"/>
-                      </a:solidFill>
-                      <a:prstDash val="solid"/>
-                      <a:round/>
-                      <a:headEnd type="none" w="med" len="med"/>
-                      <a:tailEnd type="none" w="med" len="med"/>
-                    </a:lnB>
-                    <a:lnTlToBr w="12700" cmpd="sng">
-                      <a:noFill/>
-                      <a:prstDash val="solid"/>
-                    </a:lnTlToBr>
-                    <a:lnBlToTr w="12700" cmpd="sng">
-                      <a:noFill/>
-                      <a:prstDash val="solid"/>
-                    </a:lnBlToTr>
-                    <a:solidFill>
-                      <a:srgbClr val="D9EAD3"/>
-                    </a:solidFill>
-                  </a:tcPr>
-                </a:tc>
-                <a:tc>
-                  <a:txBody>
-                    <a:bodyPr/>
-                    <a:lstStyle/>
-                    <a:p>
-                      <a:pPr rtl="0" fontAlgn="b"/>
-                      <a:r>
-                        <a:rPr lang="en-US" sz="1700" b="1" dirty="0">
-                          <a:effectLst/>
-                        </a:rPr>
-                        <a:t>Points</a:t>
-                      </a:r>
-                    </a:p>
-                  </a:txBody>
-                  <a:tcPr marL="27196" marR="27196" marT="18131" marB="18131" anchor="b">
-                    <a:lnL w="9525" cap="flat" cmpd="sng" algn="ctr">
-                      <a:noFill/>
-                      <a:prstDash val="solid"/>
-                      <a:round/>
-                      <a:headEnd type="none" w="med" len="med"/>
-                      <a:tailEnd type="none" w="med" len="med"/>
-                    </a:lnL>
-                    <a:lnR w="12700" cap="flat" cmpd="sng" algn="ctr">
-                      <a:solidFill>
-                        <a:schemeClr val="tx1"/>
-                      </a:solidFill>
-                      <a:prstDash val="solid"/>
-                      <a:round/>
-                      <a:headEnd type="none" w="med" len="med"/>
-                      <a:tailEnd type="none" w="med" len="med"/>
-                    </a:lnR>
-                    <a:lnT w="12700" cap="flat" cmpd="sng" algn="ctr">
-                      <a:solidFill>
-                        <a:schemeClr val="tx1"/>
-                      </a:solidFill>
-                      <a:prstDash val="solid"/>
-                      <a:round/>
-                      <a:headEnd type="none" w="med" len="med"/>
-                      <a:tailEnd type="none" w="med" len="med"/>
-                    </a:lnT>
-                    <a:lnB w="12700" cap="flat" cmpd="sng" algn="ctr">
-                      <a:solidFill>
-                        <a:schemeClr val="tx1"/>
-                      </a:solidFill>
-                      <a:prstDash val="solid"/>
-                      <a:round/>
-                      <a:headEnd type="none" w="med" len="med"/>
-                      <a:tailEnd type="none" w="med" len="med"/>
-                    </a:lnB>
-                    <a:lnTlToBr w="12700" cmpd="sng">
-                      <a:noFill/>
-                      <a:prstDash val="solid"/>
-                    </a:lnTlToBr>
-                    <a:lnBlToTr w="12700" cmpd="sng">
-                      <a:noFill/>
-                      <a:prstDash val="solid"/>
-                    </a:lnBlToTr>
-                    <a:solidFill>
-                      <a:srgbClr val="D9EAD3"/>
-                    </a:solidFill>
-                  </a:tcPr>
-                </a:tc>
-                <a:extLst>
-                  <a:ext uri="{0D108BD9-81ED-4DB2-BD59-A6C34878D82A}">
-                    <a16:rowId xmlns:a16="http://schemas.microsoft.com/office/drawing/2014/main" val="827076816"/>
-                  </a:ext>
-                </a:extLst>
-              </a:tr>
-              <a:tr h="297341">
-                <a:tc>
-                  <a:txBody>
-                    <a:bodyPr/>
-                    <a:lstStyle/>
-                    <a:p>
-                      <a:pPr algn="ctr" rtl="0" fontAlgn="b"/>
-                      <a:r>
-                        <a:rPr lang="en-US" sz="1700" dirty="0">
-                          <a:effectLst/>
-                        </a:rPr>
-                        <a:t>1</a:t>
-                      </a:r>
-                    </a:p>
-                  </a:txBody>
-                  <a:tcPr marL="27196" marR="27196" marT="18131" marB="18131" anchor="b">
-                    <a:lnL w="12700" cap="flat" cmpd="sng" algn="ctr">
-                      <a:solidFill>
-                        <a:schemeClr val="tx1"/>
-                      </a:solidFill>
-                      <a:prstDash val="solid"/>
-                      <a:round/>
-                      <a:headEnd type="none" w="med" len="med"/>
-                      <a:tailEnd type="none" w="med" len="med"/>
-                    </a:lnL>
-                    <a:lnR w="9525" cap="flat" cmpd="sng" algn="ctr">
-                      <a:noFill/>
-                      <a:prstDash val="solid"/>
-                      <a:round/>
-                      <a:headEnd type="none" w="med" len="med"/>
-                      <a:tailEnd type="none" w="med" len="med"/>
-                    </a:lnR>
-                    <a:lnT w="12700" cap="flat" cmpd="sng" algn="ctr">
-                      <a:solidFill>
-                        <a:schemeClr val="tx1"/>
-                      </a:solidFill>
-                      <a:prstDash val="solid"/>
-                      <a:round/>
-                      <a:headEnd type="none" w="med" len="med"/>
-                      <a:tailEnd type="none" w="med" len="med"/>
-                    </a:lnT>
-                    <a:lnB w="12700" cap="flat" cmpd="sng" algn="ctr">
-                      <a:solidFill>
-                        <a:schemeClr val="tx1"/>
-                      </a:solidFill>
-                      <a:prstDash val="solid"/>
-                      <a:round/>
-                      <a:headEnd type="none" w="med" len="med"/>
-                      <a:tailEnd type="none" w="med" len="med"/>
-                    </a:lnB>
-                    <a:lnTlToBr w="12700" cmpd="sng">
-                      <a:noFill/>
-                      <a:prstDash val="solid"/>
-                    </a:lnTlToBr>
-                    <a:lnBlToTr w="12700" cmpd="sng">
-                      <a:noFill/>
-                      <a:prstDash val="solid"/>
-                    </a:lnBlToTr>
-                    <a:noFill/>
-                  </a:tcPr>
-                </a:tc>
-                <a:tc>
-                  <a:txBody>
-                    <a:bodyPr/>
-                    <a:lstStyle/>
-                    <a:p>
-                      <a:pPr rtl="0" fontAlgn="b"/>
-                      <a:r>
-                        <a:rPr lang="en-US" sz="1700" dirty="0">
-                          <a:effectLst/>
-                        </a:rPr>
-                        <a:t>Data Modeling</a:t>
-                      </a:r>
-                    </a:p>
-                  </a:txBody>
-                  <a:tcPr marL="27196" marR="27196" marT="18131" marB="18131" anchor="b">
-                    <a:lnL w="9525" cap="flat" cmpd="sng" algn="ctr">
-                      <a:noFill/>
-                      <a:prstDash val="solid"/>
-                      <a:round/>
-                      <a:headEnd type="none" w="med" len="med"/>
-                      <a:tailEnd type="none" w="med" len="med"/>
-                    </a:lnL>
-                    <a:lnR w="9525" cap="flat" cmpd="sng" algn="ctr">
-                      <a:noFill/>
-                      <a:prstDash val="solid"/>
-                      <a:round/>
-                      <a:headEnd type="none" w="med" len="med"/>
-                      <a:tailEnd type="none" w="med" len="med"/>
-                    </a:lnR>
-                    <a:lnT w="12700" cap="flat" cmpd="sng" algn="ctr">
-                      <a:solidFill>
-                        <a:schemeClr val="tx1"/>
-                      </a:solidFill>
-                      <a:prstDash val="solid"/>
-                      <a:round/>
-                      <a:headEnd type="none" w="med" len="med"/>
-                      <a:tailEnd type="none" w="med" len="med"/>
-                    </a:lnT>
-                    <a:lnB w="12700" cap="flat" cmpd="sng" algn="ctr">
-                      <a:solidFill>
-                        <a:schemeClr val="tx1"/>
-                      </a:solidFill>
-                      <a:prstDash val="solid"/>
-                      <a:round/>
-                      <a:headEnd type="none" w="med" len="med"/>
-                      <a:tailEnd type="none" w="med" len="med"/>
-                    </a:lnB>
-                    <a:lnTlToBr w="12700" cmpd="sng">
-                      <a:noFill/>
-                      <a:prstDash val="solid"/>
-                    </a:lnTlToBr>
-                    <a:lnBlToTr w="12700" cmpd="sng">
-                      <a:noFill/>
-                      <a:prstDash val="solid"/>
-                    </a:lnBlToTr>
-                    <a:noFill/>
-                  </a:tcPr>
-                </a:tc>
-                <a:tc>
-                  <a:txBody>
-                    <a:bodyPr/>
-                    <a:lstStyle/>
-                    <a:p>
-                      <a:pPr algn="r" rtl="0" fontAlgn="b"/>
-                      <a:r>
-                        <a:rPr lang="en-US" sz="1700">
-                          <a:effectLst/>
-                        </a:rPr>
-                        <a:t>100</a:t>
-                      </a:r>
-                    </a:p>
-                  </a:txBody>
-                  <a:tcPr marL="27196" marR="27196" marT="18131" marB="18131" anchor="b">
-                    <a:lnL w="9525" cap="flat" cmpd="sng" algn="ctr">
-                      <a:noFill/>
-                      <a:prstDash val="solid"/>
-                      <a:round/>
-                      <a:headEnd type="none" w="med" len="med"/>
-                      <a:tailEnd type="none" w="med" len="med"/>
-                    </a:lnL>
-                    <a:lnR w="12700" cap="flat" cmpd="sng" algn="ctr">
-                      <a:solidFill>
-                        <a:schemeClr val="tx1"/>
-                      </a:solidFill>
-                      <a:prstDash val="solid"/>
-                      <a:round/>
-                      <a:headEnd type="none" w="med" len="med"/>
-                      <a:tailEnd type="none" w="med" len="med"/>
-                    </a:lnR>
-                    <a:lnT w="12700" cap="flat" cmpd="sng" algn="ctr">
-                      <a:solidFill>
-                        <a:schemeClr val="tx1"/>
-                      </a:solidFill>
-                      <a:prstDash val="solid"/>
-                      <a:round/>
-                      <a:headEnd type="none" w="med" len="med"/>
-                      <a:tailEnd type="none" w="med" len="med"/>
-                    </a:lnT>
-                    <a:lnB w="12700" cap="flat" cmpd="sng" algn="ctr">
-                      <a:solidFill>
-                        <a:schemeClr val="tx1"/>
-                      </a:solidFill>
-                      <a:prstDash val="solid"/>
-                      <a:round/>
-                      <a:headEnd type="none" w="med" len="med"/>
-                      <a:tailEnd type="none" w="med" len="med"/>
-                    </a:lnB>
-                    <a:lnTlToBr w="12700" cmpd="sng">
-                      <a:noFill/>
-                      <a:prstDash val="solid"/>
-                    </a:lnTlToBr>
-                    <a:lnBlToTr w="12700" cmpd="sng">
-                      <a:noFill/>
-                      <a:prstDash val="solid"/>
-                    </a:lnBlToTr>
-                    <a:noFill/>
-                  </a:tcPr>
-                </a:tc>
-                <a:extLst>
-                  <a:ext uri="{0D108BD9-81ED-4DB2-BD59-A6C34878D82A}">
-                    <a16:rowId xmlns:a16="http://schemas.microsoft.com/office/drawing/2014/main" val="3676020966"/>
-                  </a:ext>
-                </a:extLst>
-              </a:tr>
-              <a:tr h="297341">
-                <a:tc>
-                  <a:txBody>
-                    <a:bodyPr/>
-                    <a:lstStyle/>
-                    <a:p>
-                      <a:pPr algn="ctr" rtl="0" fontAlgn="b"/>
-                      <a:r>
-                        <a:rPr lang="en-US" sz="1700" dirty="0">
-                          <a:effectLst/>
-                        </a:rPr>
-                        <a:t>2</a:t>
-                      </a:r>
-                    </a:p>
-                  </a:txBody>
-                  <a:tcPr marL="27196" marR="27196" marT="18131" marB="18131" anchor="b">
-                    <a:lnL w="12700" cap="flat" cmpd="sng" algn="ctr">
-                      <a:solidFill>
-                        <a:schemeClr val="tx1"/>
-                      </a:solidFill>
-                      <a:prstDash val="solid"/>
-                      <a:round/>
-                      <a:headEnd type="none" w="med" len="med"/>
-                      <a:tailEnd type="none" w="med" len="med"/>
-                    </a:lnL>
-                    <a:lnR w="9525" cap="flat" cmpd="sng" algn="ctr">
-                      <a:noFill/>
-                      <a:prstDash val="solid"/>
-                      <a:round/>
-                      <a:headEnd type="none" w="med" len="med"/>
-                      <a:tailEnd type="none" w="med" len="med"/>
-                    </a:lnR>
-                    <a:lnT w="12700" cap="flat" cmpd="sng" algn="ctr">
-                      <a:solidFill>
-                        <a:schemeClr val="tx1"/>
-                      </a:solidFill>
-                      <a:prstDash val="solid"/>
-                      <a:round/>
-                      <a:headEnd type="none" w="med" len="med"/>
-                      <a:tailEnd type="none" w="med" len="med"/>
-                    </a:lnT>
-                    <a:lnB w="12700" cap="flat" cmpd="sng" algn="ctr">
-                      <a:solidFill>
-                        <a:schemeClr val="tx1"/>
-                      </a:solidFill>
-                      <a:prstDash val="solid"/>
-                      <a:round/>
-                      <a:headEnd type="none" w="med" len="med"/>
-                      <a:tailEnd type="none" w="med" len="med"/>
-                    </a:lnB>
-                    <a:lnTlToBr w="12700" cmpd="sng">
-                      <a:noFill/>
-                      <a:prstDash val="solid"/>
-                    </a:lnTlToBr>
-                    <a:lnBlToTr w="12700" cmpd="sng">
-                      <a:noFill/>
-                      <a:prstDash val="solid"/>
-                    </a:lnBlToTr>
-                    <a:noFill/>
-                  </a:tcPr>
-                </a:tc>
-                <a:tc>
-                  <a:txBody>
-                    <a:bodyPr/>
-                    <a:lstStyle/>
-                    <a:p>
-                      <a:pPr rtl="0" fontAlgn="b"/>
-                      <a:r>
-                        <a:rPr lang="en-US" sz="1700">
-                          <a:effectLst/>
-                        </a:rPr>
-                        <a:t>Data Cleaning</a:t>
-                      </a:r>
-                    </a:p>
-                  </a:txBody>
-                  <a:tcPr marL="27196" marR="27196" marT="18131" marB="18131" anchor="b">
-                    <a:lnL w="9525" cap="flat" cmpd="sng" algn="ctr">
-                      <a:noFill/>
-                      <a:prstDash val="solid"/>
-                      <a:round/>
-                      <a:headEnd type="none" w="med" len="med"/>
-                      <a:tailEnd type="none" w="med" len="med"/>
-                    </a:lnL>
-                    <a:lnR w="9525" cap="flat" cmpd="sng" algn="ctr">
-                      <a:noFill/>
-                      <a:prstDash val="solid"/>
-                      <a:round/>
-                      <a:headEnd type="none" w="med" len="med"/>
-                      <a:tailEnd type="none" w="med" len="med"/>
-                    </a:lnR>
-                    <a:lnT w="12700" cap="flat" cmpd="sng" algn="ctr">
-                      <a:solidFill>
-                        <a:schemeClr val="tx1"/>
-                      </a:solidFill>
-                      <a:prstDash val="solid"/>
-                      <a:round/>
-                      <a:headEnd type="none" w="med" len="med"/>
-                      <a:tailEnd type="none" w="med" len="med"/>
-                    </a:lnT>
-                    <a:lnB w="12700" cap="flat" cmpd="sng" algn="ctr">
-                      <a:solidFill>
-                        <a:schemeClr val="tx1"/>
-                      </a:solidFill>
-                      <a:prstDash val="solid"/>
-                      <a:round/>
-                      <a:headEnd type="none" w="med" len="med"/>
-                      <a:tailEnd type="none" w="med" len="med"/>
-                    </a:lnB>
-                    <a:lnTlToBr w="12700" cmpd="sng">
-                      <a:noFill/>
-                      <a:prstDash val="solid"/>
-                    </a:lnTlToBr>
-                    <a:lnBlToTr w="12700" cmpd="sng">
-                      <a:noFill/>
-                      <a:prstDash val="solid"/>
-                    </a:lnBlToTr>
-                    <a:noFill/>
-                  </a:tcPr>
-                </a:tc>
-                <a:tc>
-                  <a:txBody>
-                    <a:bodyPr/>
-                    <a:lstStyle/>
-                    <a:p>
-                      <a:pPr algn="r" rtl="0" fontAlgn="b"/>
-                      <a:r>
-                        <a:rPr lang="en-US" sz="1700">
-                          <a:effectLst/>
-                        </a:rPr>
-                        <a:t>100</a:t>
-                      </a:r>
-                    </a:p>
-                  </a:txBody>
-                  <a:tcPr marL="27196" marR="27196" marT="18131" marB="18131" anchor="b">
-                    <a:lnL w="9525" cap="flat" cmpd="sng" algn="ctr">
-                      <a:noFill/>
-                      <a:prstDash val="solid"/>
-                      <a:round/>
-                      <a:headEnd type="none" w="med" len="med"/>
-                      <a:tailEnd type="none" w="med" len="med"/>
-                    </a:lnL>
-                    <a:lnR w="12700" cap="flat" cmpd="sng" algn="ctr">
-                      <a:solidFill>
-                        <a:schemeClr val="tx1"/>
-                      </a:solidFill>
-                      <a:prstDash val="solid"/>
-                      <a:round/>
-                      <a:headEnd type="none" w="med" len="med"/>
-                      <a:tailEnd type="none" w="med" len="med"/>
-                    </a:lnR>
-                    <a:lnT w="12700" cap="flat" cmpd="sng" algn="ctr">
-                      <a:solidFill>
-                        <a:schemeClr val="tx1"/>
-                      </a:solidFill>
-                      <a:prstDash val="solid"/>
-                      <a:round/>
-                      <a:headEnd type="none" w="med" len="med"/>
-                      <a:tailEnd type="none" w="med" len="med"/>
-                    </a:lnT>
-                    <a:lnB w="12700" cap="flat" cmpd="sng" algn="ctr">
-                      <a:solidFill>
-                        <a:schemeClr val="tx1"/>
-                      </a:solidFill>
-                      <a:prstDash val="solid"/>
-                      <a:round/>
-                      <a:headEnd type="none" w="med" len="med"/>
-                      <a:tailEnd type="none" w="med" len="med"/>
-                    </a:lnB>
-                    <a:lnTlToBr w="12700" cmpd="sng">
-                      <a:noFill/>
-                      <a:prstDash val="solid"/>
-                    </a:lnTlToBr>
-                    <a:lnBlToTr w="12700" cmpd="sng">
-                      <a:noFill/>
-                      <a:prstDash val="solid"/>
-                    </a:lnBlToTr>
-                    <a:noFill/>
-                  </a:tcPr>
-                </a:tc>
-                <a:extLst>
-                  <a:ext uri="{0D108BD9-81ED-4DB2-BD59-A6C34878D82A}">
-                    <a16:rowId xmlns:a16="http://schemas.microsoft.com/office/drawing/2014/main" val="2806413544"/>
-                  </a:ext>
-                </a:extLst>
-              </a:tr>
-              <a:tr h="297341">
-                <a:tc>
-                  <a:txBody>
-                    <a:bodyPr/>
-                    <a:lstStyle/>
-                    <a:p>
-                      <a:pPr algn="ctr" rtl="0" fontAlgn="b"/>
-                      <a:r>
-                        <a:rPr lang="en-US" sz="1700" dirty="0">
-                          <a:effectLst/>
-                        </a:rPr>
-                        <a:t>3</a:t>
-                      </a:r>
-                    </a:p>
-                  </a:txBody>
-                  <a:tcPr marL="27196" marR="27196" marT="18131" marB="18131" anchor="b">
-                    <a:lnL w="12700" cap="flat" cmpd="sng" algn="ctr">
-                      <a:solidFill>
-                        <a:schemeClr val="tx1"/>
-                      </a:solidFill>
-                      <a:prstDash val="solid"/>
-                      <a:round/>
-                      <a:headEnd type="none" w="med" len="med"/>
-                      <a:tailEnd type="none" w="med" len="med"/>
-                    </a:lnL>
-                    <a:lnR w="9525" cap="flat" cmpd="sng" algn="ctr">
-                      <a:noFill/>
-                      <a:prstDash val="solid"/>
-                      <a:round/>
-                      <a:headEnd type="none" w="med" len="med"/>
-                      <a:tailEnd type="none" w="med" len="med"/>
-                    </a:lnR>
-                    <a:lnT w="12700" cap="flat" cmpd="sng" algn="ctr">
-                      <a:solidFill>
-                        <a:schemeClr val="tx1"/>
-                      </a:solidFill>
-                      <a:prstDash val="solid"/>
-                      <a:round/>
-                      <a:headEnd type="none" w="med" len="med"/>
-                      <a:tailEnd type="none" w="med" len="med"/>
-                    </a:lnT>
-                    <a:lnB w="12700" cap="flat" cmpd="sng" algn="ctr">
-                      <a:solidFill>
-                        <a:schemeClr val="tx1"/>
-                      </a:solidFill>
-                      <a:prstDash val="solid"/>
-                      <a:round/>
-                      <a:headEnd type="none" w="med" len="med"/>
-                      <a:tailEnd type="none" w="med" len="med"/>
-                    </a:lnB>
-                    <a:lnTlToBr w="12700" cmpd="sng">
-                      <a:noFill/>
-                      <a:prstDash val="solid"/>
-                    </a:lnTlToBr>
-                    <a:lnBlToTr w="12700" cmpd="sng">
-                      <a:noFill/>
-                      <a:prstDash val="solid"/>
-                    </a:lnBlToTr>
-                    <a:noFill/>
-                  </a:tcPr>
-                </a:tc>
-                <a:tc>
-                  <a:txBody>
-                    <a:bodyPr/>
-                    <a:lstStyle/>
-                    <a:p>
-                      <a:pPr rtl="0" fontAlgn="b"/>
-                      <a:r>
-                        <a:rPr lang="en-US" sz="1700">
-                          <a:effectLst/>
-                        </a:rPr>
-                        <a:t>SQL query part I</a:t>
-                      </a:r>
-                    </a:p>
-                  </a:txBody>
-                  <a:tcPr marL="27196" marR="27196" marT="18131" marB="18131" anchor="b">
-                    <a:lnL w="9525" cap="flat" cmpd="sng" algn="ctr">
-                      <a:noFill/>
-                      <a:prstDash val="solid"/>
-                      <a:round/>
-                      <a:headEnd type="none" w="med" len="med"/>
-                      <a:tailEnd type="none" w="med" len="med"/>
-                    </a:lnL>
-                    <a:lnR w="9525" cap="flat" cmpd="sng" algn="ctr">
-                      <a:noFill/>
-                      <a:prstDash val="solid"/>
-                      <a:round/>
-                      <a:headEnd type="none" w="med" len="med"/>
-                      <a:tailEnd type="none" w="med" len="med"/>
-                    </a:lnR>
-                    <a:lnT w="12700" cap="flat" cmpd="sng" algn="ctr">
-                      <a:solidFill>
-                        <a:schemeClr val="tx1"/>
-                      </a:solidFill>
-                      <a:prstDash val="solid"/>
-                      <a:round/>
-                      <a:headEnd type="none" w="med" len="med"/>
-                      <a:tailEnd type="none" w="med" len="med"/>
-                    </a:lnT>
-                    <a:lnB w="12700" cap="flat" cmpd="sng" algn="ctr">
-                      <a:solidFill>
-                        <a:schemeClr val="tx1"/>
-                      </a:solidFill>
-                      <a:prstDash val="solid"/>
-                      <a:round/>
-                      <a:headEnd type="none" w="med" len="med"/>
-                      <a:tailEnd type="none" w="med" len="med"/>
-                    </a:lnB>
-                    <a:lnTlToBr w="12700" cmpd="sng">
-                      <a:noFill/>
-                      <a:prstDash val="solid"/>
-                    </a:lnTlToBr>
-                    <a:lnBlToTr w="12700" cmpd="sng">
-                      <a:noFill/>
-                      <a:prstDash val="solid"/>
-                    </a:lnBlToTr>
-                    <a:noFill/>
-                  </a:tcPr>
-                </a:tc>
-                <a:tc>
-                  <a:txBody>
-                    <a:bodyPr/>
-                    <a:lstStyle/>
-                    <a:p>
-                      <a:pPr algn="r" rtl="0" fontAlgn="b"/>
-                      <a:r>
-                        <a:rPr lang="en-US" sz="1700" dirty="0">
-                          <a:effectLst/>
-                        </a:rPr>
-                        <a:t>120</a:t>
-                      </a:r>
-                    </a:p>
-                  </a:txBody>
-                  <a:tcPr marL="27196" marR="27196" marT="18131" marB="18131" anchor="b">
-                    <a:lnL w="9525" cap="flat" cmpd="sng" algn="ctr">
-                      <a:noFill/>
-                      <a:prstDash val="solid"/>
-                      <a:round/>
-                      <a:headEnd type="none" w="med" len="med"/>
-                      <a:tailEnd type="none" w="med" len="med"/>
-                    </a:lnL>
-                    <a:lnR w="12700" cap="flat" cmpd="sng" algn="ctr">
-                      <a:solidFill>
-                        <a:schemeClr val="tx1"/>
-                      </a:solidFill>
-                      <a:prstDash val="solid"/>
-                      <a:round/>
-                      <a:headEnd type="none" w="med" len="med"/>
-                      <a:tailEnd type="none" w="med" len="med"/>
-                    </a:lnR>
-                    <a:lnT w="12700" cap="flat" cmpd="sng" algn="ctr">
-                      <a:solidFill>
-                        <a:schemeClr val="tx1"/>
-                      </a:solidFill>
-                      <a:prstDash val="solid"/>
-                      <a:round/>
-                      <a:headEnd type="none" w="med" len="med"/>
-                      <a:tailEnd type="none" w="med" len="med"/>
-                    </a:lnT>
-                    <a:lnB w="12700" cap="flat" cmpd="sng" algn="ctr">
-                      <a:solidFill>
-                        <a:schemeClr val="tx1"/>
-                      </a:solidFill>
-                      <a:prstDash val="solid"/>
-                      <a:round/>
-                      <a:headEnd type="none" w="med" len="med"/>
-                      <a:tailEnd type="none" w="med" len="med"/>
-                    </a:lnB>
-                    <a:lnTlToBr w="12700" cmpd="sng">
-                      <a:noFill/>
-                      <a:prstDash val="solid"/>
-                    </a:lnTlToBr>
-                    <a:lnBlToTr w="12700" cmpd="sng">
-                      <a:noFill/>
-                      <a:prstDash val="solid"/>
-                    </a:lnBlToTr>
-                    <a:noFill/>
-                  </a:tcPr>
-                </a:tc>
-                <a:extLst>
-                  <a:ext uri="{0D108BD9-81ED-4DB2-BD59-A6C34878D82A}">
-                    <a16:rowId xmlns:a16="http://schemas.microsoft.com/office/drawing/2014/main" val="1579598922"/>
-                  </a:ext>
-                </a:extLst>
-              </a:tr>
-              <a:tr h="297341">
-                <a:tc>
-                  <a:txBody>
-                    <a:bodyPr/>
-                    <a:lstStyle/>
-                    <a:p>
-                      <a:pPr algn="ctr" rtl="0" fontAlgn="b"/>
-                      <a:r>
-                        <a:rPr lang="en-US" sz="1700" dirty="0">
-                          <a:effectLst/>
-                        </a:rPr>
-                        <a:t>4</a:t>
-                      </a:r>
-                    </a:p>
-                  </a:txBody>
-                  <a:tcPr marL="27196" marR="27196" marT="18131" marB="18131" anchor="b">
-                    <a:lnL w="12700" cap="flat" cmpd="sng" algn="ctr">
-                      <a:solidFill>
-                        <a:schemeClr val="tx1"/>
-                      </a:solidFill>
-                      <a:prstDash val="solid"/>
-                      <a:round/>
-                      <a:headEnd type="none" w="med" len="med"/>
-                      <a:tailEnd type="none" w="med" len="med"/>
-                    </a:lnL>
-                    <a:lnR w="9525" cap="flat" cmpd="sng" algn="ctr">
-                      <a:noFill/>
-                      <a:prstDash val="solid"/>
-                      <a:round/>
-                      <a:headEnd type="none" w="med" len="med"/>
-                      <a:tailEnd type="none" w="med" len="med"/>
-                    </a:lnR>
-                    <a:lnT w="12700" cap="flat" cmpd="sng" algn="ctr">
-                      <a:solidFill>
-                        <a:schemeClr val="tx1"/>
-                      </a:solidFill>
-                      <a:prstDash val="solid"/>
-                      <a:round/>
-                      <a:headEnd type="none" w="med" len="med"/>
-                      <a:tailEnd type="none" w="med" len="med"/>
-                    </a:lnT>
-                    <a:lnB w="12700" cap="flat" cmpd="sng" algn="ctr">
-                      <a:solidFill>
-                        <a:schemeClr val="tx1"/>
-                      </a:solidFill>
-                      <a:prstDash val="solid"/>
-                      <a:round/>
-                      <a:headEnd type="none" w="med" len="med"/>
-                      <a:tailEnd type="none" w="med" len="med"/>
-                    </a:lnB>
-                    <a:lnTlToBr w="12700" cmpd="sng">
-                      <a:noFill/>
-                      <a:prstDash val="solid"/>
-                    </a:lnTlToBr>
-                    <a:lnBlToTr w="12700" cmpd="sng">
-                      <a:noFill/>
-                      <a:prstDash val="solid"/>
-                    </a:lnBlToTr>
-                    <a:noFill/>
-                  </a:tcPr>
-                </a:tc>
-                <a:tc>
-                  <a:txBody>
-                    <a:bodyPr/>
-                    <a:lstStyle/>
-                    <a:p>
-                      <a:pPr rtl="0" fontAlgn="b"/>
-                      <a:r>
-                        <a:rPr lang="en-US" sz="1700">
-                          <a:effectLst/>
-                        </a:rPr>
-                        <a:t>SQL query part II</a:t>
-                      </a:r>
-                    </a:p>
-                  </a:txBody>
-                  <a:tcPr marL="27196" marR="27196" marT="18131" marB="18131" anchor="b">
-                    <a:lnL w="9525" cap="flat" cmpd="sng" algn="ctr">
-                      <a:noFill/>
-                      <a:prstDash val="solid"/>
-                      <a:round/>
-                      <a:headEnd type="none" w="med" len="med"/>
-                      <a:tailEnd type="none" w="med" len="med"/>
-                    </a:lnL>
-                    <a:lnR w="9525" cap="flat" cmpd="sng" algn="ctr">
-                      <a:noFill/>
-                      <a:prstDash val="solid"/>
-                      <a:round/>
-                      <a:headEnd type="none" w="med" len="med"/>
-                      <a:tailEnd type="none" w="med" len="med"/>
-                    </a:lnR>
-                    <a:lnT w="12700" cap="flat" cmpd="sng" algn="ctr">
-                      <a:solidFill>
-                        <a:schemeClr val="tx1"/>
-                      </a:solidFill>
-                      <a:prstDash val="solid"/>
-                      <a:round/>
-                      <a:headEnd type="none" w="med" len="med"/>
-                      <a:tailEnd type="none" w="med" len="med"/>
-                    </a:lnT>
-                    <a:lnB w="12700" cap="flat" cmpd="sng" algn="ctr">
-                      <a:solidFill>
-                        <a:schemeClr val="tx1"/>
-                      </a:solidFill>
-                      <a:prstDash val="solid"/>
-                      <a:round/>
-                      <a:headEnd type="none" w="med" len="med"/>
-                      <a:tailEnd type="none" w="med" len="med"/>
-                    </a:lnB>
-                    <a:lnTlToBr w="12700" cmpd="sng">
-                      <a:noFill/>
-                      <a:prstDash val="solid"/>
-                    </a:lnTlToBr>
-                    <a:lnBlToTr w="12700" cmpd="sng">
-                      <a:noFill/>
-                      <a:prstDash val="solid"/>
-                    </a:lnBlToTr>
-                    <a:noFill/>
-                  </a:tcPr>
-                </a:tc>
-                <a:tc>
-                  <a:txBody>
-                    <a:bodyPr/>
-                    <a:lstStyle/>
-                    <a:p>
-                      <a:pPr algn="r" rtl="0" fontAlgn="b"/>
-                      <a:r>
-                        <a:rPr lang="en-US" sz="1700" dirty="0">
-                          <a:effectLst/>
-                        </a:rPr>
-                        <a:t>120</a:t>
-                      </a:r>
-                    </a:p>
-                  </a:txBody>
-                  <a:tcPr marL="27196" marR="27196" marT="18131" marB="18131" anchor="b">
-                    <a:lnL w="9525" cap="flat" cmpd="sng" algn="ctr">
-                      <a:noFill/>
-                      <a:prstDash val="solid"/>
-                      <a:round/>
-                      <a:headEnd type="none" w="med" len="med"/>
-                      <a:tailEnd type="none" w="med" len="med"/>
-                    </a:lnL>
-                    <a:lnR w="12700" cap="flat" cmpd="sng" algn="ctr">
-                      <a:solidFill>
-                        <a:schemeClr val="tx1"/>
-                      </a:solidFill>
-                      <a:prstDash val="solid"/>
-                      <a:round/>
-                      <a:headEnd type="none" w="med" len="med"/>
-                      <a:tailEnd type="none" w="med" len="med"/>
-                    </a:lnR>
-                    <a:lnT w="12700" cap="flat" cmpd="sng" algn="ctr">
-                      <a:solidFill>
-                        <a:schemeClr val="tx1"/>
-                      </a:solidFill>
-                      <a:prstDash val="solid"/>
-                      <a:round/>
-                      <a:headEnd type="none" w="med" len="med"/>
-                      <a:tailEnd type="none" w="med" len="med"/>
-                    </a:lnT>
-                    <a:lnB w="12700" cap="flat" cmpd="sng" algn="ctr">
-                      <a:solidFill>
-                        <a:schemeClr val="tx1"/>
-                      </a:solidFill>
-                      <a:prstDash val="solid"/>
-                      <a:round/>
-                      <a:headEnd type="none" w="med" len="med"/>
-                      <a:tailEnd type="none" w="med" len="med"/>
-                    </a:lnB>
-                    <a:lnTlToBr w="12700" cmpd="sng">
-                      <a:noFill/>
-                      <a:prstDash val="solid"/>
-                    </a:lnTlToBr>
-                    <a:lnBlToTr w="12700" cmpd="sng">
-                      <a:noFill/>
-                      <a:prstDash val="solid"/>
-                    </a:lnBlToTr>
-                    <a:noFill/>
-                  </a:tcPr>
-                </a:tc>
-                <a:extLst>
-                  <a:ext uri="{0D108BD9-81ED-4DB2-BD59-A6C34878D82A}">
-                    <a16:rowId xmlns:a16="http://schemas.microsoft.com/office/drawing/2014/main" val="3893492520"/>
-                  </a:ext>
-                </a:extLst>
-              </a:tr>
-              <a:tr h="297341">
-                <a:tc>
-                  <a:txBody>
-                    <a:bodyPr/>
-                    <a:lstStyle/>
-                    <a:p>
-                      <a:pPr algn="ctr" rtl="0" fontAlgn="b"/>
-                      <a:r>
-                        <a:rPr lang="en-US" sz="1700" dirty="0">
-                          <a:effectLst/>
-                        </a:rPr>
-                        <a:t>5</a:t>
-                      </a:r>
-                    </a:p>
-                  </a:txBody>
-                  <a:tcPr marL="27196" marR="27196" marT="18131" marB="18131" anchor="b">
-                    <a:lnL w="12700" cap="flat" cmpd="sng" algn="ctr">
-                      <a:solidFill>
-                        <a:schemeClr val="tx1"/>
-                      </a:solidFill>
-                      <a:prstDash val="solid"/>
-                      <a:round/>
-                      <a:headEnd type="none" w="med" len="med"/>
-                      <a:tailEnd type="none" w="med" len="med"/>
-                    </a:lnL>
-                    <a:lnR w="9525" cap="flat" cmpd="sng" algn="ctr">
-                      <a:noFill/>
-                      <a:prstDash val="solid"/>
-                      <a:round/>
-                      <a:headEnd type="none" w="med" len="med"/>
-                      <a:tailEnd type="none" w="med" len="med"/>
-                    </a:lnR>
-                    <a:lnT w="12700" cap="flat" cmpd="sng" algn="ctr">
-                      <a:solidFill>
-                        <a:schemeClr val="tx1"/>
-                      </a:solidFill>
-                      <a:prstDash val="solid"/>
-                      <a:round/>
-                      <a:headEnd type="none" w="med" len="med"/>
-                      <a:tailEnd type="none" w="med" len="med"/>
-                    </a:lnT>
-                    <a:lnB w="12700" cap="flat" cmpd="sng" algn="ctr">
-                      <a:solidFill>
-                        <a:schemeClr val="tx1"/>
-                      </a:solidFill>
-                      <a:prstDash val="solid"/>
-                      <a:round/>
-                      <a:headEnd type="none" w="med" len="med"/>
-                      <a:tailEnd type="none" w="med" len="med"/>
-                    </a:lnB>
-                    <a:lnTlToBr w="12700" cmpd="sng">
-                      <a:noFill/>
-                      <a:prstDash val="solid"/>
-                    </a:lnTlToBr>
-                    <a:lnBlToTr w="12700" cmpd="sng">
-                      <a:noFill/>
-                      <a:prstDash val="solid"/>
-                    </a:lnBlToTr>
-                    <a:noFill/>
-                  </a:tcPr>
-                </a:tc>
-                <a:tc>
-                  <a:txBody>
-                    <a:bodyPr/>
-                    <a:lstStyle/>
-                    <a:p>
-                      <a:pPr rtl="0" fontAlgn="b"/>
-                      <a:r>
-                        <a:rPr lang="en-US" sz="1700" dirty="0">
-                          <a:effectLst/>
-                        </a:rPr>
-                        <a:t>Querying Parquet files</a:t>
-                      </a:r>
-                    </a:p>
-                  </a:txBody>
-                  <a:tcPr marL="27196" marR="27196" marT="18131" marB="18131" anchor="b">
-                    <a:lnL w="9525" cap="flat" cmpd="sng" algn="ctr">
-                      <a:noFill/>
-                      <a:prstDash val="solid"/>
-                      <a:round/>
-                      <a:headEnd type="none" w="med" len="med"/>
-                      <a:tailEnd type="none" w="med" len="med"/>
-                    </a:lnL>
-                    <a:lnR w="9525" cap="flat" cmpd="sng" algn="ctr">
-                      <a:noFill/>
-                      <a:prstDash val="solid"/>
-                      <a:round/>
-                      <a:headEnd type="none" w="med" len="med"/>
-                      <a:tailEnd type="none" w="med" len="med"/>
-                    </a:lnR>
-                    <a:lnT w="12700" cap="flat" cmpd="sng" algn="ctr">
-                      <a:solidFill>
-                        <a:schemeClr val="tx1"/>
-                      </a:solidFill>
-                      <a:prstDash val="solid"/>
-                      <a:round/>
-                      <a:headEnd type="none" w="med" len="med"/>
-                      <a:tailEnd type="none" w="med" len="med"/>
-                    </a:lnT>
-                    <a:lnB w="12700" cap="flat" cmpd="sng" algn="ctr">
-                      <a:solidFill>
-                        <a:schemeClr val="tx1"/>
-                      </a:solidFill>
-                      <a:prstDash val="solid"/>
-                      <a:round/>
-                      <a:headEnd type="none" w="med" len="med"/>
-                      <a:tailEnd type="none" w="med" len="med"/>
-                    </a:lnB>
-                    <a:lnTlToBr w="12700" cmpd="sng">
-                      <a:noFill/>
-                      <a:prstDash val="solid"/>
-                    </a:lnTlToBr>
-                    <a:lnBlToTr w="12700" cmpd="sng">
-                      <a:noFill/>
-                      <a:prstDash val="solid"/>
-                    </a:lnBlToTr>
-                    <a:noFill/>
-                  </a:tcPr>
-                </a:tc>
-                <a:tc>
-                  <a:txBody>
-                    <a:bodyPr/>
-                    <a:lstStyle/>
-                    <a:p>
-                      <a:pPr algn="r" rtl="0" fontAlgn="b"/>
-                      <a:r>
-                        <a:rPr lang="en-US" sz="1700" dirty="0">
-                          <a:effectLst/>
-                        </a:rPr>
-                        <a:t>100</a:t>
-                      </a:r>
-                    </a:p>
-                  </a:txBody>
-                  <a:tcPr marL="27196" marR="27196" marT="18131" marB="18131" anchor="b">
-                    <a:lnL w="9525" cap="flat" cmpd="sng" algn="ctr">
-                      <a:noFill/>
-                      <a:prstDash val="solid"/>
-                      <a:round/>
-                      <a:headEnd type="none" w="med" len="med"/>
-                      <a:tailEnd type="none" w="med" len="med"/>
-                    </a:lnL>
-                    <a:lnR w="12700" cap="flat" cmpd="sng" algn="ctr">
-                      <a:solidFill>
-                        <a:schemeClr val="tx1"/>
-                      </a:solidFill>
-                      <a:prstDash val="solid"/>
-                      <a:round/>
-                      <a:headEnd type="none" w="med" len="med"/>
-                      <a:tailEnd type="none" w="med" len="med"/>
-                    </a:lnR>
-                    <a:lnT w="12700" cap="flat" cmpd="sng" algn="ctr">
-                      <a:solidFill>
-                        <a:schemeClr val="tx1"/>
-                      </a:solidFill>
-                      <a:prstDash val="solid"/>
-                      <a:round/>
-                      <a:headEnd type="none" w="med" len="med"/>
-                      <a:tailEnd type="none" w="med" len="med"/>
-                    </a:lnT>
-                    <a:lnB w="12700" cap="flat" cmpd="sng" algn="ctr">
-                      <a:solidFill>
-                        <a:schemeClr val="tx1"/>
-                      </a:solidFill>
-                      <a:prstDash val="solid"/>
-                      <a:round/>
-                      <a:headEnd type="none" w="med" len="med"/>
-                      <a:tailEnd type="none" w="med" len="med"/>
-                    </a:lnB>
-                    <a:lnTlToBr w="12700" cmpd="sng">
-                      <a:noFill/>
-                      <a:prstDash val="solid"/>
-                    </a:lnTlToBr>
-                    <a:lnBlToTr w="12700" cmpd="sng">
-                      <a:noFill/>
-                      <a:prstDash val="solid"/>
-                    </a:lnBlToTr>
-                    <a:noFill/>
-                  </a:tcPr>
-                </a:tc>
-                <a:extLst>
-                  <a:ext uri="{0D108BD9-81ED-4DB2-BD59-A6C34878D82A}">
-                    <a16:rowId xmlns:a16="http://schemas.microsoft.com/office/drawing/2014/main" val="1233559936"/>
-                  </a:ext>
-                </a:extLst>
-              </a:tr>
-              <a:tr h="349554">
-                <a:tc>
-                  <a:txBody>
-                    <a:bodyPr/>
-                    <a:lstStyle/>
-                    <a:p>
-                      <a:pPr algn="ctr" rtl="0" fontAlgn="b"/>
-                      <a:r>
-                        <a:rPr lang="en-US" sz="1700" dirty="0">
-                          <a:effectLst/>
-                        </a:rPr>
-                        <a:t>6</a:t>
-                      </a:r>
-                    </a:p>
-                  </a:txBody>
-                  <a:tcPr marL="27196" marR="27196" marT="18131" marB="18131" anchor="b">
-                    <a:lnL w="12700" cap="flat" cmpd="sng" algn="ctr">
-                      <a:solidFill>
-                        <a:schemeClr val="tx1"/>
-                      </a:solidFill>
-                      <a:prstDash val="solid"/>
-                      <a:round/>
-                      <a:headEnd type="none" w="med" len="med"/>
-                      <a:tailEnd type="none" w="med" len="med"/>
-                    </a:lnL>
-                    <a:lnR w="9525" cap="flat" cmpd="sng" algn="ctr">
-                      <a:noFill/>
-                      <a:prstDash val="solid"/>
-                      <a:round/>
-                      <a:headEnd type="none" w="med" len="med"/>
-                      <a:tailEnd type="none" w="med" len="med"/>
-                    </a:lnR>
-                    <a:lnT w="12700" cap="flat" cmpd="sng" algn="ctr">
-                      <a:solidFill>
-                        <a:schemeClr val="tx1"/>
-                      </a:solidFill>
-                      <a:prstDash val="solid"/>
-                      <a:round/>
-                      <a:headEnd type="none" w="med" len="med"/>
-                      <a:tailEnd type="none" w="med" len="med"/>
-                    </a:lnT>
-                    <a:lnB w="12700" cap="flat" cmpd="sng" algn="ctr">
-                      <a:solidFill>
-                        <a:schemeClr val="tx1"/>
-                      </a:solidFill>
-                      <a:prstDash val="solid"/>
-                      <a:round/>
-                      <a:headEnd type="none" w="med" len="med"/>
-                      <a:tailEnd type="none" w="med" len="med"/>
-                    </a:lnB>
-                    <a:lnTlToBr w="12700" cmpd="sng">
-                      <a:noFill/>
-                      <a:prstDash val="solid"/>
-                    </a:lnTlToBr>
-                    <a:lnBlToTr w="12700" cmpd="sng">
-                      <a:noFill/>
-                      <a:prstDash val="solid"/>
-                    </a:lnBlToTr>
-                    <a:noFill/>
-                  </a:tcPr>
-                </a:tc>
-                <a:tc>
-                  <a:txBody>
-                    <a:bodyPr/>
-                    <a:lstStyle/>
-                    <a:p>
-                      <a:pPr rtl="0" fontAlgn="b"/>
-                      <a:r>
-                        <a:rPr lang="en-US" sz="1700" dirty="0">
-                          <a:effectLst/>
-                        </a:rPr>
-                        <a:t>Using R &amp; Python to query a database</a:t>
-                      </a:r>
-                    </a:p>
-                  </a:txBody>
-                  <a:tcPr marL="27196" marR="27196" marT="18131" marB="18131" anchor="b">
-                    <a:lnL w="9525" cap="flat" cmpd="sng" algn="ctr">
-                      <a:noFill/>
-                      <a:prstDash val="solid"/>
-                      <a:round/>
-                      <a:headEnd type="none" w="med" len="med"/>
-                      <a:tailEnd type="none" w="med" len="med"/>
-                    </a:lnL>
-                    <a:lnR w="9525" cap="flat" cmpd="sng" algn="ctr">
-                      <a:noFill/>
-                      <a:prstDash val="solid"/>
-                      <a:round/>
-                      <a:headEnd type="none" w="med" len="med"/>
-                      <a:tailEnd type="none" w="med" len="med"/>
-                    </a:lnR>
-                    <a:lnT w="12700" cap="flat" cmpd="sng" algn="ctr">
-                      <a:solidFill>
-                        <a:schemeClr val="tx1"/>
-                      </a:solidFill>
-                      <a:prstDash val="solid"/>
-                      <a:round/>
-                      <a:headEnd type="none" w="med" len="med"/>
-                      <a:tailEnd type="none" w="med" len="med"/>
-                    </a:lnT>
-                    <a:lnB w="12700" cap="flat" cmpd="sng" algn="ctr">
-                      <a:solidFill>
-                        <a:schemeClr val="tx1"/>
-                      </a:solidFill>
-                      <a:prstDash val="solid"/>
-                      <a:round/>
-                      <a:headEnd type="none" w="med" len="med"/>
-                      <a:tailEnd type="none" w="med" len="med"/>
-                    </a:lnB>
-                    <a:lnTlToBr w="12700" cmpd="sng">
-                      <a:noFill/>
-                      <a:prstDash val="solid"/>
-                    </a:lnTlToBr>
-                    <a:lnBlToTr w="12700" cmpd="sng">
-                      <a:noFill/>
-                      <a:prstDash val="solid"/>
-                    </a:lnBlToTr>
-                    <a:noFill/>
-                  </a:tcPr>
-                </a:tc>
-                <a:tc>
-                  <a:txBody>
-                    <a:bodyPr/>
-                    <a:lstStyle/>
-                    <a:p>
-                      <a:pPr algn="r" rtl="0" fontAlgn="b"/>
-                      <a:r>
-                        <a:rPr lang="en-US" sz="1700">
-                          <a:effectLst/>
-                        </a:rPr>
-                        <a:t>100</a:t>
-                      </a:r>
-                    </a:p>
-                  </a:txBody>
-                  <a:tcPr marL="27196" marR="27196" marT="18131" marB="18131" anchor="b">
-                    <a:lnL w="9525" cap="flat" cmpd="sng" algn="ctr">
-                      <a:noFill/>
-                      <a:prstDash val="solid"/>
-                      <a:round/>
-                      <a:headEnd type="none" w="med" len="med"/>
-                      <a:tailEnd type="none" w="med" len="med"/>
-                    </a:lnL>
-                    <a:lnR w="12700" cap="flat" cmpd="sng" algn="ctr">
-                      <a:solidFill>
-                        <a:schemeClr val="tx1"/>
-                      </a:solidFill>
-                      <a:prstDash val="solid"/>
-                      <a:round/>
-                      <a:headEnd type="none" w="med" len="med"/>
-                      <a:tailEnd type="none" w="med" len="med"/>
-                    </a:lnR>
-                    <a:lnT w="12700" cap="flat" cmpd="sng" algn="ctr">
-                      <a:solidFill>
-                        <a:schemeClr val="tx1"/>
-                      </a:solidFill>
-                      <a:prstDash val="solid"/>
-                      <a:round/>
-                      <a:headEnd type="none" w="med" len="med"/>
-                      <a:tailEnd type="none" w="med" len="med"/>
-                    </a:lnT>
-                    <a:lnB w="12700" cap="flat" cmpd="sng" algn="ctr">
-                      <a:solidFill>
-                        <a:schemeClr val="tx1"/>
-                      </a:solidFill>
-                      <a:prstDash val="solid"/>
-                      <a:round/>
-                      <a:headEnd type="none" w="med" len="med"/>
-                      <a:tailEnd type="none" w="med" len="med"/>
-                    </a:lnB>
-                    <a:lnTlToBr w="12700" cmpd="sng">
-                      <a:noFill/>
-                      <a:prstDash val="solid"/>
-                    </a:lnTlToBr>
-                    <a:lnBlToTr w="12700" cmpd="sng">
-                      <a:noFill/>
-                      <a:prstDash val="solid"/>
-                    </a:lnBlToTr>
-                    <a:noFill/>
-                  </a:tcPr>
-                </a:tc>
-                <a:extLst>
-                  <a:ext uri="{0D108BD9-81ED-4DB2-BD59-A6C34878D82A}">
-                    <a16:rowId xmlns:a16="http://schemas.microsoft.com/office/drawing/2014/main" val="317442102"/>
-                  </a:ext>
-                </a:extLst>
-              </a:tr>
-              <a:tr h="558422">
-                <a:tc>
-                  <a:txBody>
-                    <a:bodyPr/>
-                    <a:lstStyle/>
-                    <a:p>
-                      <a:pPr algn="ctr" rtl="0" fontAlgn="b"/>
-                      <a:r>
-                        <a:rPr lang="en-US" sz="1700" dirty="0">
-                          <a:effectLst/>
-                        </a:rPr>
-                        <a:t>7</a:t>
-                      </a:r>
-                    </a:p>
-                  </a:txBody>
-                  <a:tcPr marL="27196" marR="27196" marT="18131" marB="18131" anchor="b">
-                    <a:lnL w="12700" cap="flat" cmpd="sng" algn="ctr">
-                      <a:solidFill>
-                        <a:schemeClr val="tx1"/>
-                      </a:solidFill>
-                      <a:prstDash val="solid"/>
-                      <a:round/>
-                      <a:headEnd type="none" w="med" len="med"/>
-                      <a:tailEnd type="none" w="med" len="med"/>
-                    </a:lnL>
-                    <a:lnR w="9525" cap="flat" cmpd="sng" algn="ctr">
-                      <a:noFill/>
-                      <a:prstDash val="solid"/>
-                      <a:round/>
-                      <a:headEnd type="none" w="med" len="med"/>
-                      <a:tailEnd type="none" w="med" len="med"/>
-                    </a:lnR>
-                    <a:lnT w="12700" cap="flat" cmpd="sng" algn="ctr">
-                      <a:solidFill>
-                        <a:schemeClr val="tx1"/>
-                      </a:solidFill>
-                      <a:prstDash val="solid"/>
-                      <a:round/>
-                      <a:headEnd type="none" w="med" len="med"/>
-                      <a:tailEnd type="none" w="med" len="med"/>
-                    </a:lnT>
-                    <a:lnB w="12700" cap="flat" cmpd="sng" algn="ctr">
-                      <a:solidFill>
-                        <a:schemeClr val="tx1"/>
-                      </a:solidFill>
-                      <a:prstDash val="solid"/>
-                      <a:round/>
-                      <a:headEnd type="none" w="med" len="med"/>
-                      <a:tailEnd type="none" w="med" len="med"/>
-                    </a:lnB>
-                    <a:lnTlToBr w="12700" cmpd="sng">
-                      <a:noFill/>
-                      <a:prstDash val="solid"/>
-                    </a:lnTlToBr>
-                    <a:lnBlToTr w="12700" cmpd="sng">
-                      <a:noFill/>
-                      <a:prstDash val="solid"/>
-                    </a:lnBlToTr>
-                    <a:noFill/>
-                  </a:tcPr>
-                </a:tc>
-                <a:tc>
-                  <a:txBody>
-                    <a:bodyPr/>
-                    <a:lstStyle/>
-                    <a:p>
-                      <a:pPr rtl="0" fontAlgn="b"/>
-                      <a:r>
-                        <a:rPr lang="en-US" sz="1700" dirty="0">
-                          <a:effectLst/>
-                        </a:rPr>
-                        <a:t>Documentation Capstone project   - </a:t>
-                      </a:r>
-                      <a:r>
-                        <a:rPr lang="en-US" sz="1700" i="1" dirty="0">
-                          <a:effectLst/>
-                        </a:rPr>
-                        <a:t>metadata + computing env</a:t>
-                      </a:r>
-                    </a:p>
-                  </a:txBody>
-                  <a:tcPr marL="27196" marR="27196" marT="18131" marB="18131" anchor="b">
-                    <a:lnL w="9525" cap="flat" cmpd="sng" algn="ctr">
-                      <a:noFill/>
-                      <a:prstDash val="solid"/>
-                      <a:round/>
-                      <a:headEnd type="none" w="med" len="med"/>
-                      <a:tailEnd type="none" w="med" len="med"/>
-                    </a:lnL>
-                    <a:lnR w="9525" cap="flat" cmpd="sng" algn="ctr">
-                      <a:noFill/>
-                      <a:prstDash val="solid"/>
-                      <a:round/>
-                      <a:headEnd type="none" w="med" len="med"/>
-                      <a:tailEnd type="none" w="med" len="med"/>
-                    </a:lnR>
-                    <a:lnT w="12700" cap="flat" cmpd="sng" algn="ctr">
-                      <a:solidFill>
-                        <a:schemeClr val="tx1"/>
-                      </a:solidFill>
-                      <a:prstDash val="solid"/>
-                      <a:round/>
-                      <a:headEnd type="none" w="med" len="med"/>
-                      <a:tailEnd type="none" w="med" len="med"/>
-                    </a:lnT>
-                    <a:lnB w="12700" cap="flat" cmpd="sng" algn="ctr">
-                      <a:solidFill>
-                        <a:schemeClr val="tx1"/>
-                      </a:solidFill>
-                      <a:prstDash val="solid"/>
-                      <a:round/>
-                      <a:headEnd type="none" w="med" len="med"/>
-                      <a:tailEnd type="none" w="med" len="med"/>
-                    </a:lnB>
-                    <a:lnTlToBr w="12700" cmpd="sng">
-                      <a:noFill/>
-                      <a:prstDash val="solid"/>
-                    </a:lnTlToBr>
-                    <a:lnBlToTr w="12700" cmpd="sng">
-                      <a:noFill/>
-                      <a:prstDash val="solid"/>
-                    </a:lnBlToTr>
-                    <a:noFill/>
-                  </a:tcPr>
-                </a:tc>
-                <a:tc>
-                  <a:txBody>
-                    <a:bodyPr/>
-                    <a:lstStyle/>
-                    <a:p>
-                      <a:pPr algn="r" rtl="0" fontAlgn="b"/>
-                      <a:r>
-                        <a:rPr lang="en-US" sz="1700" dirty="0">
-                          <a:effectLst/>
-                        </a:rPr>
-                        <a:t>50</a:t>
-                      </a:r>
-                    </a:p>
-                  </a:txBody>
-                  <a:tcPr marL="27196" marR="27196" marT="18131" marB="18131" anchor="b">
-                    <a:lnL w="9525" cap="flat" cmpd="sng" algn="ctr">
-                      <a:noFill/>
-                      <a:prstDash val="solid"/>
-                      <a:round/>
-                      <a:headEnd type="none" w="med" len="med"/>
-                      <a:tailEnd type="none" w="med" len="med"/>
-                    </a:lnL>
-                    <a:lnR w="12700" cap="flat" cmpd="sng" algn="ctr">
-                      <a:solidFill>
-                        <a:schemeClr val="tx1"/>
-                      </a:solidFill>
-                      <a:prstDash val="solid"/>
-                      <a:round/>
-                      <a:headEnd type="none" w="med" len="med"/>
-                      <a:tailEnd type="none" w="med" len="med"/>
-                    </a:lnR>
-                    <a:lnT w="12700" cap="flat" cmpd="sng" algn="ctr">
-                      <a:solidFill>
-                        <a:schemeClr val="tx1"/>
-                      </a:solidFill>
-                      <a:prstDash val="solid"/>
-                      <a:round/>
-                      <a:headEnd type="none" w="med" len="med"/>
-                      <a:tailEnd type="none" w="med" len="med"/>
-                    </a:lnT>
-                    <a:lnB w="12700" cap="flat" cmpd="sng" algn="ctr">
-                      <a:solidFill>
-                        <a:schemeClr val="tx1"/>
-                      </a:solidFill>
-                      <a:prstDash val="solid"/>
-                      <a:round/>
-                      <a:headEnd type="none" w="med" len="med"/>
-                      <a:tailEnd type="none" w="med" len="med"/>
-                    </a:lnB>
-                    <a:lnTlToBr w="12700" cmpd="sng">
-                      <a:noFill/>
-                      <a:prstDash val="solid"/>
-                    </a:lnTlToBr>
-                    <a:lnBlToTr w="12700" cmpd="sng">
-                      <a:noFill/>
-                      <a:prstDash val="solid"/>
-                    </a:lnBlToTr>
-                    <a:noFill/>
-                  </a:tcPr>
-                </a:tc>
-                <a:extLst>
-                  <a:ext uri="{0D108BD9-81ED-4DB2-BD59-A6C34878D82A}">
-                    <a16:rowId xmlns:a16="http://schemas.microsoft.com/office/drawing/2014/main" val="2729882755"/>
-                  </a:ext>
-                </a:extLst>
-              </a:tr>
-              <a:tr h="279778">
-                <a:tc>
-                  <a:txBody>
-                    <a:bodyPr/>
-                    <a:lstStyle/>
-                    <a:p>
-                      <a:pPr algn="ctr" rtl="0" fontAlgn="b"/>
-                      <a:r>
-                        <a:rPr lang="en-US" sz="1700" dirty="0">
-                          <a:effectLst/>
-                        </a:rPr>
-                        <a:t>8</a:t>
-                      </a:r>
-                    </a:p>
-                  </a:txBody>
-                  <a:tcPr marL="27196" marR="27196" marT="18131" marB="18131" anchor="b">
-                    <a:lnL w="12700" cap="flat" cmpd="sng" algn="ctr">
-                      <a:solidFill>
-                        <a:schemeClr val="tx1"/>
-                      </a:solidFill>
-                      <a:prstDash val="solid"/>
-                      <a:round/>
-                      <a:headEnd type="none" w="med" len="med"/>
-                      <a:tailEnd type="none" w="med" len="med"/>
-                    </a:lnL>
-                    <a:lnR w="9525" cap="flat" cmpd="sng" algn="ctr">
-                      <a:noFill/>
-                      <a:prstDash val="solid"/>
-                      <a:round/>
-                      <a:headEnd type="none" w="med" len="med"/>
-                      <a:tailEnd type="none" w="med" len="med"/>
-                    </a:lnR>
-                    <a:lnT w="12700" cap="flat" cmpd="sng" algn="ctr">
-                      <a:solidFill>
-                        <a:schemeClr val="tx1"/>
-                      </a:solidFill>
-                      <a:prstDash val="solid"/>
-                      <a:round/>
-                      <a:headEnd type="none" w="med" len="med"/>
-                      <a:tailEnd type="none" w="med" len="med"/>
-                    </a:lnT>
-                    <a:lnB w="12700" cap="flat" cmpd="sng" algn="ctr">
-                      <a:solidFill>
-                        <a:schemeClr val="tx1"/>
-                      </a:solidFill>
-                      <a:prstDash val="solid"/>
-                      <a:round/>
-                      <a:headEnd type="none" w="med" len="med"/>
-                      <a:tailEnd type="none" w="med" len="med"/>
-                    </a:lnB>
-                    <a:lnTlToBr w="12700" cmpd="sng">
-                      <a:noFill/>
-                      <a:prstDash val="solid"/>
-                    </a:lnTlToBr>
-                    <a:lnBlToTr w="12700" cmpd="sng">
-                      <a:noFill/>
-                      <a:prstDash val="solid"/>
-                    </a:lnBlToTr>
-                    <a:noFill/>
-                  </a:tcPr>
-                </a:tc>
-                <a:tc>
-                  <a:txBody>
-                    <a:bodyPr/>
-                    <a:lstStyle/>
-                    <a:p>
-                      <a:pPr rtl="0" fontAlgn="b"/>
-                      <a:endParaRPr lang="en-US" sz="1700" i="1" dirty="0">
-                        <a:effectLst/>
-                      </a:endParaRPr>
-                    </a:p>
-                  </a:txBody>
-                  <a:tcPr marL="27196" marR="27196" marT="18131" marB="18131" anchor="b">
-                    <a:lnL w="9525" cap="flat" cmpd="sng" algn="ctr">
-                      <a:noFill/>
-                      <a:prstDash val="solid"/>
-                      <a:round/>
-                      <a:headEnd type="none" w="med" len="med"/>
-                      <a:tailEnd type="none" w="med" len="med"/>
-                    </a:lnL>
-                    <a:lnR w="9525" cap="flat" cmpd="sng" algn="ctr">
-                      <a:noFill/>
-                      <a:prstDash val="solid"/>
-                      <a:round/>
-                      <a:headEnd type="none" w="med" len="med"/>
-                      <a:tailEnd type="none" w="med" len="med"/>
-                    </a:lnR>
-                    <a:lnT w="12700" cap="flat" cmpd="sng" algn="ctr">
-                      <a:solidFill>
-                        <a:schemeClr val="tx1"/>
-                      </a:solidFill>
-                      <a:prstDash val="solid"/>
-                      <a:round/>
-                      <a:headEnd type="none" w="med" len="med"/>
-                      <a:tailEnd type="none" w="med" len="med"/>
-                    </a:lnT>
-                    <a:lnB w="12700" cap="flat" cmpd="sng" algn="ctr">
-                      <a:solidFill>
-                        <a:schemeClr val="tx1"/>
-                      </a:solidFill>
-                      <a:prstDash val="solid"/>
-                      <a:round/>
-                      <a:headEnd type="none" w="med" len="med"/>
-                      <a:tailEnd type="none" w="med" len="med"/>
-                    </a:lnB>
-                    <a:lnTlToBr w="12700" cmpd="sng">
-                      <a:noFill/>
-                      <a:prstDash val="solid"/>
-                    </a:lnTlToBr>
-                    <a:lnBlToTr w="12700" cmpd="sng">
-                      <a:noFill/>
-                      <a:prstDash val="solid"/>
-                    </a:lnBlToTr>
-                    <a:noFill/>
-                  </a:tcPr>
-                </a:tc>
-                <a:tc>
-                  <a:txBody>
-                    <a:bodyPr/>
-                    <a:lstStyle/>
-                    <a:p>
-                      <a:pPr algn="r" rtl="0" fontAlgn="b"/>
-                      <a:r>
-                        <a:rPr lang="en-US" sz="1700" dirty="0">
-                          <a:effectLst/>
-                        </a:rPr>
-                        <a:t>-</a:t>
-                      </a:r>
-                    </a:p>
-                  </a:txBody>
-                  <a:tcPr marL="27196" marR="27196" marT="18131" marB="18131" anchor="b">
-                    <a:lnL w="9525" cap="flat" cmpd="sng" algn="ctr">
-                      <a:noFill/>
-                      <a:prstDash val="solid"/>
-                      <a:round/>
-                      <a:headEnd type="none" w="med" len="med"/>
-                      <a:tailEnd type="none" w="med" len="med"/>
-                    </a:lnL>
-                    <a:lnR w="12700" cap="flat" cmpd="sng" algn="ctr">
-                      <a:solidFill>
-                        <a:schemeClr val="tx1"/>
-                      </a:solidFill>
-                      <a:prstDash val="solid"/>
-                      <a:round/>
-                      <a:headEnd type="none" w="med" len="med"/>
-                      <a:tailEnd type="none" w="med" len="med"/>
-                    </a:lnR>
-                    <a:lnT w="12700" cap="flat" cmpd="sng" algn="ctr">
-                      <a:solidFill>
-                        <a:schemeClr val="tx1"/>
-                      </a:solidFill>
-                      <a:prstDash val="solid"/>
-                      <a:round/>
-                      <a:headEnd type="none" w="med" len="med"/>
-                      <a:tailEnd type="none" w="med" len="med"/>
-                    </a:lnT>
-                    <a:lnB w="12700" cap="flat" cmpd="sng" algn="ctr">
-                      <a:solidFill>
-                        <a:schemeClr val="tx1"/>
-                      </a:solidFill>
-                      <a:prstDash val="solid"/>
-                      <a:round/>
-                      <a:headEnd type="none" w="med" len="med"/>
-                      <a:tailEnd type="none" w="med" len="med"/>
-                    </a:lnB>
-                    <a:lnTlToBr w="12700" cmpd="sng">
-                      <a:noFill/>
-                      <a:prstDash val="solid"/>
-                    </a:lnTlToBr>
-                    <a:lnBlToTr w="12700" cmpd="sng">
-                      <a:noFill/>
-                      <a:prstDash val="solid"/>
-                    </a:lnBlToTr>
-                    <a:noFill/>
-                  </a:tcPr>
-                </a:tc>
-                <a:extLst>
-                  <a:ext uri="{0D108BD9-81ED-4DB2-BD59-A6C34878D82A}">
-                    <a16:rowId xmlns:a16="http://schemas.microsoft.com/office/drawing/2014/main" val="1574768575"/>
-                  </a:ext>
-                </a:extLst>
-              </a:tr>
-              <a:tr h="297341">
-                <a:tc>
-                  <a:txBody>
-                    <a:bodyPr/>
-                    <a:lstStyle/>
-                    <a:p>
-                      <a:pPr algn="ctr" rtl="0" fontAlgn="b"/>
-                      <a:r>
-                        <a:rPr lang="en-US" sz="1700" dirty="0">
-                          <a:effectLst/>
-                        </a:rPr>
-                        <a:t>9</a:t>
-                      </a:r>
-                    </a:p>
-                  </a:txBody>
-                  <a:tcPr marL="27196" marR="27196" marT="18131" marB="18131" anchor="b">
-                    <a:lnL w="12700" cap="flat" cmpd="sng" algn="ctr">
-                      <a:solidFill>
-                        <a:schemeClr val="tx1"/>
-                      </a:solidFill>
-                      <a:prstDash val="solid"/>
-                      <a:round/>
-                      <a:headEnd type="none" w="med" len="med"/>
-                      <a:tailEnd type="none" w="med" len="med"/>
-                    </a:lnL>
-                    <a:lnR w="9525" cap="flat" cmpd="sng" algn="ctr">
-                      <a:noFill/>
-                      <a:prstDash val="solid"/>
-                      <a:round/>
-                      <a:headEnd type="none" w="med" len="med"/>
-                      <a:tailEnd type="none" w="med" len="med"/>
-                    </a:lnR>
-                    <a:lnT w="12700" cap="flat" cmpd="sng" algn="ctr">
-                      <a:solidFill>
-                        <a:schemeClr val="tx1"/>
-                      </a:solidFill>
-                      <a:prstDash val="solid"/>
-                      <a:round/>
-                      <a:headEnd type="none" w="med" len="med"/>
-                      <a:tailEnd type="none" w="med" len="med"/>
-                    </a:lnT>
-                    <a:lnB w="12700" cap="flat" cmpd="sng" algn="ctr">
-                      <a:solidFill>
-                        <a:schemeClr val="tx1"/>
-                      </a:solidFill>
-                      <a:prstDash val="solid"/>
-                      <a:round/>
-                      <a:headEnd type="none" w="med" len="med"/>
-                      <a:tailEnd type="none" w="med" len="med"/>
-                    </a:lnB>
-                    <a:lnTlToBr w="12700" cmpd="sng">
-                      <a:noFill/>
-                      <a:prstDash val="solid"/>
-                    </a:lnTlToBr>
-                    <a:lnBlToTr w="12700" cmpd="sng">
-                      <a:noFill/>
-                      <a:prstDash val="solid"/>
-                    </a:lnBlToTr>
-                    <a:noFill/>
-                  </a:tcPr>
-                </a:tc>
-                <a:tc>
-                  <a:txBody>
-                    <a:bodyPr/>
-                    <a:lstStyle/>
-                    <a:p>
-                      <a:pPr rtl="0" fontAlgn="b"/>
-                      <a:r>
-                        <a:rPr lang="en-US" sz="1700" dirty="0">
-                          <a:effectLst/>
-                        </a:rPr>
-                        <a:t>Bonus problem</a:t>
-                      </a:r>
-                    </a:p>
-                  </a:txBody>
-                  <a:tcPr marL="27196" marR="27196" marT="18131" marB="18131" anchor="b">
-                    <a:lnL w="9525" cap="flat" cmpd="sng" algn="ctr">
-                      <a:noFill/>
-                      <a:prstDash val="solid"/>
-                      <a:round/>
-                      <a:headEnd type="none" w="med" len="med"/>
-                      <a:tailEnd type="none" w="med" len="med"/>
-                    </a:lnL>
-                    <a:lnR w="9525" cap="flat" cmpd="sng" algn="ctr">
-                      <a:noFill/>
-                      <a:prstDash val="solid"/>
-                      <a:round/>
-                      <a:headEnd type="none" w="med" len="med"/>
-                      <a:tailEnd type="none" w="med" len="med"/>
-                    </a:lnR>
-                    <a:lnT w="12700" cap="flat" cmpd="sng" algn="ctr">
-                      <a:solidFill>
-                        <a:schemeClr val="tx1"/>
-                      </a:solidFill>
-                      <a:prstDash val="solid"/>
-                      <a:round/>
-                      <a:headEnd type="none" w="med" len="med"/>
-                      <a:tailEnd type="none" w="med" len="med"/>
-                    </a:lnT>
-                    <a:lnB w="12700" cap="flat" cmpd="sng" algn="ctr">
-                      <a:solidFill>
-                        <a:schemeClr val="tx1"/>
-                      </a:solidFill>
-                      <a:prstDash val="solid"/>
-                      <a:round/>
-                      <a:headEnd type="none" w="med" len="med"/>
-                      <a:tailEnd type="none" w="med" len="med"/>
-                    </a:lnB>
-                    <a:lnTlToBr w="12700" cmpd="sng">
-                      <a:noFill/>
-                      <a:prstDash val="solid"/>
-                    </a:lnTlToBr>
-                    <a:lnBlToTr w="12700" cmpd="sng">
-                      <a:noFill/>
-                      <a:prstDash val="solid"/>
-                    </a:lnBlToTr>
-                    <a:noFill/>
-                  </a:tcPr>
-                </a:tc>
-                <a:tc>
-                  <a:txBody>
-                    <a:bodyPr/>
-                    <a:lstStyle/>
-                    <a:p>
-                      <a:pPr algn="r" rtl="0" fontAlgn="b"/>
-                      <a:r>
-                        <a:rPr lang="en-US" sz="1700" dirty="0">
-                          <a:effectLst/>
-                        </a:rPr>
-                        <a:t>100</a:t>
-                      </a:r>
-                    </a:p>
-                  </a:txBody>
-                  <a:tcPr marL="27196" marR="27196" marT="18131" marB="18131" anchor="b">
-                    <a:lnL w="9525" cap="flat" cmpd="sng" algn="ctr">
-                      <a:noFill/>
-                      <a:prstDash val="solid"/>
-                      <a:round/>
-                      <a:headEnd type="none" w="med" len="med"/>
-                      <a:tailEnd type="none" w="med" len="med"/>
-                    </a:lnL>
-                    <a:lnR w="12700" cap="flat" cmpd="sng" algn="ctr">
-                      <a:solidFill>
-                        <a:schemeClr val="tx1"/>
-                      </a:solidFill>
-                      <a:prstDash val="solid"/>
-                      <a:round/>
-                      <a:headEnd type="none" w="med" len="med"/>
-                      <a:tailEnd type="none" w="med" len="med"/>
-                    </a:lnR>
-                    <a:lnT w="12700" cap="flat" cmpd="sng" algn="ctr">
-                      <a:solidFill>
-                        <a:schemeClr val="tx1"/>
-                      </a:solidFill>
-                      <a:prstDash val="solid"/>
-                      <a:round/>
-                      <a:headEnd type="none" w="med" len="med"/>
-                      <a:tailEnd type="none" w="med" len="med"/>
-                    </a:lnT>
-                    <a:lnB w="12700" cap="flat" cmpd="sng" algn="ctr">
-                      <a:solidFill>
-                        <a:schemeClr val="tx1"/>
-                      </a:solidFill>
-                      <a:prstDash val="solid"/>
-                      <a:round/>
-                      <a:headEnd type="none" w="med" len="med"/>
-                      <a:tailEnd type="none" w="med" len="med"/>
-                    </a:lnB>
-                    <a:lnTlToBr w="12700" cmpd="sng">
-                      <a:noFill/>
-                      <a:prstDash val="solid"/>
-                    </a:lnTlToBr>
-                    <a:lnBlToTr w="12700" cmpd="sng">
-                      <a:noFill/>
-                      <a:prstDash val="solid"/>
-                    </a:lnBlToTr>
-                    <a:noFill/>
-                  </a:tcPr>
-                </a:tc>
-                <a:extLst>
-                  <a:ext uri="{0D108BD9-81ED-4DB2-BD59-A6C34878D82A}">
-                    <a16:rowId xmlns:a16="http://schemas.microsoft.com/office/drawing/2014/main" val="815773450"/>
-                  </a:ext>
-                </a:extLst>
-              </a:tr>
-              <a:tr h="297341">
-                <a:tc>
-                  <a:txBody>
-                    <a:bodyPr/>
-                    <a:lstStyle/>
-                    <a:p>
-                      <a:pPr algn="ctr" rtl="0" fontAlgn="b"/>
-                      <a:r>
-                        <a:rPr lang="en-US" sz="1700" dirty="0">
-                          <a:effectLst/>
-                        </a:rPr>
-                        <a:t>10</a:t>
-                      </a:r>
-                    </a:p>
-                  </a:txBody>
-                  <a:tcPr marL="27196" marR="27196" marT="18131" marB="18131" anchor="b">
-                    <a:lnL w="12700" cap="flat" cmpd="sng" algn="ctr">
-                      <a:solidFill>
-                        <a:schemeClr val="tx1"/>
-                      </a:solidFill>
-                      <a:prstDash val="solid"/>
-                      <a:round/>
-                      <a:headEnd type="none" w="med" len="med"/>
-                      <a:tailEnd type="none" w="med" len="med"/>
-                    </a:lnL>
-                    <a:lnR w="9525" cap="flat" cmpd="sng" algn="ctr">
-                      <a:noFill/>
-                      <a:prstDash val="solid"/>
-                      <a:round/>
-                      <a:headEnd type="none" w="med" len="med"/>
-                      <a:tailEnd type="none" w="med" len="med"/>
-                    </a:lnR>
-                    <a:lnT w="12700" cap="flat" cmpd="sng" algn="ctr">
-                      <a:solidFill>
-                        <a:schemeClr val="tx1"/>
-                      </a:solidFill>
-                      <a:prstDash val="solid"/>
-                      <a:round/>
-                      <a:headEnd type="none" w="med" len="med"/>
-                      <a:tailEnd type="none" w="med" len="med"/>
-                    </a:lnT>
-                    <a:lnB w="12700" cap="flat" cmpd="sng" algn="ctr">
-                      <a:solidFill>
-                        <a:schemeClr val="tx1"/>
-                      </a:solidFill>
-                      <a:prstDash val="solid"/>
-                      <a:round/>
-                      <a:headEnd type="none" w="med" len="med"/>
-                      <a:tailEnd type="none" w="med" len="med"/>
-                    </a:lnB>
-                    <a:lnTlToBr w="12700" cmpd="sng">
-                      <a:noFill/>
-                      <a:prstDash val="solid"/>
-                    </a:lnTlToBr>
-                    <a:lnBlToTr w="12700" cmpd="sng">
-                      <a:noFill/>
-                      <a:prstDash val="solid"/>
-                    </a:lnBlToTr>
-                    <a:noFill/>
-                  </a:tcPr>
-                </a:tc>
-                <a:tc>
-                  <a:txBody>
-                    <a:bodyPr/>
-                    <a:lstStyle/>
-                    <a:p>
-                      <a:pPr rtl="0" fontAlgn="b"/>
-                      <a:r>
-                        <a:rPr lang="en-US" sz="1700">
-                          <a:effectLst/>
-                        </a:rPr>
-                        <a:t>- </a:t>
-                      </a:r>
-                    </a:p>
-                  </a:txBody>
-                  <a:tcPr marL="27196" marR="27196" marT="18131" marB="18131" anchor="b">
-                    <a:lnL w="9525" cap="flat" cmpd="sng" algn="ctr">
-                      <a:noFill/>
-                      <a:prstDash val="solid"/>
-                      <a:round/>
-                      <a:headEnd type="none" w="med" len="med"/>
-                      <a:tailEnd type="none" w="med" len="med"/>
-                    </a:lnL>
-                    <a:lnR w="9525" cap="flat" cmpd="sng" algn="ctr">
-                      <a:noFill/>
-                      <a:prstDash val="solid"/>
-                      <a:round/>
-                      <a:headEnd type="none" w="med" len="med"/>
-                      <a:tailEnd type="none" w="med" len="med"/>
-                    </a:lnR>
-                    <a:lnT w="12700" cap="flat" cmpd="sng" algn="ctr">
-                      <a:solidFill>
-                        <a:schemeClr val="tx1"/>
-                      </a:solidFill>
-                      <a:prstDash val="solid"/>
-                      <a:round/>
-                      <a:headEnd type="none" w="med" len="med"/>
-                      <a:tailEnd type="none" w="med" len="med"/>
-                    </a:lnT>
-                    <a:lnB w="12700" cap="flat" cmpd="sng" algn="ctr">
-                      <a:solidFill>
-                        <a:schemeClr val="tx1"/>
-                      </a:solidFill>
-                      <a:prstDash val="solid"/>
-                      <a:round/>
-                      <a:headEnd type="none" w="med" len="med"/>
-                      <a:tailEnd type="none" w="med" len="med"/>
-                    </a:lnB>
-                    <a:lnTlToBr w="12700" cmpd="sng">
-                      <a:noFill/>
-                      <a:prstDash val="solid"/>
-                    </a:lnTlToBr>
-                    <a:lnBlToTr w="12700" cmpd="sng">
-                      <a:noFill/>
-                      <a:prstDash val="solid"/>
-                    </a:lnBlToTr>
-                    <a:noFill/>
-                  </a:tcPr>
-                </a:tc>
-                <a:tc>
-                  <a:txBody>
-                    <a:bodyPr/>
-                    <a:lstStyle/>
-                    <a:p>
-                      <a:pPr algn="r" rtl="0" fontAlgn="b"/>
-                      <a:r>
-                        <a:rPr lang="en-US" sz="1700" dirty="0">
-                          <a:effectLst/>
-                        </a:rPr>
-                        <a:t>-</a:t>
-                      </a:r>
-                    </a:p>
-                  </a:txBody>
-                  <a:tcPr marL="27196" marR="27196" marT="18131" marB="18131" anchor="b">
-                    <a:lnL w="9525" cap="flat" cmpd="sng" algn="ctr">
-                      <a:noFill/>
-                      <a:prstDash val="solid"/>
-                      <a:round/>
-                      <a:headEnd type="none" w="med" len="med"/>
-                      <a:tailEnd type="none" w="med" len="med"/>
-                    </a:lnL>
-                    <a:lnR w="12700" cap="flat" cmpd="sng" algn="ctr">
-                      <a:solidFill>
-                        <a:schemeClr val="tx1"/>
-                      </a:solidFill>
-                      <a:prstDash val="solid"/>
-                      <a:round/>
-                      <a:headEnd type="none" w="med" len="med"/>
-                      <a:tailEnd type="none" w="med" len="med"/>
-                    </a:lnR>
-                    <a:lnT w="12700" cap="flat" cmpd="sng" algn="ctr">
-                      <a:solidFill>
-                        <a:schemeClr val="tx1"/>
-                      </a:solidFill>
-                      <a:prstDash val="solid"/>
-                      <a:round/>
-                      <a:headEnd type="none" w="med" len="med"/>
-                      <a:tailEnd type="none" w="med" len="med"/>
-                    </a:lnT>
-                    <a:lnB w="12700" cap="flat" cmpd="sng" algn="ctr">
-                      <a:solidFill>
-                        <a:schemeClr val="tx1"/>
-                      </a:solidFill>
-                      <a:prstDash val="solid"/>
-                      <a:round/>
-                      <a:headEnd type="none" w="med" len="med"/>
-                      <a:tailEnd type="none" w="med" len="med"/>
-                    </a:lnB>
-                    <a:lnTlToBr w="12700" cmpd="sng">
-                      <a:noFill/>
-                      <a:prstDash val="solid"/>
-                    </a:lnTlToBr>
-                    <a:lnBlToTr w="12700" cmpd="sng">
-                      <a:noFill/>
-                      <a:prstDash val="solid"/>
-                    </a:lnBlToTr>
-                    <a:noFill/>
-                  </a:tcPr>
-                </a:tc>
-                <a:extLst>
-                  <a:ext uri="{0D108BD9-81ED-4DB2-BD59-A6C34878D82A}">
-                    <a16:rowId xmlns:a16="http://schemas.microsoft.com/office/drawing/2014/main" val="2707081764"/>
-                  </a:ext>
-                </a:extLst>
-              </a:tr>
-              <a:tr h="297341">
-                <a:tc>
-                  <a:txBody>
-                    <a:bodyPr/>
-                    <a:lstStyle/>
-                    <a:p>
-                      <a:pPr algn="ctr" rtl="0" fontAlgn="b"/>
-                      <a:endParaRPr lang="en-US" sz="1700" dirty="0">
-                        <a:effectLst/>
-                      </a:endParaRPr>
-                    </a:p>
-                  </a:txBody>
-                  <a:tcPr marL="27196" marR="27196" marT="18131" marB="18131" anchor="b">
-                    <a:lnL w="12700" cap="flat" cmpd="sng" algn="ctr">
-                      <a:solidFill>
-                        <a:schemeClr val="tx1"/>
-                      </a:solidFill>
-                      <a:prstDash val="solid"/>
-                      <a:round/>
-                      <a:headEnd type="none" w="med" len="med"/>
-                      <a:tailEnd type="none" w="med" len="med"/>
-                    </a:lnL>
-                    <a:lnR w="9525" cap="flat" cmpd="sng" algn="ctr">
-                      <a:noFill/>
-                      <a:prstDash val="solid"/>
-                      <a:round/>
-                      <a:headEnd type="none" w="med" len="med"/>
-                      <a:tailEnd type="none" w="med" len="med"/>
-                    </a:lnR>
-                    <a:lnT w="12700" cap="flat" cmpd="sng" algn="ctr">
-                      <a:solidFill>
-                        <a:schemeClr val="tx1"/>
-                      </a:solidFill>
-                      <a:prstDash val="solid"/>
-                      <a:round/>
-                      <a:headEnd type="none" w="med" len="med"/>
-                      <a:tailEnd type="none" w="med" len="med"/>
-                    </a:lnT>
-                    <a:lnB w="12700" cap="flat" cmpd="sng" algn="ctr">
-                      <a:solidFill>
-                        <a:schemeClr val="tx1"/>
-                      </a:solidFill>
-                      <a:prstDash val="solid"/>
-                      <a:round/>
-                      <a:headEnd type="none" w="med" len="med"/>
-                      <a:tailEnd type="none" w="med" len="med"/>
-                    </a:lnB>
-                    <a:lnTlToBr w="12700" cmpd="sng">
-                      <a:noFill/>
-                      <a:prstDash val="solid"/>
-                    </a:lnTlToBr>
-                    <a:lnBlToTr w="12700" cmpd="sng">
-                      <a:noFill/>
-                      <a:prstDash val="solid"/>
-                    </a:lnBlToTr>
-                    <a:noFill/>
-                  </a:tcPr>
-                </a:tc>
-                <a:tc>
-                  <a:txBody>
-                    <a:bodyPr/>
-                    <a:lstStyle/>
-                    <a:p>
-                      <a:pPr rtl="0" fontAlgn="b"/>
-                      <a:endParaRPr lang="en-US" sz="1700" dirty="0">
-                        <a:effectLst/>
-                      </a:endParaRPr>
-                    </a:p>
-                  </a:txBody>
-                  <a:tcPr marL="27196" marR="27196" marT="18131" marB="18131" anchor="b">
-                    <a:lnL w="9525" cap="flat" cmpd="sng" algn="ctr">
-                      <a:noFill/>
-                      <a:prstDash val="solid"/>
-                      <a:round/>
-                      <a:headEnd type="none" w="med" len="med"/>
-                      <a:tailEnd type="none" w="med" len="med"/>
-                    </a:lnL>
-                    <a:lnR w="9525" cap="flat" cmpd="sng" algn="ctr">
-                      <a:noFill/>
-                      <a:prstDash val="solid"/>
-                      <a:round/>
-                      <a:headEnd type="none" w="med" len="med"/>
-                      <a:tailEnd type="none" w="med" len="med"/>
-                    </a:lnR>
-                    <a:lnT w="12700" cap="flat" cmpd="sng" algn="ctr">
-                      <a:solidFill>
-                        <a:schemeClr val="tx1"/>
-                      </a:solidFill>
-                      <a:prstDash val="solid"/>
-                      <a:round/>
-                      <a:headEnd type="none" w="med" len="med"/>
-                      <a:tailEnd type="none" w="med" len="med"/>
-                    </a:lnT>
-                    <a:lnB w="12700" cap="flat" cmpd="sng" algn="ctr">
-                      <a:solidFill>
-                        <a:schemeClr val="tx1"/>
-                      </a:solidFill>
-                      <a:prstDash val="solid"/>
-                      <a:round/>
-                      <a:headEnd type="none" w="med" len="med"/>
-                      <a:tailEnd type="none" w="med" len="med"/>
-                    </a:lnB>
-                    <a:lnTlToBr w="12700" cmpd="sng">
-                      <a:noFill/>
-                      <a:prstDash val="solid"/>
-                    </a:lnTlToBr>
-                    <a:lnBlToTr w="12700" cmpd="sng">
-                      <a:noFill/>
-                      <a:prstDash val="solid"/>
-                    </a:lnBlToTr>
-                    <a:noFill/>
-                  </a:tcPr>
-                </a:tc>
-                <a:tc>
-                  <a:txBody>
-                    <a:bodyPr/>
-                    <a:lstStyle/>
-                    <a:p>
-                      <a:pPr algn="r" rtl="0" fontAlgn="b"/>
-                      <a:endParaRPr lang="en-US" sz="1700" dirty="0">
-                        <a:effectLst/>
-                      </a:endParaRPr>
-                    </a:p>
-                  </a:txBody>
-                  <a:tcPr marL="27196" marR="27196" marT="18131" marB="18131" anchor="b">
-                    <a:lnL w="9525" cap="flat" cmpd="sng" algn="ctr">
-                      <a:noFill/>
-                      <a:prstDash val="solid"/>
-                      <a:round/>
-                      <a:headEnd type="none" w="med" len="med"/>
-                      <a:tailEnd type="none" w="med" len="med"/>
-                    </a:lnL>
-                    <a:lnR w="12700" cap="flat" cmpd="sng" algn="ctr">
-                      <a:solidFill>
-                        <a:schemeClr val="tx1"/>
-                      </a:solidFill>
-                      <a:prstDash val="solid"/>
-                      <a:round/>
-                      <a:headEnd type="none" w="med" len="med"/>
-                      <a:tailEnd type="none" w="med" len="med"/>
-                    </a:lnR>
-                    <a:lnT w="12700" cap="flat" cmpd="sng" algn="ctr">
-                      <a:solidFill>
-                        <a:schemeClr val="tx1"/>
-                      </a:solidFill>
-                      <a:prstDash val="solid"/>
-                      <a:round/>
-                      <a:headEnd type="none" w="med" len="med"/>
-                      <a:tailEnd type="none" w="med" len="med"/>
-                    </a:lnT>
-                    <a:lnB w="12700" cap="flat" cmpd="sng" algn="ctr">
-                      <a:solidFill>
-                        <a:schemeClr val="tx1"/>
-                      </a:solidFill>
-                      <a:prstDash val="solid"/>
-                      <a:round/>
-                      <a:headEnd type="none" w="med" len="med"/>
-                      <a:tailEnd type="none" w="med" len="med"/>
-                    </a:lnB>
-                    <a:lnTlToBr w="12700" cmpd="sng">
-                      <a:noFill/>
-                      <a:prstDash val="solid"/>
-                    </a:lnTlToBr>
-                    <a:lnBlToTr w="12700" cmpd="sng">
-                      <a:noFill/>
-                      <a:prstDash val="solid"/>
-                    </a:lnBlToTr>
-                    <a:noFill/>
-                  </a:tcPr>
-                </a:tc>
-                <a:extLst>
-                  <a:ext uri="{0D108BD9-81ED-4DB2-BD59-A6C34878D82A}">
-                    <a16:rowId xmlns:a16="http://schemas.microsoft.com/office/drawing/2014/main" val="2219228106"/>
-                  </a:ext>
-                </a:extLst>
-              </a:tr>
-            </a:tbl>
-          </a:graphicData>
-        </a:graphic>
-      </p:graphicFrame>
-      <p:sp>
-        <p:nvSpPr>
-          <p:cNvPr id="6" name="TextBox 5">
-            <a:extLst>
-              <a:ext uri="{FF2B5EF4-FFF2-40B4-BE49-F238E27FC236}">
-                <a16:creationId xmlns:a16="http://schemas.microsoft.com/office/drawing/2014/main" id="{8604BBA6-5976-78DF-D6A6-5F7224D79B41}"/>
-              </a:ext>
-            </a:extLst>
-          </p:cNvPr>
-          <p:cNvSpPr txBox="1"/>
-          <p:nvPr/>
-        </p:nvSpPr>
-        <p:spPr>
-          <a:xfrm>
-            <a:off x="533400" y="1662979"/>
-            <a:ext cx="3810000" cy="461665"/>
-          </a:xfrm>
-          <a:prstGeom prst="rect">
-            <a:avLst/>
-          </a:prstGeom>
-          <a:noFill/>
-        </p:spPr>
-        <p:txBody>
-          <a:bodyPr wrap="square" rtlCol="0">
-            <a:spAutoFit/>
-          </a:bodyPr>
-          <a:lstStyle/>
-          <a:p>
-            <a:r>
-              <a:rPr lang="en-US" sz="2400" i="1" baseline="30000" dirty="0"/>
-              <a:t>* </a:t>
-            </a:r>
-            <a:r>
-              <a:rPr lang="en-US" sz="2400" i="1" dirty="0"/>
-              <a:t>Subject to minor changes </a:t>
-            </a:r>
-          </a:p>
-        </p:txBody>
-      </p:sp>
-    </p:spTree>
-    <p:extLst>
-      <p:ext uri="{BB962C8B-B14F-4D97-AF65-F5344CB8AC3E}">
-        <p14:creationId xmlns:p14="http://schemas.microsoft.com/office/powerpoint/2010/main" val="1685981324"/>
       </p:ext>
     </p:extLst>
   </p:cSld>
@@ -7977,7 +7971,7 @@
         </p:nvSpPr>
         <p:spPr>
           <a:xfrm>
-            <a:off x="3624053" y="4926363"/>
+            <a:off x="3632559" y="4972660"/>
             <a:ext cx="1832694" cy="369332"/>
           </a:xfrm>
           <a:prstGeom prst="rect">
@@ -8022,7 +8016,7 @@
         </p:nvSpPr>
         <p:spPr>
           <a:xfrm>
-            <a:off x="1049653" y="4939155"/>
+            <a:off x="1063371" y="4972660"/>
             <a:ext cx="1832694" cy="369332"/>
           </a:xfrm>
           <a:prstGeom prst="rect">
@@ -8061,7 +8055,7 @@
         </p:nvSpPr>
         <p:spPr>
           <a:xfrm>
-            <a:off x="8809820" y="4926363"/>
+            <a:off x="8809853" y="4972660"/>
             <a:ext cx="1832694" cy="369332"/>
           </a:xfrm>
           <a:prstGeom prst="rect">
@@ -8147,7 +8141,7 @@
         </p:nvSpPr>
         <p:spPr>
           <a:xfrm>
-            <a:off x="6198453" y="4927427"/>
+            <a:off x="6184735" y="4972660"/>
             <a:ext cx="2012461" cy="369332"/>
           </a:xfrm>
           <a:prstGeom prst="rect">
@@ -8220,6 +8214,157 @@
 </file>
 
 <file path=ppt/slides/slide3.xml><?xml version="1.0" encoding="utf-8"?>
+<p:sld xmlns:a="http://schemas.openxmlformats.org/drawingml/2006/main" xmlns:r="http://schemas.openxmlformats.org/officeDocument/2006/relationships" xmlns:p="http://schemas.openxmlformats.org/presentationml/2006/main">
+  <p:cSld>
+    <p:spTree>
+      <p:nvGrpSpPr>
+        <p:cNvPr id="1" name="">
+          <a:extLst>
+            <a:ext uri="{FF2B5EF4-FFF2-40B4-BE49-F238E27FC236}">
+              <a16:creationId xmlns:a16="http://schemas.microsoft.com/office/drawing/2014/main" id="{34795911-05F4-88B5-7A30-1831EBD78B57}"/>
+            </a:ext>
+          </a:extLst>
+        </p:cNvPr>
+        <p:cNvGrpSpPr/>
+        <p:nvPr/>
+      </p:nvGrpSpPr>
+      <p:grpSpPr>
+        <a:xfrm>
+          <a:off x="0" y="0"/>
+          <a:ext cx="0" cy="0"/>
+          <a:chOff x="0" y="0"/>
+          <a:chExt cx="0" cy="0"/>
+        </a:xfrm>
+      </p:grpSpPr>
+      <p:sp>
+        <p:nvSpPr>
+          <p:cNvPr id="2" name="Title 1">
+            <a:extLst>
+              <a:ext uri="{FF2B5EF4-FFF2-40B4-BE49-F238E27FC236}">
+                <a16:creationId xmlns:a16="http://schemas.microsoft.com/office/drawing/2014/main" id="{BAC46D72-12E8-2350-2448-6D44D32ED18D}"/>
+              </a:ext>
+            </a:extLst>
+          </p:cNvPr>
+          <p:cNvSpPr>
+            <a:spLocks noGrp="1"/>
+          </p:cNvSpPr>
+          <p:nvPr>
+            <p:ph type="title"/>
+          </p:nvPr>
+        </p:nvSpPr>
+        <p:spPr/>
+        <p:txBody>
+          <a:bodyPr/>
+          <a:lstStyle/>
+          <a:p>
+            <a:r>
+              <a:rPr lang="en-US" dirty="0">
+                <a:solidFill>
+                  <a:schemeClr val="tx2">
+                    <a:lumMod val="90000"/>
+                    <a:lumOff val="10000"/>
+                  </a:schemeClr>
+                </a:solidFill>
+              </a:rPr>
+              <a:t>Schedule</a:t>
+            </a:r>
+          </a:p>
+        </p:txBody>
+      </p:sp>
+      <p:sp>
+        <p:nvSpPr>
+          <p:cNvPr id="3" name="Content Placeholder 2">
+            <a:extLst>
+              <a:ext uri="{FF2B5EF4-FFF2-40B4-BE49-F238E27FC236}">
+                <a16:creationId xmlns:a16="http://schemas.microsoft.com/office/drawing/2014/main" id="{E366E496-D9A6-083F-4054-3B52E6289AF5}"/>
+              </a:ext>
+            </a:extLst>
+          </p:cNvPr>
+          <p:cNvSpPr>
+            <a:spLocks noGrp="1"/>
+          </p:cNvSpPr>
+          <p:nvPr>
+            <p:ph idx="1"/>
+          </p:nvPr>
+        </p:nvSpPr>
+        <p:spPr>
+          <a:xfrm>
+            <a:off x="838200" y="1825625"/>
+            <a:ext cx="10668000" cy="4351338"/>
+          </a:xfrm>
+        </p:spPr>
+        <p:txBody>
+          <a:bodyPr>
+            <a:normAutofit/>
+          </a:bodyPr>
+          <a:lstStyle/>
+          <a:p>
+            <a:pPr>
+              <a:buFont typeface="Arial" panose="020B0604020202020204" pitchFamily="34" charset="0"/>
+              <a:buChar char="•"/>
+            </a:pPr>
+            <a:r>
+              <a:rPr lang="en-US" sz="3200" dirty="0"/>
+              <a:t>Lectures:	Mon &amp; Wed	9:30-10:45 AM 	(BH 1424)</a:t>
+            </a:r>
+          </a:p>
+          <a:p>
+            <a:pPr>
+              <a:buFont typeface="Arial" panose="020B0604020202020204" pitchFamily="34" charset="0"/>
+              <a:buChar char="•"/>
+            </a:pPr>
+            <a:r>
+              <a:rPr lang="en-US" sz="3200" dirty="0"/>
+              <a:t>Lab:		Wed 			1-2:20 PM 	(BH 3022A)</a:t>
+            </a:r>
+          </a:p>
+          <a:p>
+            <a:pPr>
+              <a:buFont typeface="Arial" panose="020B0604020202020204" pitchFamily="34" charset="0"/>
+              <a:buChar char="•"/>
+            </a:pPr>
+            <a:endParaRPr lang="en-US" sz="3200" dirty="0"/>
+          </a:p>
+          <a:p>
+            <a:pPr>
+              <a:buFont typeface="Arial" panose="020B0604020202020204" pitchFamily="34" charset="0"/>
+              <a:buChar char="•"/>
+            </a:pPr>
+            <a:r>
+              <a:rPr lang="en-US" sz="3200" dirty="0"/>
+              <a:t>Office hours:</a:t>
+            </a:r>
+          </a:p>
+          <a:p>
+            <a:pPr lvl="1"/>
+            <a:r>
+              <a:rPr lang="en-US" sz="2800" dirty="0"/>
+              <a:t>Greg &amp; Julien:	Mon after class</a:t>
+            </a:r>
+          </a:p>
+          <a:p>
+            <a:pPr lvl="1"/>
+            <a:r>
+              <a:rPr lang="en-US" sz="2800" dirty="0"/>
+              <a:t>Annie:  			Wed after class</a:t>
+            </a:r>
+          </a:p>
+        </p:txBody>
+      </p:sp>
+    </p:spTree>
+    <p:extLst>
+      <p:ext uri="{BB962C8B-B14F-4D97-AF65-F5344CB8AC3E}">
+        <p14:creationId xmlns:p14="http://schemas.microsoft.com/office/powerpoint/2010/main" val="2244814896"/>
+      </p:ext>
+    </p:extLst>
+  </p:cSld>
+  <p:clrMapOvr>
+    <a:masterClrMapping/>
+  </p:clrMapOvr>
+</p:sld>
+</file>
+
+<file path=ppt/slides/slide4.xml><?xml version="1.0" encoding="utf-8"?>
 <p:sld xmlns:a="http://schemas.openxmlformats.org/drawingml/2006/main" xmlns:r="http://schemas.openxmlformats.org/officeDocument/2006/relationships" xmlns:p="http://schemas.openxmlformats.org/presentationml/2006/main">
   <p:cSld>
     <p:spTree>
@@ -8351,157 +8496,6 @@
     <p:extLst>
       <p:ext uri="{BB962C8B-B14F-4D97-AF65-F5344CB8AC3E}">
         <p14:creationId xmlns:p14="http://schemas.microsoft.com/office/powerpoint/2010/main" val="366038853"/>
-      </p:ext>
-    </p:extLst>
-  </p:cSld>
-  <p:clrMapOvr>
-    <a:masterClrMapping/>
-  </p:clrMapOvr>
-</p:sld>
-</file>
-
-<file path=ppt/slides/slide4.xml><?xml version="1.0" encoding="utf-8"?>
-<p:sld xmlns:a="http://schemas.openxmlformats.org/drawingml/2006/main" xmlns:r="http://schemas.openxmlformats.org/officeDocument/2006/relationships" xmlns:p="http://schemas.openxmlformats.org/presentationml/2006/main">
-  <p:cSld>
-    <p:spTree>
-      <p:nvGrpSpPr>
-        <p:cNvPr id="1" name="">
-          <a:extLst>
-            <a:ext uri="{FF2B5EF4-FFF2-40B4-BE49-F238E27FC236}">
-              <a16:creationId xmlns:a16="http://schemas.microsoft.com/office/drawing/2014/main" id="{34795911-05F4-88B5-7A30-1831EBD78B57}"/>
-            </a:ext>
-          </a:extLst>
-        </p:cNvPr>
-        <p:cNvGrpSpPr/>
-        <p:nvPr/>
-      </p:nvGrpSpPr>
-      <p:grpSpPr>
-        <a:xfrm>
-          <a:off x="0" y="0"/>
-          <a:ext cx="0" cy="0"/>
-          <a:chOff x="0" y="0"/>
-          <a:chExt cx="0" cy="0"/>
-        </a:xfrm>
-      </p:grpSpPr>
-      <p:sp>
-        <p:nvSpPr>
-          <p:cNvPr id="2" name="Title 1">
-            <a:extLst>
-              <a:ext uri="{FF2B5EF4-FFF2-40B4-BE49-F238E27FC236}">
-                <a16:creationId xmlns:a16="http://schemas.microsoft.com/office/drawing/2014/main" id="{BAC46D72-12E8-2350-2448-6D44D32ED18D}"/>
-              </a:ext>
-            </a:extLst>
-          </p:cNvPr>
-          <p:cNvSpPr>
-            <a:spLocks noGrp="1"/>
-          </p:cNvSpPr>
-          <p:nvPr>
-            <p:ph type="title"/>
-          </p:nvPr>
-        </p:nvSpPr>
-        <p:spPr/>
-        <p:txBody>
-          <a:bodyPr/>
-          <a:lstStyle/>
-          <a:p>
-            <a:r>
-              <a:rPr lang="en-US" dirty="0">
-                <a:solidFill>
-                  <a:schemeClr val="tx2">
-                    <a:lumMod val="90000"/>
-                    <a:lumOff val="10000"/>
-                  </a:schemeClr>
-                </a:solidFill>
-              </a:rPr>
-              <a:t>Schedule</a:t>
-            </a:r>
-          </a:p>
-        </p:txBody>
-      </p:sp>
-      <p:sp>
-        <p:nvSpPr>
-          <p:cNvPr id="3" name="Content Placeholder 2">
-            <a:extLst>
-              <a:ext uri="{FF2B5EF4-FFF2-40B4-BE49-F238E27FC236}">
-                <a16:creationId xmlns:a16="http://schemas.microsoft.com/office/drawing/2014/main" id="{E366E496-D9A6-083F-4054-3B52E6289AF5}"/>
-              </a:ext>
-            </a:extLst>
-          </p:cNvPr>
-          <p:cNvSpPr>
-            <a:spLocks noGrp="1"/>
-          </p:cNvSpPr>
-          <p:nvPr>
-            <p:ph idx="1"/>
-          </p:nvPr>
-        </p:nvSpPr>
-        <p:spPr>
-          <a:xfrm>
-            <a:off x="838200" y="1825625"/>
-            <a:ext cx="10668000" cy="4351338"/>
-          </a:xfrm>
-        </p:spPr>
-        <p:txBody>
-          <a:bodyPr>
-            <a:normAutofit/>
-          </a:bodyPr>
-          <a:lstStyle/>
-          <a:p>
-            <a:pPr>
-              <a:buFont typeface="Arial" panose="020B0604020202020204" pitchFamily="34" charset="0"/>
-              <a:buChar char="•"/>
-            </a:pPr>
-            <a:r>
-              <a:rPr lang="en-US" sz="3200" dirty="0"/>
-              <a:t>Lectures:	Mon &amp; Wed	9:30-10:45 AM 	(BH 1424)</a:t>
-            </a:r>
-          </a:p>
-          <a:p>
-            <a:pPr>
-              <a:buFont typeface="Arial" panose="020B0604020202020204" pitchFamily="34" charset="0"/>
-              <a:buChar char="•"/>
-            </a:pPr>
-            <a:r>
-              <a:rPr lang="en-US" sz="3200" dirty="0"/>
-              <a:t>Lab:		Wed 			1-2:20 PM 	(BH 3022A)</a:t>
-            </a:r>
-          </a:p>
-          <a:p>
-            <a:pPr>
-              <a:buFont typeface="Arial" panose="020B0604020202020204" pitchFamily="34" charset="0"/>
-              <a:buChar char="•"/>
-            </a:pPr>
-            <a:endParaRPr lang="en-US" sz="3200" dirty="0"/>
-          </a:p>
-          <a:p>
-            <a:pPr>
-              <a:buFont typeface="Arial" panose="020B0604020202020204" pitchFamily="34" charset="0"/>
-              <a:buChar char="•"/>
-            </a:pPr>
-            <a:r>
-              <a:rPr lang="en-US" sz="3200" dirty="0"/>
-              <a:t>Office hours:</a:t>
-            </a:r>
-          </a:p>
-          <a:p>
-            <a:pPr lvl="1"/>
-            <a:r>
-              <a:rPr lang="en-US" sz="2800" dirty="0"/>
-              <a:t>Greg &amp; Julien:	Mon after class</a:t>
-            </a:r>
-          </a:p>
-          <a:p>
-            <a:pPr lvl="1"/>
-            <a:r>
-              <a:rPr lang="en-US" sz="2800" dirty="0"/>
-              <a:t>Annie:  			Wed after class</a:t>
-            </a:r>
-          </a:p>
-        </p:txBody>
-      </p:sp>
-    </p:spTree>
-    <p:extLst>
-      <p:ext uri="{BB962C8B-B14F-4D97-AF65-F5344CB8AC3E}">
-        <p14:creationId xmlns:p14="http://schemas.microsoft.com/office/powerpoint/2010/main" val="2244814896"/>
       </p:ext>
     </p:extLst>
   </p:cSld>

--- a/modules/week01/eds-213_intro.pptx
+++ b/modules/week01/eds-213_intro.pptx
@@ -210,7 +210,7 @@
           <a:p>
             <a:fld id="{3A4C8354-9C6A-2345-9692-7D07D6D01EC8}" type="datetimeFigureOut">
               <a:rPr lang="en-US" smtClean="0"/>
-              <a:t>3/29/26</a:t>
+              <a:t>3/30/26</a:t>
             </a:fld>
             <a:endParaRPr lang="en-US"/>
           </a:p>
@@ -1322,7 +1322,7 @@
           <a:p>
             <a:fld id="{C094C93D-2F9A-5447-8FDC-662A08F74486}" type="datetimeFigureOut">
               <a:rPr lang="en-US" smtClean="0"/>
-              <a:t>3/29/26</a:t>
+              <a:t>3/30/26</a:t>
             </a:fld>
             <a:endParaRPr lang="en-US"/>
           </a:p>
@@ -1520,7 +1520,7 @@
           <a:p>
             <a:fld id="{C094C93D-2F9A-5447-8FDC-662A08F74486}" type="datetimeFigureOut">
               <a:rPr lang="en-US" smtClean="0"/>
-              <a:t>3/29/26</a:t>
+              <a:t>3/30/26</a:t>
             </a:fld>
             <a:endParaRPr lang="en-US"/>
           </a:p>
@@ -1728,7 +1728,7 @@
           <a:p>
             <a:fld id="{C094C93D-2F9A-5447-8FDC-662A08F74486}" type="datetimeFigureOut">
               <a:rPr lang="en-US" smtClean="0"/>
-              <a:t>3/29/26</a:t>
+              <a:t>3/30/26</a:t>
             </a:fld>
             <a:endParaRPr lang="en-US"/>
           </a:p>
@@ -1926,7 +1926,7 @@
           <a:p>
             <a:fld id="{C094C93D-2F9A-5447-8FDC-662A08F74486}" type="datetimeFigureOut">
               <a:rPr lang="en-US" smtClean="0"/>
-              <a:t>3/29/26</a:t>
+              <a:t>3/30/26</a:t>
             </a:fld>
             <a:endParaRPr lang="en-US"/>
           </a:p>
@@ -2201,7 +2201,7 @@
           <a:p>
             <a:fld id="{C094C93D-2F9A-5447-8FDC-662A08F74486}" type="datetimeFigureOut">
               <a:rPr lang="en-US" smtClean="0"/>
-              <a:t>3/29/26</a:t>
+              <a:t>3/30/26</a:t>
             </a:fld>
             <a:endParaRPr lang="en-US"/>
           </a:p>
@@ -2466,7 +2466,7 @@
           <a:p>
             <a:fld id="{C094C93D-2F9A-5447-8FDC-662A08F74486}" type="datetimeFigureOut">
               <a:rPr lang="en-US" smtClean="0"/>
-              <a:t>3/29/26</a:t>
+              <a:t>3/30/26</a:t>
             </a:fld>
             <a:endParaRPr lang="en-US"/>
           </a:p>
@@ -2878,7 +2878,7 @@
           <a:p>
             <a:fld id="{C094C93D-2F9A-5447-8FDC-662A08F74486}" type="datetimeFigureOut">
               <a:rPr lang="en-US" smtClean="0"/>
-              <a:t>3/29/26</a:t>
+              <a:t>3/30/26</a:t>
             </a:fld>
             <a:endParaRPr lang="en-US"/>
           </a:p>
@@ -3019,7 +3019,7 @@
           <a:p>
             <a:fld id="{C094C93D-2F9A-5447-8FDC-662A08F74486}" type="datetimeFigureOut">
               <a:rPr lang="en-US" smtClean="0"/>
-              <a:t>3/29/26</a:t>
+              <a:t>3/30/26</a:t>
             </a:fld>
             <a:endParaRPr lang="en-US"/>
           </a:p>
@@ -3132,7 +3132,7 @@
           <a:p>
             <a:fld id="{C094C93D-2F9A-5447-8FDC-662A08F74486}" type="datetimeFigureOut">
               <a:rPr lang="en-US" smtClean="0"/>
-              <a:t>3/29/26</a:t>
+              <a:t>3/30/26</a:t>
             </a:fld>
             <a:endParaRPr lang="en-US"/>
           </a:p>
@@ -3443,7 +3443,7 @@
           <a:p>
             <a:fld id="{C094C93D-2F9A-5447-8FDC-662A08F74486}" type="datetimeFigureOut">
               <a:rPr lang="en-US" smtClean="0"/>
-              <a:t>3/29/26</a:t>
+              <a:t>3/30/26</a:t>
             </a:fld>
             <a:endParaRPr lang="en-US"/>
           </a:p>
@@ -3731,7 +3731,7 @@
           <a:p>
             <a:fld id="{C094C93D-2F9A-5447-8FDC-662A08F74486}" type="datetimeFigureOut">
               <a:rPr lang="en-US" smtClean="0"/>
-              <a:t>3/29/26</a:t>
+              <a:t>3/30/26</a:t>
             </a:fld>
             <a:endParaRPr lang="en-US"/>
           </a:p>
@@ -3972,7 +3972,7 @@
           <a:p>
             <a:fld id="{C094C93D-2F9A-5447-8FDC-662A08F74486}" type="datetimeFigureOut">
               <a:rPr lang="en-US" smtClean="0"/>
-              <a:t>3/29/26</a:t>
+              <a:t>3/30/26</a:t>
             </a:fld>
             <a:endParaRPr lang="en-US"/>
           </a:p>
@@ -8346,7 +8346,7 @@
             <a:pPr lvl="1"/>
             <a:r>
               <a:rPr lang="en-US" sz="2800" dirty="0"/>
-              <a:t>Annie:  			Wed after class</a:t>
+              <a:t>Annie:  			Thu 11AM-12PM</a:t>
             </a:r>
           </a:p>
         </p:txBody>

--- a/modules/week01/eds-213_intro.pptx
+++ b/modules/week01/eds-213_intro.pptx
@@ -7565,7 +7565,7 @@
       </p:grpSpPr>
       <p:pic>
         <p:nvPicPr>
-          <p:cNvPr id="92" name="Google Shape;92;p26"/>
+          <p:cNvPr id="92" name="Google Shape;92;p26" descr="Greg’s picture - Instructor"/>
           <p:cNvPicPr preferRelativeResize="0"/>
           <p:nvPr/>
         </p:nvPicPr>
@@ -7670,7 +7670,7 @@
       </p:sp>
       <p:pic>
         <p:nvPicPr>
-          <p:cNvPr id="94" name="Google Shape;94;p26"/>
+          <p:cNvPr id="94" name="Google Shape;94;p26" descr="Julien’s picture - Instructor"/>
           <p:cNvPicPr preferRelativeResize="0"/>
           <p:nvPr/>
         </p:nvPicPr>
@@ -7776,7 +7776,7 @@
       </p:sp>
       <p:pic>
         <p:nvPicPr>
-          <p:cNvPr id="96" name="Google Shape;96;p26"/>
+          <p:cNvPr id="96" name="Google Shape;96;p26" descr="Renata’s picture - Instructor"/>
           <p:cNvPicPr preferRelativeResize="0"/>
           <p:nvPr/>
         </p:nvPicPr>
